--- a/security/hands-on/Security-TD4-cryptography-prime-numbers.pptx
+++ b/security/hands-on/Security-TD4-cryptography-prime-numbers.pptx
@@ -7,14 +7,33 @@
   <p:sldIdLst>
     <p:sldId id="256" r:id="rId2"/>
     <p:sldId id="257" r:id="rId3"/>
-    <p:sldId id="258" r:id="rId4"/>
-    <p:sldId id="259" r:id="rId5"/>
-    <p:sldId id="260" r:id="rId6"/>
-    <p:sldId id="261" r:id="rId7"/>
-    <p:sldId id="262" r:id="rId8"/>
-    <p:sldId id="263" r:id="rId9"/>
-    <p:sldId id="265" r:id="rId10"/>
-    <p:sldId id="264" r:id="rId11"/>
+    <p:sldId id="266" r:id="rId4"/>
+    <p:sldId id="258" r:id="rId5"/>
+    <p:sldId id="268" r:id="rId6"/>
+    <p:sldId id="267" r:id="rId7"/>
+    <p:sldId id="269" r:id="rId8"/>
+    <p:sldId id="259" r:id="rId9"/>
+    <p:sldId id="272" r:id="rId10"/>
+    <p:sldId id="282" r:id="rId11"/>
+    <p:sldId id="270" r:id="rId12"/>
+    <p:sldId id="271" r:id="rId13"/>
+    <p:sldId id="273" r:id="rId14"/>
+    <p:sldId id="260" r:id="rId15"/>
+    <p:sldId id="284" r:id="rId16"/>
+    <p:sldId id="261" r:id="rId17"/>
+    <p:sldId id="262" r:id="rId18"/>
+    <p:sldId id="274" r:id="rId19"/>
+    <p:sldId id="265" r:id="rId20"/>
+    <p:sldId id="276" r:id="rId21"/>
+    <p:sldId id="277" r:id="rId22"/>
+    <p:sldId id="278" r:id="rId23"/>
+    <p:sldId id="279" r:id="rId24"/>
+    <p:sldId id="280" r:id="rId25"/>
+    <p:sldId id="281" r:id="rId26"/>
+    <p:sldId id="275" r:id="rId27"/>
+    <p:sldId id="263" r:id="rId28"/>
+    <p:sldId id="283" r:id="rId29"/>
+    <p:sldId id="264" r:id="rId30"/>
   </p:sldIdLst>
   <p:sldSz cx="12192000" cy="6858000"/>
   <p:notesSz cx="6858000" cy="9144000"/>
@@ -270,7 +289,7 @@
           <a:p>
             <a:fld id="{DDBEF2CB-837B-4387-A0FB-31C1D04DA30F}" type="datetimeFigureOut">
               <a:rPr lang="fr-FR" smtClean="0"/>
-              <a:t>08/03/2025</a:t>
+              <a:t>12/03/2025</a:t>
             </a:fld>
             <a:endParaRPr lang="fr-FR"/>
           </a:p>
@@ -470,7 +489,7 @@
           <a:p>
             <a:fld id="{DDBEF2CB-837B-4387-A0FB-31C1D04DA30F}" type="datetimeFigureOut">
               <a:rPr lang="fr-FR" smtClean="0"/>
-              <a:t>08/03/2025</a:t>
+              <a:t>12/03/2025</a:t>
             </a:fld>
             <a:endParaRPr lang="fr-FR"/>
           </a:p>
@@ -680,7 +699,7 @@
           <a:p>
             <a:fld id="{DDBEF2CB-837B-4387-A0FB-31C1D04DA30F}" type="datetimeFigureOut">
               <a:rPr lang="fr-FR" smtClean="0"/>
-              <a:t>08/03/2025</a:t>
+              <a:t>12/03/2025</a:t>
             </a:fld>
             <a:endParaRPr lang="fr-FR"/>
           </a:p>
@@ -880,7 +899,7 @@
           <a:p>
             <a:fld id="{DDBEF2CB-837B-4387-A0FB-31C1D04DA30F}" type="datetimeFigureOut">
               <a:rPr lang="fr-FR" smtClean="0"/>
-              <a:t>08/03/2025</a:t>
+              <a:t>12/03/2025</a:t>
             </a:fld>
             <a:endParaRPr lang="fr-FR"/>
           </a:p>
@@ -1156,7 +1175,7 @@
           <a:p>
             <a:fld id="{DDBEF2CB-837B-4387-A0FB-31C1D04DA30F}" type="datetimeFigureOut">
               <a:rPr lang="fr-FR" smtClean="0"/>
-              <a:t>08/03/2025</a:t>
+              <a:t>12/03/2025</a:t>
             </a:fld>
             <a:endParaRPr lang="fr-FR"/>
           </a:p>
@@ -1424,7 +1443,7 @@
           <a:p>
             <a:fld id="{DDBEF2CB-837B-4387-A0FB-31C1D04DA30F}" type="datetimeFigureOut">
               <a:rPr lang="fr-FR" smtClean="0"/>
-              <a:t>08/03/2025</a:t>
+              <a:t>12/03/2025</a:t>
             </a:fld>
             <a:endParaRPr lang="fr-FR"/>
           </a:p>
@@ -1839,7 +1858,7 @@
           <a:p>
             <a:fld id="{DDBEF2CB-837B-4387-A0FB-31C1D04DA30F}" type="datetimeFigureOut">
               <a:rPr lang="fr-FR" smtClean="0"/>
-              <a:t>08/03/2025</a:t>
+              <a:t>12/03/2025</a:t>
             </a:fld>
             <a:endParaRPr lang="fr-FR"/>
           </a:p>
@@ -1981,7 +2000,7 @@
           <a:p>
             <a:fld id="{DDBEF2CB-837B-4387-A0FB-31C1D04DA30F}" type="datetimeFigureOut">
               <a:rPr lang="fr-FR" smtClean="0"/>
-              <a:t>08/03/2025</a:t>
+              <a:t>12/03/2025</a:t>
             </a:fld>
             <a:endParaRPr lang="fr-FR"/>
           </a:p>
@@ -2094,7 +2113,7 @@
           <a:p>
             <a:fld id="{DDBEF2CB-837B-4387-A0FB-31C1D04DA30F}" type="datetimeFigureOut">
               <a:rPr lang="fr-FR" smtClean="0"/>
-              <a:t>08/03/2025</a:t>
+              <a:t>12/03/2025</a:t>
             </a:fld>
             <a:endParaRPr lang="fr-FR"/>
           </a:p>
@@ -2407,7 +2426,7 @@
           <a:p>
             <a:fld id="{DDBEF2CB-837B-4387-A0FB-31C1D04DA30F}" type="datetimeFigureOut">
               <a:rPr lang="fr-FR" smtClean="0"/>
-              <a:t>08/03/2025</a:t>
+              <a:t>12/03/2025</a:t>
             </a:fld>
             <a:endParaRPr lang="fr-FR"/>
           </a:p>
@@ -2696,7 +2715,7 @@
           <a:p>
             <a:fld id="{DDBEF2CB-837B-4387-A0FB-31C1D04DA30F}" type="datetimeFigureOut">
               <a:rPr lang="fr-FR" smtClean="0"/>
-              <a:t>08/03/2025</a:t>
+              <a:t>12/03/2025</a:t>
             </a:fld>
             <a:endParaRPr lang="fr-FR"/>
           </a:p>
@@ -2939,7 +2958,7 @@
           <a:p>
             <a:fld id="{DDBEF2CB-837B-4387-A0FB-31C1D04DA30F}" type="datetimeFigureOut">
               <a:rPr lang="fr-FR" smtClean="0"/>
-              <a:t>08/03/2025</a:t>
+              <a:t>12/03/2025</a:t>
             </a:fld>
             <a:endParaRPr lang="fr-FR"/>
           </a:p>
@@ -3374,8 +3393,8 @@
         </p:nvSpPr>
         <p:spPr>
           <a:xfrm>
-            <a:off x="1524000" y="1122363"/>
-            <a:ext cx="9144000" cy="1785332"/>
+            <a:off x="402956" y="392624"/>
+            <a:ext cx="11386087" cy="2515071"/>
           </a:xfrm>
         </p:spPr>
         <p:txBody>
@@ -3384,7 +3403,7 @@
           <a:p>
             <a:r>
               <a:rPr lang="fr-FR" dirty="0"/>
-              <a:t>Security - Hands-On 3</a:t>
+              <a:t>Security - Hands-On 4</a:t>
             </a:r>
             <a:br>
               <a:rPr lang="fr-FR" dirty="0"/>
@@ -3393,7 +3412,13 @@
               <a:rPr lang="fr-FR" dirty="0" err="1"/>
               <a:t>Cryptography</a:t>
             </a:r>
-            <a:endParaRPr lang="fr-FR" dirty="0"/>
+            <a:br>
+              <a:rPr lang="fr-FR" dirty="0"/>
+            </a:br>
+            <a:r>
+              <a:rPr lang="fr-FR" dirty="0"/>
+              <a:t>Prime Numbers</a:t>
+            </a:r>
           </a:p>
         </p:txBody>
       </p:sp>
@@ -3476,7 +3501,7 @@
           <p:cNvPr id="2" name="Title 1">
             <a:extLst>
               <a:ext uri="{FF2B5EF4-FFF2-40B4-BE49-F238E27FC236}">
-                <a16:creationId xmlns:a16="http://schemas.microsoft.com/office/drawing/2014/main" id="{134DC5FA-3D9F-4301-7504-60803885A57A}"/>
+                <a16:creationId xmlns:a16="http://schemas.microsoft.com/office/drawing/2014/main" id="{8A5FF3C6-B2BA-F5D0-8EE4-2D7F1D59735F}"/>
               </a:ext>
             </a:extLst>
           </p:cNvPr>
@@ -3487,61 +3512,2181 @@
             <p:ph type="title"/>
           </p:nvPr>
         </p:nvSpPr>
+        <p:spPr/>
+        <p:txBody>
+          <a:bodyPr/>
+          <a:lstStyle/>
+          <a:p>
+            <a:r>
+              <a:rPr lang="fr-FR" dirty="0"/>
+              <a:t>(Ex 4)  </a:t>
+            </a:r>
+            <a:r>
+              <a:rPr lang="fr-FR" dirty="0" err="1"/>
+              <a:t>Compute</a:t>
+            </a:r>
+            <a:r>
+              <a:rPr lang="fr-FR" dirty="0"/>
+              <a:t> </a:t>
+            </a:r>
+            <a:r>
+              <a:rPr lang="fr-FR" dirty="0" err="1"/>
+              <a:t>following</a:t>
+            </a:r>
+            <a:r>
+              <a:rPr lang="fr-FR" dirty="0"/>
+              <a:t>:</a:t>
+            </a:r>
+          </a:p>
+        </p:txBody>
+      </p:sp>
+      <p:sp>
+        <p:nvSpPr>
+          <p:cNvPr id="6" name="TextBox 5">
+            <a:extLst>
+              <a:ext uri="{FF2B5EF4-FFF2-40B4-BE49-F238E27FC236}">
+                <a16:creationId xmlns:a16="http://schemas.microsoft.com/office/drawing/2014/main" id="{9AB61527-2FF3-1C54-CD05-8D110A18E595}"/>
+              </a:ext>
+            </a:extLst>
+          </p:cNvPr>
+          <p:cNvSpPr txBox="1"/>
+          <p:nvPr/>
+        </p:nvSpPr>
         <p:spPr>
           <a:xfrm>
-            <a:off x="838200" y="2369573"/>
-            <a:ext cx="10515600" cy="1325563"/>
+            <a:off x="1190624" y="2953435"/>
+            <a:ext cx="10515599" cy="1754326"/>
           </a:xfrm>
+          <a:prstGeom prst="rect">
+            <a:avLst/>
+          </a:prstGeom>
+          <a:noFill/>
         </p:spPr>
         <p:txBody>
-          <a:bodyPr/>
-          <a:lstStyle/>
-          <a:p>
-            <a:pPr algn="ctr"/>
-            <a:r>
-              <a:rPr lang="fr-FR" dirty="0" err="1"/>
-              <a:t>Using</a:t>
-            </a:r>
-            <a:r>
-              <a:rPr lang="fr-FR" dirty="0"/>
-              <a:t> </a:t>
-            </a:r>
-            <a:r>
-              <a:rPr lang="fr-FR" dirty="0" err="1"/>
-              <a:t>Jasypt</a:t>
-            </a:r>
-            <a:r>
-              <a:rPr lang="fr-FR" dirty="0"/>
-              <a:t>  </a:t>
-            </a:r>
-            <a:r>
-              <a:rPr lang="fr-FR" dirty="0" err="1"/>
-              <a:t>springboot</a:t>
-            </a:r>
-            <a:r>
-              <a:rPr lang="fr-FR" dirty="0"/>
-              <a:t> to </a:t>
-            </a:r>
-            <a:r>
-              <a:rPr lang="fr-FR" dirty="0" err="1"/>
-              <a:t>encrypt</a:t>
-            </a:r>
-            <a:r>
-              <a:rPr lang="fr-FR" dirty="0"/>
-              <a:t> configuration </a:t>
-            </a:r>
-            <a:r>
-              <a:rPr lang="fr-FR" dirty="0" err="1"/>
-              <a:t>properties</a:t>
-            </a:r>
+          <a:bodyPr wrap="square">
+            <a:spAutoFit/>
+          </a:bodyPr>
+          <a:lstStyle/>
+          <a:p>
+            <a:r>
+              <a:rPr lang="fr-FR" dirty="0"/>
+              <a:t>p = 10000000000000000000000000000000000000000000000000000000000000000000000000000001</a:t>
+            </a:r>
+          </a:p>
+          <a:p>
+            <a:r>
+              <a:rPr lang="fr-FR" dirty="0"/>
+              <a:t>a = 20000000000000000000000000000000000000000000000000000000000000000000000000000001</a:t>
+            </a:r>
+          </a:p>
+          <a:p>
+            <a:r>
+              <a:rPr lang="fr-FR" dirty="0"/>
+              <a:t>m = 30000000000000000000000000000000000000000000000000000000000000000000000000000001</a:t>
+            </a:r>
+          </a:p>
+          <a:p>
             <a:endParaRPr lang="fr-FR" dirty="0"/>
+          </a:p>
+          <a:p>
+            <a:endParaRPr lang="fr-FR" dirty="0"/>
+          </a:p>
+          <a:p>
+            <a:r>
+              <a:rPr lang="fr-FR" dirty="0" err="1"/>
+              <a:t>a^p</a:t>
+            </a:r>
+            <a:r>
+              <a:rPr lang="fr-FR" dirty="0"/>
+              <a:t> % m</a:t>
+            </a:r>
           </a:p>
         </p:txBody>
       </p:sp>
     </p:spTree>
     <p:extLst>
       <p:ext uri="{BB962C8B-B14F-4D97-AF65-F5344CB8AC3E}">
-        <p14:creationId xmlns:p14="http://schemas.microsoft.com/office/powerpoint/2010/main" val="2199169169"/>
+        <p14:creationId xmlns:p14="http://schemas.microsoft.com/office/powerpoint/2010/main" val="310805513"/>
+      </p:ext>
+    </p:extLst>
+  </p:cSld>
+  <p:clrMapOvr>
+    <a:masterClrMapping/>
+  </p:clrMapOvr>
+</p:sld>
+</file>
+
+<file path=ppt/slides/slide11.xml><?xml version="1.0" encoding="utf-8"?>
+<p:sld xmlns:a="http://schemas.openxmlformats.org/drawingml/2006/main" xmlns:r="http://schemas.openxmlformats.org/officeDocument/2006/relationships" xmlns:p="http://schemas.openxmlformats.org/presentationml/2006/main">
+  <p:cSld>
+    <p:spTree>
+      <p:nvGrpSpPr>
+        <p:cNvPr id="1" name=""/>
+        <p:cNvGrpSpPr/>
+        <p:nvPr/>
+      </p:nvGrpSpPr>
+      <p:grpSpPr>
+        <a:xfrm>
+          <a:off x="0" y="0"/>
+          <a:ext cx="0" cy="0"/>
+          <a:chOff x="0" y="0"/>
+          <a:chExt cx="0" cy="0"/>
+        </a:xfrm>
+      </p:grpSpPr>
+      <p:sp>
+        <p:nvSpPr>
+          <p:cNvPr id="2" name="Title 1">
+            <a:extLst>
+              <a:ext uri="{FF2B5EF4-FFF2-40B4-BE49-F238E27FC236}">
+                <a16:creationId xmlns:a16="http://schemas.microsoft.com/office/drawing/2014/main" id="{CE81947B-CFC0-468B-4279-30F2DA64C1FC}"/>
+              </a:ext>
+            </a:extLst>
+          </p:cNvPr>
+          <p:cNvSpPr>
+            <a:spLocks noGrp="1"/>
+          </p:cNvSpPr>
+          <p:nvPr>
+            <p:ph type="title"/>
+          </p:nvPr>
+        </p:nvSpPr>
+        <p:spPr/>
+        <p:txBody>
+          <a:bodyPr/>
+          <a:lstStyle/>
+          <a:p>
+            <a:pPr algn="ctr"/>
+            <a:r>
+              <a:rPr lang="fr-FR" dirty="0"/>
+              <a:t>Ex 5: </a:t>
+            </a:r>
+            <a:r>
+              <a:rPr lang="fr-FR" dirty="0" err="1"/>
+              <a:t>Without</a:t>
+            </a:r>
+            <a:r>
+              <a:rPr lang="fr-FR" dirty="0"/>
+              <a:t> </a:t>
+            </a:r>
+            <a:r>
+              <a:rPr lang="fr-FR" dirty="0" err="1"/>
+              <a:t>iterating</a:t>
+            </a:r>
+            <a:r>
+              <a:rPr lang="fr-FR" dirty="0"/>
+              <a:t> to check on </a:t>
+            </a:r>
+            <a:r>
+              <a:rPr lang="fr-FR" dirty="0" err="1"/>
+              <a:t>divisors</a:t>
+            </a:r>
+            <a:r>
+              <a:rPr lang="fr-FR" dirty="0"/>
+              <a:t>,</a:t>
+            </a:r>
+            <a:br>
+              <a:rPr lang="fr-FR" dirty="0"/>
+            </a:br>
+            <a:r>
+              <a:rPr lang="fr-FR" dirty="0"/>
+              <a:t>proof </a:t>
+            </a:r>
+            <a:r>
+              <a:rPr lang="fr-FR" dirty="0" err="1"/>
+              <a:t>that</a:t>
+            </a:r>
+            <a:r>
+              <a:rPr lang="fr-FR" dirty="0"/>
+              <a:t> a </a:t>
+            </a:r>
+            <a:r>
+              <a:rPr lang="fr-FR" dirty="0" err="1"/>
+              <a:t>given</a:t>
+            </a:r>
+            <a:r>
+              <a:rPr lang="fr-FR" dirty="0"/>
+              <a:t> "P" </a:t>
+            </a:r>
+            <a:r>
+              <a:rPr lang="fr-FR" dirty="0" err="1"/>
+              <a:t>is</a:t>
+            </a:r>
+            <a:r>
+              <a:rPr lang="fr-FR" dirty="0"/>
+              <a:t> NOT prime</a:t>
+            </a:r>
+          </a:p>
+        </p:txBody>
+      </p:sp>
+      <p:sp>
+        <p:nvSpPr>
+          <p:cNvPr id="4" name="TextBox 3">
+            <a:extLst>
+              <a:ext uri="{FF2B5EF4-FFF2-40B4-BE49-F238E27FC236}">
+                <a16:creationId xmlns:a16="http://schemas.microsoft.com/office/drawing/2014/main" id="{158FE5FE-F611-BF88-0FBC-DEBA417F629B}"/>
+              </a:ext>
+            </a:extLst>
+          </p:cNvPr>
+          <p:cNvSpPr txBox="1"/>
+          <p:nvPr/>
+        </p:nvSpPr>
+        <p:spPr>
+          <a:xfrm>
+            <a:off x="4262034" y="2204168"/>
+            <a:ext cx="2747868" cy="369332"/>
+          </a:xfrm>
+          <a:prstGeom prst="rect">
+            <a:avLst/>
+          </a:prstGeom>
+          <a:noFill/>
+        </p:spPr>
+        <p:txBody>
+          <a:bodyPr wrap="none" rtlCol="0">
+            <a:spAutoFit/>
+          </a:bodyPr>
+          <a:lstStyle/>
+          <a:p>
+            <a:r>
+              <a:rPr lang="fr-FR" dirty="0"/>
+              <a:t>P = 1000000016000000063</a:t>
+            </a:r>
+          </a:p>
+        </p:txBody>
+      </p:sp>
+      <p:sp>
+        <p:nvSpPr>
+          <p:cNvPr id="7" name="TextBox 6">
+            <a:extLst>
+              <a:ext uri="{FF2B5EF4-FFF2-40B4-BE49-F238E27FC236}">
+                <a16:creationId xmlns:a16="http://schemas.microsoft.com/office/drawing/2014/main" id="{D6E4948C-FD30-8119-0D36-23F7611F2E6E}"/>
+              </a:ext>
+            </a:extLst>
+          </p:cNvPr>
+          <p:cNvSpPr txBox="1"/>
+          <p:nvPr/>
+        </p:nvSpPr>
+        <p:spPr>
+          <a:xfrm>
+            <a:off x="2190428" y="2835660"/>
+            <a:ext cx="8756243" cy="2308324"/>
+          </a:xfrm>
+          <a:prstGeom prst="rect">
+            <a:avLst/>
+          </a:prstGeom>
+          <a:noFill/>
+        </p:spPr>
+        <p:txBody>
+          <a:bodyPr wrap="none" rtlCol="0">
+            <a:spAutoFit/>
+          </a:bodyPr>
+          <a:lstStyle/>
+          <a:p>
+            <a:r>
+              <a:rPr lang="fr-FR" dirty="0"/>
+              <a:t>Use the Fermat </a:t>
+            </a:r>
+            <a:r>
+              <a:rPr lang="fr-FR" dirty="0" err="1"/>
+              <a:t>theorem</a:t>
+            </a:r>
+            <a:r>
+              <a:rPr lang="fr-FR" dirty="0"/>
+              <a:t>. If P </a:t>
+            </a:r>
+            <a:r>
+              <a:rPr lang="fr-FR" dirty="0" err="1"/>
+              <a:t>was</a:t>
+            </a:r>
+            <a:r>
+              <a:rPr lang="fr-FR" dirty="0"/>
+              <a:t> prime, for all a =&gt; "a^(p-1) modulo P = 1";</a:t>
+            </a:r>
+          </a:p>
+          <a:p>
+            <a:endParaRPr lang="fr-FR" dirty="0"/>
+          </a:p>
+          <a:p>
+            <a:r>
+              <a:rPr lang="fr-FR" dirty="0"/>
+              <a:t>test </a:t>
+            </a:r>
+            <a:r>
+              <a:rPr lang="fr-FR" dirty="0" err="1"/>
+              <a:t>with</a:t>
+            </a:r>
+            <a:r>
+              <a:rPr lang="fr-FR" dirty="0"/>
+              <a:t> </a:t>
+            </a:r>
+            <a:r>
+              <a:rPr lang="fr-FR" dirty="0" err="1"/>
+              <a:t>choosen</a:t>
+            </a:r>
+            <a:r>
+              <a:rPr lang="fr-FR" dirty="0"/>
+              <a:t> a =2,  or a=3, .. or a=</a:t>
+            </a:r>
+            <a:r>
+              <a:rPr lang="fr-FR" dirty="0" err="1"/>
+              <a:t>random</a:t>
+            </a:r>
+            <a:endParaRPr lang="fr-FR" dirty="0"/>
+          </a:p>
+          <a:p>
+            <a:endParaRPr lang="fr-FR" dirty="0"/>
+          </a:p>
+          <a:p>
+            <a:r>
+              <a:rPr lang="fr-FR" dirty="0"/>
+              <a:t>Use </a:t>
+            </a:r>
+            <a:r>
+              <a:rPr lang="fr-FR" dirty="0" err="1"/>
+              <a:t>built-in</a:t>
+            </a:r>
+            <a:r>
+              <a:rPr lang="fr-FR" dirty="0"/>
+              <a:t> </a:t>
+            </a:r>
+            <a:r>
+              <a:rPr lang="fr-FR" dirty="0" err="1"/>
+              <a:t>method</a:t>
+            </a:r>
+            <a:r>
+              <a:rPr lang="fr-FR" dirty="0"/>
+              <a:t> : </a:t>
+            </a:r>
+            <a:r>
+              <a:rPr lang="fr-FR" dirty="0" err="1"/>
+              <a:t>BigInteger.modPow</a:t>
+            </a:r>
+            <a:r>
+              <a:rPr lang="fr-FR" dirty="0"/>
+              <a:t>(</a:t>
+            </a:r>
+            <a:r>
+              <a:rPr lang="fr-FR" dirty="0" err="1"/>
+              <a:t>exponent</a:t>
+            </a:r>
+            <a:r>
+              <a:rPr lang="fr-FR" dirty="0"/>
+              <a:t>, modulo) </a:t>
+            </a:r>
+          </a:p>
+          <a:p>
+            <a:endParaRPr lang="fr-FR" dirty="0"/>
+          </a:p>
+          <a:p>
+            <a:r>
+              <a:rPr lang="fr-FR" dirty="0" err="1"/>
+              <a:t>What</a:t>
+            </a:r>
+            <a:r>
+              <a:rPr lang="fr-FR" dirty="0"/>
+              <a:t> </a:t>
+            </a:r>
+            <a:r>
+              <a:rPr lang="fr-FR" dirty="0" err="1"/>
+              <a:t>is</a:t>
+            </a:r>
+            <a:r>
+              <a:rPr lang="fr-FR" dirty="0"/>
+              <a:t> the </a:t>
+            </a:r>
+            <a:r>
+              <a:rPr lang="fr-FR" dirty="0" err="1"/>
+              <a:t>probability</a:t>
+            </a:r>
+            <a:r>
+              <a:rPr lang="fr-FR" dirty="0"/>
+              <a:t> </a:t>
+            </a:r>
+            <a:r>
+              <a:rPr lang="fr-FR" dirty="0" err="1"/>
+              <a:t>that</a:t>
+            </a:r>
+            <a:r>
+              <a:rPr lang="fr-FR" dirty="0"/>
+              <a:t> "a^(p-1) modulo P = 1" </a:t>
+            </a:r>
+            <a:r>
+              <a:rPr lang="fr-FR" dirty="0" err="1"/>
+              <a:t>despite</a:t>
+            </a:r>
+            <a:r>
+              <a:rPr lang="fr-FR" dirty="0"/>
+              <a:t> the </a:t>
+            </a:r>
+            <a:r>
+              <a:rPr lang="fr-FR" dirty="0" err="1"/>
+              <a:t>fact</a:t>
+            </a:r>
+            <a:r>
+              <a:rPr lang="fr-FR" dirty="0"/>
+              <a:t> </a:t>
+            </a:r>
+            <a:r>
+              <a:rPr lang="fr-FR" dirty="0" err="1"/>
+              <a:t>that</a:t>
+            </a:r>
+            <a:r>
+              <a:rPr lang="fr-FR" dirty="0"/>
+              <a:t> P </a:t>
+            </a:r>
+            <a:r>
+              <a:rPr lang="fr-FR" dirty="0" err="1"/>
+              <a:t>were</a:t>
+            </a:r>
+            <a:r>
+              <a:rPr lang="fr-FR" dirty="0"/>
+              <a:t> not prime ?</a:t>
+            </a:r>
+          </a:p>
+          <a:p>
+            <a:endParaRPr lang="fr-FR" dirty="0"/>
+          </a:p>
+        </p:txBody>
+      </p:sp>
+      <p:pic>
+        <p:nvPicPr>
+          <p:cNvPr id="9" name="Picture 8">
+            <a:extLst>
+              <a:ext uri="{FF2B5EF4-FFF2-40B4-BE49-F238E27FC236}">
+                <a16:creationId xmlns:a16="http://schemas.microsoft.com/office/drawing/2014/main" id="{C62E647B-D727-C935-8894-4B34B003A821}"/>
+              </a:ext>
+            </a:extLst>
+          </p:cNvPr>
+          <p:cNvPicPr>
+            <a:picLocks noChangeAspect="1"/>
+          </p:cNvPicPr>
+          <p:nvPr/>
+        </p:nvPicPr>
+        <p:blipFill>
+          <a:blip r:embed="rId2"/>
+          <a:stretch>
+            <a:fillRect/>
+          </a:stretch>
+        </p:blipFill>
+        <p:spPr>
+          <a:xfrm>
+            <a:off x="3011972" y="5009990"/>
+            <a:ext cx="5837426" cy="1848010"/>
+          </a:xfrm>
+          <a:prstGeom prst="rect">
+            <a:avLst/>
+          </a:prstGeom>
+        </p:spPr>
+      </p:pic>
+    </p:spTree>
+    <p:extLst>
+      <p:ext uri="{BB962C8B-B14F-4D97-AF65-F5344CB8AC3E}">
+        <p14:creationId xmlns:p14="http://schemas.microsoft.com/office/powerpoint/2010/main" val="1064925443"/>
+      </p:ext>
+    </p:extLst>
+  </p:cSld>
+  <p:clrMapOvr>
+    <a:masterClrMapping/>
+  </p:clrMapOvr>
+</p:sld>
+</file>
+
+<file path=ppt/slides/slide12.xml><?xml version="1.0" encoding="utf-8"?>
+<p:sld xmlns:a="http://schemas.openxmlformats.org/drawingml/2006/main" xmlns:r="http://schemas.openxmlformats.org/officeDocument/2006/relationships" xmlns:p="http://schemas.openxmlformats.org/presentationml/2006/main">
+  <p:cSld>
+    <p:spTree>
+      <p:nvGrpSpPr>
+        <p:cNvPr id="1" name=""/>
+        <p:cNvGrpSpPr/>
+        <p:nvPr/>
+      </p:nvGrpSpPr>
+      <p:grpSpPr>
+        <a:xfrm>
+          <a:off x="0" y="0"/>
+          <a:ext cx="0" cy="0"/>
+          <a:chOff x="0" y="0"/>
+          <a:chExt cx="0" cy="0"/>
+        </a:xfrm>
+      </p:grpSpPr>
+      <p:sp>
+        <p:nvSpPr>
+          <p:cNvPr id="2" name="Title 1">
+            <a:extLst>
+              <a:ext uri="{FF2B5EF4-FFF2-40B4-BE49-F238E27FC236}">
+                <a16:creationId xmlns:a16="http://schemas.microsoft.com/office/drawing/2014/main" id="{8FCDEAFB-0294-4800-C5ED-23887951C387}"/>
+              </a:ext>
+            </a:extLst>
+          </p:cNvPr>
+          <p:cNvSpPr>
+            <a:spLocks noGrp="1"/>
+          </p:cNvSpPr>
+          <p:nvPr>
+            <p:ph type="title"/>
+          </p:nvPr>
+        </p:nvSpPr>
+        <p:spPr>
+          <a:xfrm>
+            <a:off x="838200" y="365125"/>
+            <a:ext cx="10515600" cy="2827526"/>
+          </a:xfrm>
+        </p:spPr>
+        <p:txBody>
+          <a:bodyPr/>
+          <a:lstStyle/>
+          <a:p>
+            <a:r>
+              <a:rPr lang="fr-FR" dirty="0"/>
+              <a:t>Notice </a:t>
+            </a:r>
+            <a:r>
+              <a:rPr lang="fr-FR" dirty="0" err="1"/>
+              <a:t>that</a:t>
+            </a:r>
+            <a:r>
+              <a:rPr lang="fr-FR" dirty="0"/>
+              <a:t> </a:t>
+            </a:r>
+            <a:r>
+              <a:rPr lang="fr-FR" dirty="0" err="1"/>
+              <a:t>searching</a:t>
+            </a:r>
+            <a:r>
+              <a:rPr lang="fr-FR" dirty="0"/>
+              <a:t>  n1,n2 </a:t>
+            </a:r>
+            <a:r>
+              <a:rPr lang="fr-FR" dirty="0" err="1"/>
+              <a:t>with</a:t>
+            </a:r>
+            <a:r>
+              <a:rPr lang="fr-FR" dirty="0"/>
+              <a:t> N=n1*n2   </a:t>
+            </a:r>
+            <a:br>
+              <a:rPr lang="fr-FR" dirty="0"/>
+            </a:br>
+            <a:r>
+              <a:rPr lang="fr-FR" dirty="0" err="1"/>
+              <a:t>is</a:t>
+            </a:r>
+            <a:r>
+              <a:rPr lang="fr-FR" dirty="0"/>
+              <a:t> </a:t>
+            </a:r>
+            <a:r>
+              <a:rPr lang="fr-FR" dirty="0" err="1"/>
+              <a:t>much</a:t>
+            </a:r>
+            <a:r>
+              <a:rPr lang="fr-FR" dirty="0"/>
+              <a:t> more </a:t>
+            </a:r>
+            <a:r>
+              <a:rPr lang="fr-FR" dirty="0" err="1"/>
+              <a:t>complex</a:t>
+            </a:r>
+            <a:r>
+              <a:rPr lang="fr-FR" dirty="0"/>
+              <a:t>...</a:t>
+            </a:r>
+            <a:br>
+              <a:rPr lang="fr-FR" dirty="0"/>
+            </a:br>
+            <a:br>
+              <a:rPr lang="fr-FR" dirty="0"/>
+            </a:br>
+            <a:r>
+              <a:rPr lang="fr-FR" dirty="0"/>
+              <a:t>But </a:t>
+            </a:r>
+            <a:r>
+              <a:rPr lang="fr-FR" dirty="0" err="1"/>
+              <a:t>when</a:t>
+            </a:r>
+            <a:r>
+              <a:rPr lang="fr-FR" dirty="0"/>
+              <a:t> </a:t>
+            </a:r>
+            <a:r>
+              <a:rPr lang="fr-FR" dirty="0" err="1"/>
+              <a:t>knowing</a:t>
+            </a:r>
+            <a:r>
+              <a:rPr lang="fr-FR" dirty="0"/>
+              <a:t>, checking </a:t>
+            </a:r>
+            <a:r>
+              <a:rPr lang="fr-FR" dirty="0" err="1"/>
+              <a:t>is</a:t>
+            </a:r>
+            <a:r>
+              <a:rPr lang="fr-FR" dirty="0"/>
+              <a:t> trivial</a:t>
+            </a:r>
+            <a:br>
+              <a:rPr lang="fr-FR" dirty="0"/>
+            </a:br>
+            <a:r>
+              <a:rPr lang="fr-FR" dirty="0"/>
+              <a:t>n1=1000000007 x n2=1000000009</a:t>
+            </a:r>
+          </a:p>
+        </p:txBody>
+      </p:sp>
+    </p:spTree>
+    <p:extLst>
+      <p:ext uri="{BB962C8B-B14F-4D97-AF65-F5344CB8AC3E}">
+        <p14:creationId xmlns:p14="http://schemas.microsoft.com/office/powerpoint/2010/main" val="764930831"/>
+      </p:ext>
+    </p:extLst>
+  </p:cSld>
+  <p:clrMapOvr>
+    <a:masterClrMapping/>
+  </p:clrMapOvr>
+</p:sld>
+</file>
+
+<file path=ppt/slides/slide13.xml><?xml version="1.0" encoding="utf-8"?>
+<p:sld xmlns:a="http://schemas.openxmlformats.org/drawingml/2006/main" xmlns:r="http://schemas.openxmlformats.org/officeDocument/2006/relationships" xmlns:p="http://schemas.openxmlformats.org/presentationml/2006/main">
+  <p:cSld>
+    <p:spTree>
+      <p:nvGrpSpPr>
+        <p:cNvPr id="1" name=""/>
+        <p:cNvGrpSpPr/>
+        <p:nvPr/>
+      </p:nvGrpSpPr>
+      <p:grpSpPr>
+        <a:xfrm>
+          <a:off x="0" y="0"/>
+          <a:ext cx="0" cy="0"/>
+          <a:chOff x="0" y="0"/>
+          <a:chExt cx="0" cy="0"/>
+        </a:xfrm>
+      </p:grpSpPr>
+      <p:sp>
+        <p:nvSpPr>
+          <p:cNvPr id="2" name="Title 1">
+            <a:extLst>
+              <a:ext uri="{FF2B5EF4-FFF2-40B4-BE49-F238E27FC236}">
+                <a16:creationId xmlns:a16="http://schemas.microsoft.com/office/drawing/2014/main" id="{B834B4AB-7B7F-C836-BD1E-01526D0393D2}"/>
+              </a:ext>
+            </a:extLst>
+          </p:cNvPr>
+          <p:cNvSpPr>
+            <a:spLocks noGrp="1"/>
+          </p:cNvSpPr>
+          <p:nvPr>
+            <p:ph type="title"/>
+          </p:nvPr>
+        </p:nvSpPr>
+        <p:spPr>
+          <a:xfrm>
+            <a:off x="838200" y="49993"/>
+            <a:ext cx="10515600" cy="1031771"/>
+          </a:xfrm>
+        </p:spPr>
+        <p:txBody>
+          <a:bodyPr/>
+          <a:lstStyle/>
+          <a:p>
+            <a:pPr algn="ctr"/>
+            <a:r>
+              <a:rPr lang="fr-FR" dirty="0"/>
+              <a:t>Ex5 : </a:t>
+            </a:r>
+            <a:r>
+              <a:rPr lang="fr-FR" dirty="0" err="1"/>
+              <a:t>repeat</a:t>
+            </a:r>
+            <a:r>
+              <a:rPr lang="fr-FR" dirty="0"/>
+              <a:t> </a:t>
+            </a:r>
+            <a:r>
+              <a:rPr lang="fr-FR" dirty="0" err="1"/>
+              <a:t>primality</a:t>
+            </a:r>
+            <a:r>
+              <a:rPr lang="fr-FR" dirty="0"/>
+              <a:t> test on n1, n2</a:t>
+            </a:r>
+            <a:br>
+              <a:rPr lang="fr-FR" dirty="0"/>
+            </a:br>
+            <a:r>
+              <a:rPr lang="fr-FR" dirty="0" err="1"/>
+              <a:t>compute</a:t>
+            </a:r>
+            <a:r>
+              <a:rPr lang="fr-FR" dirty="0"/>
+              <a:t>  2^(n1-1) modulo n1</a:t>
+            </a:r>
+          </a:p>
+        </p:txBody>
+      </p:sp>
+      <p:pic>
+        <p:nvPicPr>
+          <p:cNvPr id="5" name="Picture 4">
+            <a:extLst>
+              <a:ext uri="{FF2B5EF4-FFF2-40B4-BE49-F238E27FC236}">
+                <a16:creationId xmlns:a16="http://schemas.microsoft.com/office/drawing/2014/main" id="{6C4A2B5E-1150-8EF3-2CA6-2F3839C844BA}"/>
+              </a:ext>
+            </a:extLst>
+          </p:cNvPr>
+          <p:cNvPicPr>
+            <a:picLocks noChangeAspect="1"/>
+          </p:cNvPicPr>
+          <p:nvPr/>
+        </p:nvPicPr>
+        <p:blipFill>
+          <a:blip r:embed="rId2"/>
+          <a:stretch>
+            <a:fillRect/>
+          </a:stretch>
+        </p:blipFill>
+        <p:spPr>
+          <a:xfrm>
+            <a:off x="3200149" y="4698647"/>
+            <a:ext cx="5791702" cy="1924217"/>
+          </a:xfrm>
+          <a:prstGeom prst="rect">
+            <a:avLst/>
+          </a:prstGeom>
+        </p:spPr>
+      </p:pic>
+      <p:pic>
+        <p:nvPicPr>
+          <p:cNvPr id="7" name="Picture 6">
+            <a:extLst>
+              <a:ext uri="{FF2B5EF4-FFF2-40B4-BE49-F238E27FC236}">
+                <a16:creationId xmlns:a16="http://schemas.microsoft.com/office/drawing/2014/main" id="{8DAEFD4E-7AB4-0868-793B-D6672D41AF46}"/>
+              </a:ext>
+            </a:extLst>
+          </p:cNvPr>
+          <p:cNvPicPr>
+            <a:picLocks noChangeAspect="1"/>
+          </p:cNvPicPr>
+          <p:nvPr/>
+        </p:nvPicPr>
+        <p:blipFill>
+          <a:blip r:embed="rId3"/>
+          <a:stretch>
+            <a:fillRect/>
+          </a:stretch>
+        </p:blipFill>
+        <p:spPr>
+          <a:xfrm>
+            <a:off x="3200149" y="1272909"/>
+            <a:ext cx="6229890" cy="2991109"/>
+          </a:xfrm>
+          <a:prstGeom prst="rect">
+            <a:avLst/>
+          </a:prstGeom>
+        </p:spPr>
+      </p:pic>
+    </p:spTree>
+    <p:extLst>
+      <p:ext uri="{BB962C8B-B14F-4D97-AF65-F5344CB8AC3E}">
+        <p14:creationId xmlns:p14="http://schemas.microsoft.com/office/powerpoint/2010/main" val="3803157227"/>
+      </p:ext>
+    </p:extLst>
+  </p:cSld>
+  <p:clrMapOvr>
+    <a:masterClrMapping/>
+  </p:clrMapOvr>
+</p:sld>
+</file>
+
+<file path=ppt/slides/slide14.xml><?xml version="1.0" encoding="utf-8"?>
+<p:sld xmlns:a="http://schemas.openxmlformats.org/drawingml/2006/main" xmlns:r="http://schemas.openxmlformats.org/officeDocument/2006/relationships" xmlns:p="http://schemas.openxmlformats.org/presentationml/2006/main">
+  <p:cSld>
+    <p:spTree>
+      <p:nvGrpSpPr>
+        <p:cNvPr id="1" name=""/>
+        <p:cNvGrpSpPr/>
+        <p:nvPr/>
+      </p:nvGrpSpPr>
+      <p:grpSpPr>
+        <a:xfrm>
+          <a:off x="0" y="0"/>
+          <a:ext cx="0" cy="0"/>
+          <a:chOff x="0" y="0"/>
+          <a:chExt cx="0" cy="0"/>
+        </a:xfrm>
+      </p:grpSpPr>
+      <p:sp>
+        <p:nvSpPr>
+          <p:cNvPr id="2" name="Title 1">
+            <a:extLst>
+              <a:ext uri="{FF2B5EF4-FFF2-40B4-BE49-F238E27FC236}">
+                <a16:creationId xmlns:a16="http://schemas.microsoft.com/office/drawing/2014/main" id="{675FD79B-7655-FCAE-A1BE-468F8830661B}"/>
+              </a:ext>
+            </a:extLst>
+          </p:cNvPr>
+          <p:cNvSpPr>
+            <a:spLocks noGrp="1"/>
+          </p:cNvSpPr>
+          <p:nvPr>
+            <p:ph type="title"/>
+          </p:nvPr>
+        </p:nvSpPr>
+        <p:spPr/>
+        <p:txBody>
+          <a:bodyPr/>
+          <a:lstStyle/>
+          <a:p>
+            <a:pPr algn="ctr"/>
+            <a:r>
+              <a:rPr lang="fr-FR" dirty="0"/>
+              <a:t>Write the Fermat </a:t>
+            </a:r>
+            <a:r>
+              <a:rPr lang="fr-FR" dirty="0" err="1"/>
+              <a:t>Primality</a:t>
+            </a:r>
+            <a:r>
+              <a:rPr lang="fr-FR" dirty="0"/>
+              <a:t> test,</a:t>
+            </a:r>
+            <a:br>
+              <a:rPr lang="fr-FR" dirty="0"/>
+            </a:br>
+            <a:r>
+              <a:rPr lang="fr-FR" dirty="0" err="1"/>
+              <a:t>with</a:t>
+            </a:r>
+            <a:r>
+              <a:rPr lang="fr-FR" dirty="0"/>
+              <a:t> 5 </a:t>
+            </a:r>
+            <a:r>
+              <a:rPr lang="fr-FR" dirty="0" err="1"/>
+              <a:t>internal</a:t>
+            </a:r>
+            <a:r>
+              <a:rPr lang="fr-FR" dirty="0"/>
+              <a:t> </a:t>
+            </a:r>
+            <a:r>
+              <a:rPr lang="fr-FR" dirty="0" err="1"/>
+              <a:t>number</a:t>
+            </a:r>
+            <a:r>
+              <a:rPr lang="fr-FR" dirty="0"/>
+              <a:t> tries</a:t>
+            </a:r>
+          </a:p>
+        </p:txBody>
+      </p:sp>
+      <p:sp>
+        <p:nvSpPr>
+          <p:cNvPr id="3" name="TextBox 2">
+            <a:extLst>
+              <a:ext uri="{FF2B5EF4-FFF2-40B4-BE49-F238E27FC236}">
+                <a16:creationId xmlns:a16="http://schemas.microsoft.com/office/drawing/2014/main" id="{2D13A95E-7E41-C949-4363-237366828998}"/>
+              </a:ext>
+            </a:extLst>
+          </p:cNvPr>
+          <p:cNvSpPr txBox="1"/>
+          <p:nvPr/>
+        </p:nvSpPr>
+        <p:spPr>
+          <a:xfrm>
+            <a:off x="2815525" y="2810360"/>
+            <a:ext cx="2732864" cy="369332"/>
+          </a:xfrm>
+          <a:prstGeom prst="rect">
+            <a:avLst/>
+          </a:prstGeom>
+          <a:noFill/>
+        </p:spPr>
+        <p:txBody>
+          <a:bodyPr wrap="none" rtlCol="0">
+            <a:spAutoFit/>
+          </a:bodyPr>
+          <a:lstStyle/>
+          <a:p>
+            <a:r>
+              <a:rPr lang="fr-FR" dirty="0"/>
+              <a:t>(</a:t>
+            </a:r>
+            <a:r>
+              <a:rPr lang="fr-FR" dirty="0" err="1"/>
+              <a:t>also</a:t>
+            </a:r>
+            <a:r>
+              <a:rPr lang="fr-FR" dirty="0"/>
+              <a:t> call Miller-Rabin test )</a:t>
+            </a:r>
+          </a:p>
+        </p:txBody>
+      </p:sp>
+      <p:sp>
+        <p:nvSpPr>
+          <p:cNvPr id="4" name="TextBox 3">
+            <a:extLst>
+              <a:ext uri="{FF2B5EF4-FFF2-40B4-BE49-F238E27FC236}">
+                <a16:creationId xmlns:a16="http://schemas.microsoft.com/office/drawing/2014/main" id="{7BBC6FC3-BF50-D0E1-53D8-672F6827A4F7}"/>
+              </a:ext>
+            </a:extLst>
+          </p:cNvPr>
+          <p:cNvSpPr txBox="1"/>
+          <p:nvPr/>
+        </p:nvSpPr>
+        <p:spPr>
+          <a:xfrm>
+            <a:off x="2815525" y="3493643"/>
+            <a:ext cx="7181646" cy="369332"/>
+          </a:xfrm>
+          <a:prstGeom prst="rect">
+            <a:avLst/>
+          </a:prstGeom>
+          <a:noFill/>
+        </p:spPr>
+        <p:txBody>
+          <a:bodyPr wrap="none" rtlCol="0">
+            <a:spAutoFit/>
+          </a:bodyPr>
+          <a:lstStyle/>
+          <a:p>
+            <a:r>
+              <a:rPr lang="fr-FR" dirty="0" err="1"/>
+              <a:t>See</a:t>
+            </a:r>
+            <a:r>
+              <a:rPr lang="fr-FR" dirty="0"/>
+              <a:t> source java </a:t>
+            </a:r>
+            <a:r>
+              <a:rPr lang="fr-FR" dirty="0" err="1"/>
+              <a:t>built-in</a:t>
+            </a:r>
+            <a:r>
+              <a:rPr lang="fr-FR" dirty="0"/>
+              <a:t> source code: </a:t>
+            </a:r>
+            <a:r>
+              <a:rPr lang="fr-FR" dirty="0" err="1"/>
+              <a:t>BigInteger.isProbablePrime</a:t>
+            </a:r>
+            <a:r>
+              <a:rPr lang="fr-FR" dirty="0"/>
+              <a:t>(</a:t>
+            </a:r>
+            <a:r>
+              <a:rPr lang="fr-FR" dirty="0" err="1"/>
+              <a:t>certainty</a:t>
+            </a:r>
+            <a:r>
+              <a:rPr lang="fr-FR" dirty="0"/>
+              <a:t>)</a:t>
+            </a:r>
+          </a:p>
+        </p:txBody>
+      </p:sp>
+    </p:spTree>
+    <p:extLst>
+      <p:ext uri="{BB962C8B-B14F-4D97-AF65-F5344CB8AC3E}">
+        <p14:creationId xmlns:p14="http://schemas.microsoft.com/office/powerpoint/2010/main" val="2331998342"/>
+      </p:ext>
+    </p:extLst>
+  </p:cSld>
+  <p:clrMapOvr>
+    <a:masterClrMapping/>
+  </p:clrMapOvr>
+</p:sld>
+</file>
+
+<file path=ppt/slides/slide15.xml><?xml version="1.0" encoding="utf-8"?>
+<p:sld xmlns:a="http://schemas.openxmlformats.org/drawingml/2006/main" xmlns:r="http://schemas.openxmlformats.org/officeDocument/2006/relationships" xmlns:p="http://schemas.openxmlformats.org/presentationml/2006/main">
+  <p:cSld>
+    <p:spTree>
+      <p:nvGrpSpPr>
+        <p:cNvPr id="1" name=""/>
+        <p:cNvGrpSpPr/>
+        <p:nvPr/>
+      </p:nvGrpSpPr>
+      <p:grpSpPr>
+        <a:xfrm>
+          <a:off x="0" y="0"/>
+          <a:ext cx="0" cy="0"/>
+          <a:chOff x="0" y="0"/>
+          <a:chExt cx="0" cy="0"/>
+        </a:xfrm>
+      </p:grpSpPr>
+      <p:sp>
+        <p:nvSpPr>
+          <p:cNvPr id="2" name="Title 1">
+            <a:extLst>
+              <a:ext uri="{FF2B5EF4-FFF2-40B4-BE49-F238E27FC236}">
+                <a16:creationId xmlns:a16="http://schemas.microsoft.com/office/drawing/2014/main" id="{BE7965E6-EA76-0E43-25EF-73E4F712A620}"/>
+              </a:ext>
+            </a:extLst>
+          </p:cNvPr>
+          <p:cNvSpPr>
+            <a:spLocks noGrp="1"/>
+          </p:cNvSpPr>
+          <p:nvPr>
+            <p:ph type="title"/>
+          </p:nvPr>
+        </p:nvSpPr>
+        <p:spPr/>
+        <p:txBody>
+          <a:bodyPr/>
+          <a:lstStyle/>
+          <a:p>
+            <a:r>
+              <a:rPr lang="fr-FR" dirty="0"/>
+              <a:t>Ex 5: use java </a:t>
+            </a:r>
+            <a:r>
+              <a:rPr lang="fr-FR" dirty="0" err="1"/>
+              <a:t>BigInteger.nextProbablePrime</a:t>
+            </a:r>
+            <a:r>
+              <a:rPr lang="fr-FR" dirty="0"/>
+              <a:t>()</a:t>
+            </a:r>
+            <a:br>
+              <a:rPr lang="fr-FR" dirty="0"/>
+            </a:br>
+            <a:r>
+              <a:rPr lang="fr-FR" dirty="0"/>
+              <a:t>to </a:t>
+            </a:r>
+            <a:r>
+              <a:rPr lang="fr-FR" dirty="0" err="1"/>
+              <a:t>print</a:t>
+            </a:r>
+            <a:r>
+              <a:rPr lang="fr-FR" dirty="0"/>
+              <a:t> the </a:t>
+            </a:r>
+            <a:r>
+              <a:rPr lang="fr-FR" dirty="0" err="1"/>
+              <a:t>consecutive</a:t>
+            </a:r>
+            <a:r>
+              <a:rPr lang="fr-FR" dirty="0"/>
+              <a:t> 1000 primes, </a:t>
+            </a:r>
+            <a:r>
+              <a:rPr lang="fr-FR" dirty="0" err="1"/>
+              <a:t>after</a:t>
+            </a:r>
+            <a:r>
+              <a:rPr lang="fr-FR" dirty="0"/>
+              <a:t> a </a:t>
+            </a:r>
+            <a:r>
+              <a:rPr lang="fr-FR" dirty="0" err="1"/>
+              <a:t>given</a:t>
+            </a:r>
+            <a:r>
+              <a:rPr lang="fr-FR" dirty="0"/>
+              <a:t> N</a:t>
+            </a:r>
+          </a:p>
+        </p:txBody>
+      </p:sp>
+      <p:sp>
+        <p:nvSpPr>
+          <p:cNvPr id="5" name="TextBox 4">
+            <a:extLst>
+              <a:ext uri="{FF2B5EF4-FFF2-40B4-BE49-F238E27FC236}">
+                <a16:creationId xmlns:a16="http://schemas.microsoft.com/office/drawing/2014/main" id="{B33D9531-36B4-1252-5C8C-FBA922AC6572}"/>
+              </a:ext>
+            </a:extLst>
+          </p:cNvPr>
+          <p:cNvSpPr txBox="1"/>
+          <p:nvPr/>
+        </p:nvSpPr>
+        <p:spPr>
+          <a:xfrm>
+            <a:off x="2238374" y="2633960"/>
+            <a:ext cx="8615363" cy="923330"/>
+          </a:xfrm>
+          <a:prstGeom prst="rect">
+            <a:avLst/>
+          </a:prstGeom>
+          <a:noFill/>
+        </p:spPr>
+        <p:txBody>
+          <a:bodyPr wrap="square">
+            <a:spAutoFit/>
+          </a:bodyPr>
+          <a:lstStyle/>
+          <a:p>
+            <a:r>
+              <a:rPr lang="fr-FR" dirty="0"/>
+              <a:t>N = 10000000000000000000000000000000000000000000000000000000000000000000000000000000000000000000000000000000000000000000000000000000000000001</a:t>
+            </a:r>
+          </a:p>
+        </p:txBody>
+      </p:sp>
+      <p:sp>
+        <p:nvSpPr>
+          <p:cNvPr id="6" name="TextBox 5">
+            <a:extLst>
+              <a:ext uri="{FF2B5EF4-FFF2-40B4-BE49-F238E27FC236}">
+                <a16:creationId xmlns:a16="http://schemas.microsoft.com/office/drawing/2014/main" id="{D95FEA50-3440-F4B4-5AC9-133FE5AB2B90}"/>
+              </a:ext>
+            </a:extLst>
+          </p:cNvPr>
+          <p:cNvSpPr txBox="1"/>
+          <p:nvPr/>
+        </p:nvSpPr>
+        <p:spPr>
+          <a:xfrm>
+            <a:off x="2328863" y="4138613"/>
+            <a:ext cx="3228513" cy="1477328"/>
+          </a:xfrm>
+          <a:prstGeom prst="rect">
+            <a:avLst/>
+          </a:prstGeom>
+          <a:noFill/>
+        </p:spPr>
+        <p:txBody>
+          <a:bodyPr wrap="none" rtlCol="0">
+            <a:spAutoFit/>
+          </a:bodyPr>
+          <a:lstStyle/>
+          <a:p>
+            <a:r>
+              <a:rPr lang="fr-FR" dirty="0" err="1"/>
+              <a:t>nextPrime</a:t>
+            </a:r>
+            <a:r>
+              <a:rPr lang="fr-FR" dirty="0"/>
+              <a:t>?</a:t>
+            </a:r>
+            <a:br>
+              <a:rPr lang="fr-FR" dirty="0"/>
+            </a:br>
+            <a:br>
+              <a:rPr lang="fr-FR" dirty="0"/>
+            </a:br>
+            <a:r>
+              <a:rPr lang="fr-FR" dirty="0" err="1"/>
+              <a:t>next</a:t>
+            </a:r>
+            <a:r>
+              <a:rPr lang="fr-FR" dirty="0"/>
+              <a:t> </a:t>
+            </a:r>
+            <a:r>
+              <a:rPr lang="fr-FR" dirty="0" err="1"/>
+              <a:t>nextPrime</a:t>
+            </a:r>
+            <a:r>
+              <a:rPr lang="fr-FR" dirty="0"/>
+              <a:t> ?</a:t>
+            </a:r>
+          </a:p>
+          <a:p>
+            <a:r>
+              <a:rPr lang="fr-FR" dirty="0"/>
+              <a:t>...</a:t>
+            </a:r>
+          </a:p>
+          <a:p>
+            <a:r>
+              <a:rPr lang="fr-FR" dirty="0" err="1"/>
+              <a:t>next</a:t>
+            </a:r>
+            <a:r>
+              <a:rPr lang="fr-FR" dirty="0"/>
+              <a:t> </a:t>
+            </a:r>
+            <a:r>
+              <a:rPr lang="fr-FR" dirty="0" err="1"/>
+              <a:t>next</a:t>
+            </a:r>
+            <a:r>
+              <a:rPr lang="fr-FR" dirty="0"/>
+              <a:t>  ...(1000)  </a:t>
+            </a:r>
+            <a:r>
+              <a:rPr lang="fr-FR" dirty="0" err="1"/>
+              <a:t>next</a:t>
+            </a:r>
+            <a:r>
+              <a:rPr lang="fr-FR" dirty="0"/>
+              <a:t> Prime ?</a:t>
+            </a:r>
+          </a:p>
+        </p:txBody>
+      </p:sp>
+    </p:spTree>
+    <p:extLst>
+      <p:ext uri="{BB962C8B-B14F-4D97-AF65-F5344CB8AC3E}">
+        <p14:creationId xmlns:p14="http://schemas.microsoft.com/office/powerpoint/2010/main" val="1091991077"/>
+      </p:ext>
+    </p:extLst>
+  </p:cSld>
+  <p:clrMapOvr>
+    <a:masterClrMapping/>
+  </p:clrMapOvr>
+</p:sld>
+</file>
+
+<file path=ppt/slides/slide16.xml><?xml version="1.0" encoding="utf-8"?>
+<p:sld xmlns:a="http://schemas.openxmlformats.org/drawingml/2006/main" xmlns:r="http://schemas.openxmlformats.org/officeDocument/2006/relationships" xmlns:p="http://schemas.openxmlformats.org/presentationml/2006/main">
+  <p:cSld>
+    <p:spTree>
+      <p:nvGrpSpPr>
+        <p:cNvPr id="1" name=""/>
+        <p:cNvGrpSpPr/>
+        <p:nvPr/>
+      </p:nvGrpSpPr>
+      <p:grpSpPr>
+        <a:xfrm>
+          <a:off x="0" y="0"/>
+          <a:ext cx="0" cy="0"/>
+          <a:chOff x="0" y="0"/>
+          <a:chExt cx="0" cy="0"/>
+        </a:xfrm>
+      </p:grpSpPr>
+      <p:sp>
+        <p:nvSpPr>
+          <p:cNvPr id="2" name="Title 1">
+            <a:extLst>
+              <a:ext uri="{FF2B5EF4-FFF2-40B4-BE49-F238E27FC236}">
+                <a16:creationId xmlns:a16="http://schemas.microsoft.com/office/drawing/2014/main" id="{A7B4B6BF-4AF4-F859-EA1F-C6AF343625B8}"/>
+              </a:ext>
+            </a:extLst>
+          </p:cNvPr>
+          <p:cNvSpPr>
+            <a:spLocks noGrp="1"/>
+          </p:cNvSpPr>
+          <p:nvPr>
+            <p:ph type="title"/>
+          </p:nvPr>
+        </p:nvSpPr>
+        <p:spPr>
+          <a:xfrm>
+            <a:off x="750377" y="2219755"/>
+            <a:ext cx="10515600" cy="3199486"/>
+          </a:xfrm>
+        </p:spPr>
+        <p:txBody>
+          <a:bodyPr/>
+          <a:lstStyle/>
+          <a:p>
+            <a:pPr algn="ctr"/>
+            <a:r>
+              <a:rPr lang="fr-FR" dirty="0" err="1"/>
+              <a:t>using</a:t>
+            </a:r>
+            <a:r>
+              <a:rPr lang="fr-FR" dirty="0"/>
+              <a:t> standard java.security.*  package</a:t>
+            </a:r>
+            <a:br>
+              <a:rPr lang="fr-FR" dirty="0"/>
+            </a:br>
+            <a:r>
+              <a:rPr lang="fr-FR" dirty="0"/>
+              <a:t>(class </a:t>
+            </a:r>
+            <a:r>
+              <a:rPr lang="fr-FR" dirty="0" err="1"/>
+              <a:t>MessageDigest</a:t>
+            </a:r>
+            <a:r>
+              <a:rPr lang="fr-FR" dirty="0"/>
+              <a:t>, .. )</a:t>
+            </a:r>
+            <a:br>
+              <a:rPr lang="fr-FR" dirty="0"/>
+            </a:br>
+            <a:br>
+              <a:rPr lang="fr-FR" dirty="0"/>
+            </a:br>
+            <a:r>
+              <a:rPr lang="fr-FR" dirty="0"/>
+              <a:t>compare </a:t>
+            </a:r>
+            <a:r>
+              <a:rPr lang="fr-FR" dirty="0" err="1"/>
+              <a:t>with</a:t>
+            </a:r>
+            <a:r>
+              <a:rPr lang="fr-FR" dirty="0"/>
+              <a:t> </a:t>
+            </a:r>
+            <a:r>
+              <a:rPr lang="fr-FR" dirty="0" err="1"/>
+              <a:t>bash</a:t>
+            </a:r>
+            <a:r>
+              <a:rPr lang="fr-FR" dirty="0"/>
+              <a:t> command line </a:t>
+            </a:r>
+            <a:r>
+              <a:rPr lang="fr-FR" dirty="0" err="1"/>
+              <a:t>tools</a:t>
+            </a:r>
+            <a:endParaRPr lang="fr-FR" dirty="0"/>
+          </a:p>
+        </p:txBody>
+      </p:sp>
+    </p:spTree>
+    <p:extLst>
+      <p:ext uri="{BB962C8B-B14F-4D97-AF65-F5344CB8AC3E}">
+        <p14:creationId xmlns:p14="http://schemas.microsoft.com/office/powerpoint/2010/main" val="710264245"/>
+      </p:ext>
+    </p:extLst>
+  </p:cSld>
+  <p:clrMapOvr>
+    <a:masterClrMapping/>
+  </p:clrMapOvr>
+</p:sld>
+</file>
+
+<file path=ppt/slides/slide17.xml><?xml version="1.0" encoding="utf-8"?>
+<p:sld xmlns:a="http://schemas.openxmlformats.org/drawingml/2006/main" xmlns:r="http://schemas.openxmlformats.org/officeDocument/2006/relationships" xmlns:p="http://schemas.openxmlformats.org/presentationml/2006/main">
+  <p:cSld>
+    <p:spTree>
+      <p:nvGrpSpPr>
+        <p:cNvPr id="1" name=""/>
+        <p:cNvGrpSpPr/>
+        <p:nvPr/>
+      </p:nvGrpSpPr>
+      <p:grpSpPr>
+        <a:xfrm>
+          <a:off x="0" y="0"/>
+          <a:ext cx="0" cy="0"/>
+          <a:chOff x="0" y="0"/>
+          <a:chExt cx="0" cy="0"/>
+        </a:xfrm>
+      </p:grpSpPr>
+      <p:sp>
+        <p:nvSpPr>
+          <p:cNvPr id="2" name="Title 1">
+            <a:extLst>
+              <a:ext uri="{FF2B5EF4-FFF2-40B4-BE49-F238E27FC236}">
+                <a16:creationId xmlns:a16="http://schemas.microsoft.com/office/drawing/2014/main" id="{992F7A9B-943A-8AAF-9530-1E64E60E08E9}"/>
+              </a:ext>
+            </a:extLst>
+          </p:cNvPr>
+          <p:cNvSpPr>
+            <a:spLocks noGrp="1"/>
+          </p:cNvSpPr>
+          <p:nvPr>
+            <p:ph type="title"/>
+          </p:nvPr>
+        </p:nvSpPr>
+        <p:spPr>
+          <a:xfrm>
+            <a:off x="838200" y="113655"/>
+            <a:ext cx="10515600" cy="1916624"/>
+          </a:xfrm>
+        </p:spPr>
+        <p:txBody>
+          <a:bodyPr/>
+          <a:lstStyle/>
+          <a:p>
+            <a:pPr algn="ctr"/>
+            <a:r>
+              <a:rPr lang="fr-FR" dirty="0"/>
+              <a:t>Ex 6: Use Java API to </a:t>
+            </a:r>
+            <a:r>
+              <a:rPr lang="fr-FR" dirty="0" err="1"/>
+              <a:t>compute</a:t>
+            </a:r>
+            <a:r>
+              <a:rPr lang="fr-FR" dirty="0"/>
+              <a:t> "SHA-256"</a:t>
+            </a:r>
+            <a:br>
+              <a:rPr lang="fr-FR" dirty="0"/>
+            </a:br>
+            <a:r>
+              <a:rPr lang="fr-FR" dirty="0"/>
+              <a:t>of </a:t>
+            </a:r>
+            <a:r>
+              <a:rPr lang="fr-FR" dirty="0" err="1"/>
+              <a:t>text</a:t>
+            </a:r>
+            <a:r>
+              <a:rPr lang="fr-FR" dirty="0"/>
+              <a:t>  (ex: "Hello World")</a:t>
+            </a:r>
+            <a:br>
+              <a:rPr lang="fr-FR" dirty="0"/>
+            </a:br>
+            <a:r>
+              <a:rPr lang="fr-FR" dirty="0" err="1"/>
+              <a:t>print</a:t>
+            </a:r>
+            <a:r>
+              <a:rPr lang="fr-FR" dirty="0"/>
+              <a:t> </a:t>
+            </a:r>
+            <a:r>
+              <a:rPr lang="fr-FR" dirty="0" err="1"/>
+              <a:t>result</a:t>
+            </a:r>
+            <a:r>
+              <a:rPr lang="fr-FR" dirty="0"/>
+              <a:t> in Hexa</a:t>
+            </a:r>
+          </a:p>
+        </p:txBody>
+      </p:sp>
+      <p:sp>
+        <p:nvSpPr>
+          <p:cNvPr id="4" name="TextBox 3">
+            <a:extLst>
+              <a:ext uri="{FF2B5EF4-FFF2-40B4-BE49-F238E27FC236}">
+                <a16:creationId xmlns:a16="http://schemas.microsoft.com/office/drawing/2014/main" id="{1737703B-3ADB-3821-6D04-80C3EE8A9DC5}"/>
+              </a:ext>
+            </a:extLst>
+          </p:cNvPr>
+          <p:cNvSpPr txBox="1"/>
+          <p:nvPr/>
+        </p:nvSpPr>
+        <p:spPr>
+          <a:xfrm>
+            <a:off x="3305013" y="3125712"/>
+            <a:ext cx="7960963" cy="3139321"/>
+          </a:xfrm>
+          <a:prstGeom prst="rect">
+            <a:avLst/>
+          </a:prstGeom>
+          <a:noFill/>
+        </p:spPr>
+        <p:txBody>
+          <a:bodyPr wrap="square">
+            <a:spAutoFit/>
+          </a:bodyPr>
+          <a:lstStyle/>
+          <a:p>
+            <a:r>
+              <a:rPr lang="fr-FR" dirty="0"/>
+              <a:t>public </a:t>
+            </a:r>
+            <a:r>
+              <a:rPr lang="fr-FR" dirty="0" err="1"/>
+              <a:t>void</a:t>
+            </a:r>
+            <a:r>
+              <a:rPr lang="fr-FR" dirty="0"/>
+              <a:t> doTestSha256(byte[] data) </a:t>
+            </a:r>
+            <a:r>
+              <a:rPr lang="fr-FR" dirty="0" err="1"/>
+              <a:t>throws</a:t>
+            </a:r>
+            <a:r>
+              <a:rPr lang="fr-FR" dirty="0"/>
+              <a:t> Exception {</a:t>
+            </a:r>
+          </a:p>
+          <a:p>
+            <a:r>
+              <a:rPr lang="fr-FR" dirty="0"/>
+              <a:t>        // **** </a:t>
+            </a:r>
+            <a:r>
+              <a:rPr lang="fr-FR" dirty="0" err="1"/>
+              <a:t>complete</a:t>
+            </a:r>
+            <a:r>
+              <a:rPr lang="fr-FR" dirty="0"/>
+              <a:t> code </a:t>
+            </a:r>
+            <a:r>
+              <a:rPr lang="fr-FR" dirty="0" err="1"/>
+              <a:t>yourself</a:t>
+            </a:r>
+            <a:r>
+              <a:rPr lang="fr-FR" dirty="0"/>
+              <a:t> ****</a:t>
+            </a:r>
+          </a:p>
+          <a:p>
+            <a:r>
+              <a:rPr lang="fr-FR" dirty="0"/>
+              <a:t>        byte[] digest =  ****</a:t>
+            </a:r>
+            <a:br>
+              <a:rPr lang="fr-FR" dirty="0"/>
+            </a:br>
+            <a:br>
+              <a:rPr lang="fr-FR" dirty="0"/>
+            </a:br>
+            <a:r>
+              <a:rPr lang="fr-FR" dirty="0"/>
+              <a:t>        </a:t>
+            </a:r>
+            <a:r>
+              <a:rPr lang="fr-FR" dirty="0" err="1"/>
+              <a:t>System.out.println</a:t>
+            </a:r>
+            <a:r>
+              <a:rPr lang="fr-FR" dirty="0"/>
+              <a:t>("SHA-256 </a:t>
+            </a:r>
+            <a:r>
+              <a:rPr lang="fr-FR" dirty="0" err="1"/>
+              <a:t>printed</a:t>
+            </a:r>
+            <a:r>
+              <a:rPr lang="fr-FR" dirty="0"/>
+              <a:t> (</a:t>
+            </a:r>
+            <a:r>
+              <a:rPr lang="fr-FR" dirty="0" err="1"/>
+              <a:t>binary</a:t>
+            </a:r>
+            <a:r>
+              <a:rPr lang="fr-FR" dirty="0"/>
+              <a:t>, non </a:t>
+            </a:r>
+            <a:r>
+              <a:rPr lang="fr-FR" dirty="0" err="1"/>
+              <a:t>asci</a:t>
+            </a:r>
+            <a:r>
+              <a:rPr lang="fr-FR" dirty="0"/>
+              <a:t>)");</a:t>
+            </a:r>
+          </a:p>
+          <a:p>
+            <a:r>
+              <a:rPr lang="fr-FR" dirty="0"/>
+              <a:t>        </a:t>
+            </a:r>
+            <a:r>
+              <a:rPr lang="fr-FR" dirty="0" err="1"/>
+              <a:t>System.out.println</a:t>
+            </a:r>
+            <a:r>
+              <a:rPr lang="fr-FR" dirty="0"/>
+              <a:t>(new String(digest));</a:t>
+            </a:r>
+          </a:p>
+          <a:p>
+            <a:endParaRPr lang="fr-FR" dirty="0"/>
+          </a:p>
+          <a:p>
+            <a:r>
+              <a:rPr lang="fr-FR" dirty="0"/>
+              <a:t>        String </a:t>
+            </a:r>
+            <a:r>
+              <a:rPr lang="fr-FR" dirty="0" err="1"/>
+              <a:t>hex</a:t>
+            </a:r>
+            <a:r>
+              <a:rPr lang="fr-FR" dirty="0"/>
+              <a:t> = </a:t>
+            </a:r>
+            <a:r>
+              <a:rPr lang="fr-FR" dirty="0" err="1"/>
+              <a:t>HexFormat.of</a:t>
+            </a:r>
+            <a:r>
+              <a:rPr lang="fr-FR" dirty="0"/>
+              <a:t>().</a:t>
+            </a:r>
+            <a:r>
+              <a:rPr lang="fr-FR" dirty="0" err="1"/>
+              <a:t>formatHex</a:t>
+            </a:r>
+            <a:r>
+              <a:rPr lang="fr-FR" dirty="0"/>
+              <a:t>(digest);</a:t>
+            </a:r>
+          </a:p>
+          <a:p>
+            <a:r>
+              <a:rPr lang="fr-FR" dirty="0"/>
+              <a:t>        </a:t>
+            </a:r>
+            <a:r>
+              <a:rPr lang="fr-FR" dirty="0" err="1"/>
+              <a:t>System.out.println</a:t>
+            </a:r>
+            <a:r>
+              <a:rPr lang="fr-FR" dirty="0"/>
+              <a:t>("SHA-256 </a:t>
+            </a:r>
+            <a:r>
+              <a:rPr lang="fr-FR" dirty="0" err="1"/>
+              <a:t>printed</a:t>
+            </a:r>
+            <a:r>
+              <a:rPr lang="fr-FR" dirty="0"/>
+              <a:t> (</a:t>
+            </a:r>
+            <a:r>
+              <a:rPr lang="fr-FR" dirty="0" err="1"/>
+              <a:t>hex</a:t>
+            </a:r>
+            <a:r>
+              <a:rPr lang="fr-FR" dirty="0"/>
+              <a:t>)");</a:t>
+            </a:r>
+          </a:p>
+          <a:p>
+            <a:r>
+              <a:rPr lang="fr-FR" dirty="0"/>
+              <a:t>        </a:t>
+            </a:r>
+            <a:r>
+              <a:rPr lang="fr-FR" dirty="0" err="1"/>
+              <a:t>System.out.println</a:t>
+            </a:r>
+            <a:r>
+              <a:rPr lang="fr-FR" dirty="0"/>
+              <a:t>(</a:t>
+            </a:r>
+            <a:r>
+              <a:rPr lang="fr-FR" dirty="0" err="1"/>
+              <a:t>hex</a:t>
+            </a:r>
+            <a:r>
+              <a:rPr lang="fr-FR" dirty="0"/>
+              <a:t>);</a:t>
+            </a:r>
+          </a:p>
+          <a:p>
+            <a:r>
+              <a:rPr lang="fr-FR" dirty="0"/>
+              <a:t>    }</a:t>
+            </a:r>
+          </a:p>
+        </p:txBody>
+      </p:sp>
+      <p:sp>
+        <p:nvSpPr>
+          <p:cNvPr id="6" name="TextBox 5">
+            <a:extLst>
+              <a:ext uri="{FF2B5EF4-FFF2-40B4-BE49-F238E27FC236}">
+                <a16:creationId xmlns:a16="http://schemas.microsoft.com/office/drawing/2014/main" id="{9303D470-FB81-E1C4-DB92-0D410F92648E}"/>
+              </a:ext>
+            </a:extLst>
+          </p:cNvPr>
+          <p:cNvSpPr txBox="1"/>
+          <p:nvPr/>
+        </p:nvSpPr>
+        <p:spPr>
+          <a:xfrm>
+            <a:off x="0" y="1828889"/>
+            <a:ext cx="6096000" cy="1477328"/>
+          </a:xfrm>
+          <a:prstGeom prst="rect">
+            <a:avLst/>
+          </a:prstGeom>
+          <a:noFill/>
+        </p:spPr>
+        <p:txBody>
+          <a:bodyPr wrap="square">
+            <a:spAutoFit/>
+          </a:bodyPr>
+          <a:lstStyle/>
+          <a:p>
+            <a:r>
+              <a:rPr lang="fr-FR" dirty="0"/>
+              <a:t>    @Test</a:t>
+            </a:r>
+          </a:p>
+          <a:p>
+            <a:r>
+              <a:rPr lang="fr-FR" dirty="0"/>
+              <a:t>    public </a:t>
+            </a:r>
+            <a:r>
+              <a:rPr lang="fr-FR" dirty="0" err="1"/>
+              <a:t>void</a:t>
+            </a:r>
+            <a:r>
+              <a:rPr lang="fr-FR" dirty="0"/>
+              <a:t> </a:t>
+            </a:r>
+            <a:r>
+              <a:rPr lang="fr-FR" dirty="0" err="1"/>
+              <a:t>testMessageDigest</a:t>
+            </a:r>
+            <a:r>
+              <a:rPr lang="fr-FR" dirty="0"/>
+              <a:t>() </a:t>
+            </a:r>
+            <a:r>
+              <a:rPr lang="fr-FR" dirty="0" err="1"/>
+              <a:t>throws</a:t>
+            </a:r>
+            <a:r>
+              <a:rPr lang="fr-FR" dirty="0"/>
+              <a:t> Exception {</a:t>
+            </a:r>
+          </a:p>
+          <a:p>
+            <a:r>
+              <a:rPr lang="fr-FR" dirty="0"/>
+              <a:t>        byte[] data = "Hello World".</a:t>
+            </a:r>
+            <a:r>
+              <a:rPr lang="fr-FR" dirty="0" err="1"/>
+              <a:t>getBytes</a:t>
+            </a:r>
+            <a:r>
+              <a:rPr lang="fr-FR" dirty="0"/>
+              <a:t>();</a:t>
+            </a:r>
+          </a:p>
+          <a:p>
+            <a:r>
+              <a:rPr lang="fr-FR" dirty="0"/>
+              <a:t>        doTestSha256(data);</a:t>
+            </a:r>
+          </a:p>
+          <a:p>
+            <a:r>
+              <a:rPr lang="fr-FR" dirty="0"/>
+              <a:t>    }</a:t>
+            </a:r>
+          </a:p>
+        </p:txBody>
+      </p:sp>
+    </p:spTree>
+    <p:extLst>
+      <p:ext uri="{BB962C8B-B14F-4D97-AF65-F5344CB8AC3E}">
+        <p14:creationId xmlns:p14="http://schemas.microsoft.com/office/powerpoint/2010/main" val="2872483861"/>
+      </p:ext>
+    </p:extLst>
+  </p:cSld>
+  <p:clrMapOvr>
+    <a:masterClrMapping/>
+  </p:clrMapOvr>
+</p:sld>
+</file>
+
+<file path=ppt/slides/slide18.xml><?xml version="1.0" encoding="utf-8"?>
+<p:sld xmlns:a="http://schemas.openxmlformats.org/drawingml/2006/main" xmlns:r="http://schemas.openxmlformats.org/officeDocument/2006/relationships" xmlns:p="http://schemas.openxmlformats.org/presentationml/2006/main">
+  <p:cSld>
+    <p:spTree>
+      <p:nvGrpSpPr>
+        <p:cNvPr id="1" name=""/>
+        <p:cNvGrpSpPr/>
+        <p:nvPr/>
+      </p:nvGrpSpPr>
+      <p:grpSpPr>
+        <a:xfrm>
+          <a:off x="0" y="0"/>
+          <a:ext cx="0" cy="0"/>
+          <a:chOff x="0" y="0"/>
+          <a:chExt cx="0" cy="0"/>
+        </a:xfrm>
+      </p:grpSpPr>
+      <p:sp>
+        <p:nvSpPr>
+          <p:cNvPr id="2" name="Title 1">
+            <a:extLst>
+              <a:ext uri="{FF2B5EF4-FFF2-40B4-BE49-F238E27FC236}">
+                <a16:creationId xmlns:a16="http://schemas.microsoft.com/office/drawing/2014/main" id="{8677351D-BC8D-0461-B1C6-4B321255B1FE}"/>
+              </a:ext>
+            </a:extLst>
+          </p:cNvPr>
+          <p:cNvSpPr>
+            <a:spLocks noGrp="1"/>
+          </p:cNvSpPr>
+          <p:nvPr>
+            <p:ph type="title"/>
+          </p:nvPr>
+        </p:nvSpPr>
+        <p:spPr>
+          <a:xfrm>
+            <a:off x="838200" y="46495"/>
+            <a:ext cx="10515600" cy="1090047"/>
+          </a:xfrm>
+        </p:spPr>
+        <p:txBody>
+          <a:bodyPr/>
+          <a:lstStyle/>
+          <a:p>
+            <a:pPr algn="ctr"/>
+            <a:r>
+              <a:rPr lang="fr-FR" dirty="0"/>
+              <a:t>Ex 7: compare </a:t>
+            </a:r>
+            <a:r>
+              <a:rPr lang="fr-FR" dirty="0" err="1"/>
+              <a:t>with</a:t>
+            </a:r>
+            <a:r>
+              <a:rPr lang="fr-FR" dirty="0"/>
+              <a:t> </a:t>
+            </a:r>
+            <a:r>
+              <a:rPr lang="fr-FR" dirty="0" err="1"/>
+              <a:t>bash</a:t>
+            </a:r>
+            <a:r>
+              <a:rPr lang="fr-FR" dirty="0"/>
+              <a:t> </a:t>
+            </a:r>
+            <a:r>
+              <a:rPr lang="fr-FR" dirty="0" err="1"/>
+              <a:t>tool</a:t>
+            </a:r>
+            <a:endParaRPr lang="fr-FR" dirty="0"/>
+          </a:p>
+        </p:txBody>
+      </p:sp>
+      <p:sp>
+        <p:nvSpPr>
+          <p:cNvPr id="6" name="TextBox 5">
+            <a:extLst>
+              <a:ext uri="{FF2B5EF4-FFF2-40B4-BE49-F238E27FC236}">
+                <a16:creationId xmlns:a16="http://schemas.microsoft.com/office/drawing/2014/main" id="{694990B7-56BA-96F0-53C8-EDD9C375A752}"/>
+              </a:ext>
+            </a:extLst>
+          </p:cNvPr>
+          <p:cNvSpPr txBox="1"/>
+          <p:nvPr/>
+        </p:nvSpPr>
+        <p:spPr>
+          <a:xfrm>
+            <a:off x="2863312" y="3786838"/>
+            <a:ext cx="6096000" cy="2862322"/>
+          </a:xfrm>
+          <a:prstGeom prst="rect">
+            <a:avLst/>
+          </a:prstGeom>
+          <a:noFill/>
+        </p:spPr>
+        <p:txBody>
+          <a:bodyPr wrap="square">
+            <a:spAutoFit/>
+          </a:bodyPr>
+          <a:lstStyle/>
+          <a:p>
+            <a:r>
+              <a:rPr lang="fr-FR" dirty="0"/>
+              <a:t>    @Test</a:t>
+            </a:r>
+          </a:p>
+          <a:p>
+            <a:r>
+              <a:rPr lang="fr-FR" dirty="0"/>
+              <a:t>    public </a:t>
+            </a:r>
+            <a:r>
+              <a:rPr lang="fr-FR" dirty="0" err="1"/>
+              <a:t>void</a:t>
+            </a:r>
+            <a:r>
+              <a:rPr lang="fr-FR" dirty="0"/>
+              <a:t> </a:t>
+            </a:r>
+            <a:r>
+              <a:rPr lang="fr-FR" dirty="0" err="1"/>
+              <a:t>testMessageDigest</a:t>
+            </a:r>
+            <a:r>
+              <a:rPr lang="fr-FR" dirty="0"/>
+              <a:t>() </a:t>
+            </a:r>
+            <a:r>
+              <a:rPr lang="fr-FR" dirty="0" err="1"/>
+              <a:t>throws</a:t>
+            </a:r>
+            <a:r>
+              <a:rPr lang="fr-FR" dirty="0"/>
+              <a:t> Exception {</a:t>
+            </a:r>
+          </a:p>
+          <a:p>
+            <a:r>
+              <a:rPr lang="fr-FR" dirty="0"/>
+              <a:t>        byte[] data = "Hello World".</a:t>
+            </a:r>
+            <a:r>
+              <a:rPr lang="fr-FR" dirty="0" err="1"/>
+              <a:t>getBytes</a:t>
+            </a:r>
+            <a:r>
+              <a:rPr lang="fr-FR" dirty="0"/>
+              <a:t>();</a:t>
+            </a:r>
+          </a:p>
+          <a:p>
+            <a:r>
+              <a:rPr lang="fr-FR" dirty="0"/>
+              <a:t>        doTestSha256(data);</a:t>
+            </a:r>
+          </a:p>
+          <a:p>
+            <a:r>
+              <a:rPr lang="fr-FR" dirty="0"/>
+              <a:t>    }</a:t>
+            </a:r>
+          </a:p>
+          <a:p>
+            <a:r>
+              <a:rPr lang="fr-FR" dirty="0"/>
+              <a:t>   @Test</a:t>
+            </a:r>
+          </a:p>
+          <a:p>
+            <a:r>
+              <a:rPr lang="fr-FR" dirty="0"/>
+              <a:t>    public </a:t>
+            </a:r>
+            <a:r>
+              <a:rPr lang="fr-FR" dirty="0" err="1"/>
+              <a:t>void</a:t>
+            </a:r>
+            <a:r>
+              <a:rPr lang="fr-FR" dirty="0"/>
+              <a:t> </a:t>
+            </a:r>
+            <a:r>
+              <a:rPr lang="fr-FR" dirty="0" err="1"/>
+              <a:t>testMessageDigest_newline</a:t>
+            </a:r>
+            <a:r>
+              <a:rPr lang="fr-FR" dirty="0"/>
+              <a:t>() </a:t>
+            </a:r>
+            <a:r>
+              <a:rPr lang="fr-FR" dirty="0" err="1"/>
+              <a:t>throws</a:t>
+            </a:r>
+            <a:r>
+              <a:rPr lang="fr-FR" dirty="0"/>
+              <a:t> Exception {</a:t>
+            </a:r>
+          </a:p>
+          <a:p>
+            <a:r>
+              <a:rPr lang="fr-FR" dirty="0"/>
+              <a:t>        byte[] data = "Hello World\n".</a:t>
+            </a:r>
+            <a:r>
+              <a:rPr lang="fr-FR" dirty="0" err="1"/>
+              <a:t>getBytes</a:t>
+            </a:r>
+            <a:r>
+              <a:rPr lang="fr-FR" dirty="0"/>
+              <a:t>();</a:t>
+            </a:r>
+          </a:p>
+          <a:p>
+            <a:r>
+              <a:rPr lang="fr-FR" dirty="0"/>
+              <a:t>        doTestSha256(data);</a:t>
+            </a:r>
+          </a:p>
+          <a:p>
+            <a:r>
+              <a:rPr lang="fr-FR" dirty="0"/>
+              <a:t>    }</a:t>
+            </a:r>
+          </a:p>
+        </p:txBody>
+      </p:sp>
+      <p:sp>
+        <p:nvSpPr>
+          <p:cNvPr id="8" name="TextBox 7">
+            <a:extLst>
+              <a:ext uri="{FF2B5EF4-FFF2-40B4-BE49-F238E27FC236}">
+                <a16:creationId xmlns:a16="http://schemas.microsoft.com/office/drawing/2014/main" id="{5432DC02-B167-6751-072F-D1F0543C613F}"/>
+              </a:ext>
+            </a:extLst>
+          </p:cNvPr>
+          <p:cNvSpPr txBox="1"/>
+          <p:nvPr/>
+        </p:nvSpPr>
+        <p:spPr>
+          <a:xfrm>
+            <a:off x="2863312" y="1883505"/>
+            <a:ext cx="8708756" cy="1754326"/>
+          </a:xfrm>
+          <a:prstGeom prst="rect">
+            <a:avLst/>
+          </a:prstGeom>
+          <a:noFill/>
+        </p:spPr>
+        <p:txBody>
+          <a:bodyPr wrap="square">
+            <a:spAutoFit/>
+          </a:bodyPr>
+          <a:lstStyle/>
+          <a:p>
+            <a:r>
+              <a:rPr lang="fr-FR" dirty="0"/>
+              <a:t>$ </a:t>
+            </a:r>
+            <a:r>
+              <a:rPr lang="fr-FR" dirty="0" err="1"/>
+              <a:t>echo</a:t>
+            </a:r>
+            <a:r>
+              <a:rPr lang="fr-FR" dirty="0"/>
+              <a:t> -n "Hello World" | sha256sum</a:t>
+            </a:r>
+          </a:p>
+          <a:p>
+            <a:r>
+              <a:rPr lang="fr-FR" dirty="0"/>
+              <a:t>a591a6d40bf420404a011733cfb7b190d62c65bf0bcda32b57b277d9ad9f146e *-</a:t>
+            </a:r>
+          </a:p>
+          <a:p>
+            <a:endParaRPr lang="fr-FR" dirty="0"/>
+          </a:p>
+          <a:p>
+            <a:r>
+              <a:rPr lang="fr-FR" dirty="0"/>
+              <a:t>$ </a:t>
+            </a:r>
+            <a:r>
+              <a:rPr lang="fr-FR" dirty="0" err="1"/>
+              <a:t>echo</a:t>
+            </a:r>
+            <a:r>
+              <a:rPr lang="fr-FR" dirty="0"/>
+              <a:t> "Hello World" | sha256sum</a:t>
+            </a:r>
+          </a:p>
+          <a:p>
+            <a:r>
+              <a:rPr lang="fr-FR" dirty="0"/>
+              <a:t>d2a84f4b8b650937ec8f73cd8be2c74add5a911ba64df27458ed8229da804a26 *-</a:t>
+            </a:r>
+          </a:p>
+          <a:p>
+            <a:endParaRPr lang="fr-FR" dirty="0"/>
+          </a:p>
+        </p:txBody>
+      </p:sp>
+    </p:spTree>
+    <p:extLst>
+      <p:ext uri="{BB962C8B-B14F-4D97-AF65-F5344CB8AC3E}">
+        <p14:creationId xmlns:p14="http://schemas.microsoft.com/office/powerpoint/2010/main" val="601662291"/>
+      </p:ext>
+    </p:extLst>
+  </p:cSld>
+  <p:clrMapOvr>
+    <a:masterClrMapping/>
+  </p:clrMapOvr>
+</p:sld>
+</file>
+
+<file path=ppt/slides/slide19.xml><?xml version="1.0" encoding="utf-8"?>
+<p:sld xmlns:a="http://schemas.openxmlformats.org/drawingml/2006/main" xmlns:r="http://schemas.openxmlformats.org/officeDocument/2006/relationships" xmlns:p="http://schemas.openxmlformats.org/presentationml/2006/main">
+  <p:cSld>
+    <p:spTree>
+      <p:nvGrpSpPr>
+        <p:cNvPr id="1" name="">
+          <a:extLst>
+            <a:ext uri="{FF2B5EF4-FFF2-40B4-BE49-F238E27FC236}">
+              <a16:creationId xmlns:a16="http://schemas.microsoft.com/office/drawing/2014/main" id="{55E8C4D1-2243-AF58-1C7F-E9537F751E69}"/>
+            </a:ext>
+          </a:extLst>
+        </p:cNvPr>
+        <p:cNvGrpSpPr/>
+        <p:nvPr/>
+      </p:nvGrpSpPr>
+      <p:grpSpPr>
+        <a:xfrm>
+          <a:off x="0" y="0"/>
+          <a:ext cx="0" cy="0"/>
+          <a:chOff x="0" y="0"/>
+          <a:chExt cx="0" cy="0"/>
+        </a:xfrm>
+      </p:grpSpPr>
+      <p:sp>
+        <p:nvSpPr>
+          <p:cNvPr id="2" name="Title 1">
+            <a:extLst>
+              <a:ext uri="{FF2B5EF4-FFF2-40B4-BE49-F238E27FC236}">
+                <a16:creationId xmlns:a16="http://schemas.microsoft.com/office/drawing/2014/main" id="{F51E8B4C-8161-151E-AE97-07A1F55EECE2}"/>
+              </a:ext>
+            </a:extLst>
+          </p:cNvPr>
+          <p:cNvSpPr>
+            <a:spLocks noGrp="1"/>
+          </p:cNvSpPr>
+          <p:nvPr>
+            <p:ph type="title"/>
+          </p:nvPr>
+        </p:nvSpPr>
+        <p:spPr/>
+        <p:txBody>
+          <a:bodyPr/>
+          <a:lstStyle/>
+          <a:p>
+            <a:pPr algn="ctr"/>
+            <a:r>
+              <a:rPr lang="fr-FR" dirty="0"/>
+              <a:t>Ex 8: Use Java API to </a:t>
+            </a:r>
+            <a:r>
+              <a:rPr lang="fr-FR" dirty="0" err="1"/>
+              <a:t>encrypt</a:t>
+            </a:r>
+            <a:r>
+              <a:rPr lang="fr-FR" dirty="0"/>
+              <a:t> a </a:t>
+            </a:r>
+            <a:r>
+              <a:rPr lang="fr-FR" dirty="0" err="1"/>
+              <a:t>text</a:t>
+            </a:r>
+            <a:r>
+              <a:rPr lang="fr-FR" dirty="0"/>
+              <a:t> </a:t>
+            </a:r>
+            <a:r>
+              <a:rPr lang="fr-FR" dirty="0" err="1"/>
+              <a:t>then</a:t>
+            </a:r>
+            <a:r>
+              <a:rPr lang="fr-FR" dirty="0"/>
+              <a:t> </a:t>
+            </a:r>
+            <a:r>
+              <a:rPr lang="fr-FR" dirty="0" err="1"/>
+              <a:t>decrypt</a:t>
+            </a:r>
+            <a:r>
+              <a:rPr lang="fr-FR" dirty="0"/>
+              <a:t>, </a:t>
+            </a:r>
+            <a:r>
+              <a:rPr lang="fr-FR" dirty="0" err="1"/>
+              <a:t>with</a:t>
+            </a:r>
+            <a:r>
+              <a:rPr lang="fr-FR" dirty="0"/>
+              <a:t> RSA </a:t>
+            </a:r>
+            <a:r>
+              <a:rPr lang="fr-FR" dirty="0" err="1"/>
+              <a:t>Assymetric</a:t>
+            </a:r>
+            <a:r>
+              <a:rPr lang="fr-FR" dirty="0"/>
+              <a:t> </a:t>
+            </a:r>
+            <a:r>
+              <a:rPr lang="fr-FR" dirty="0" err="1"/>
+              <a:t>algorithm</a:t>
+            </a:r>
+            <a:endParaRPr lang="fr-FR" dirty="0"/>
+          </a:p>
+        </p:txBody>
+      </p:sp>
+    </p:spTree>
+    <p:extLst>
+      <p:ext uri="{BB962C8B-B14F-4D97-AF65-F5344CB8AC3E}">
+        <p14:creationId xmlns:p14="http://schemas.microsoft.com/office/powerpoint/2010/main" val="4223161111"/>
       </p:ext>
     </p:extLst>
   </p:cSld>
@@ -3630,6 +5775,2048 @@
 </p:sld>
 </file>
 
+<file path=ppt/slides/slide20.xml><?xml version="1.0" encoding="utf-8"?>
+<p:sld xmlns:a="http://schemas.openxmlformats.org/drawingml/2006/main" xmlns:r="http://schemas.openxmlformats.org/officeDocument/2006/relationships" xmlns:p="http://schemas.openxmlformats.org/presentationml/2006/main">
+  <p:cSld>
+    <p:spTree>
+      <p:nvGrpSpPr>
+        <p:cNvPr id="1" name=""/>
+        <p:cNvGrpSpPr/>
+        <p:nvPr/>
+      </p:nvGrpSpPr>
+      <p:grpSpPr>
+        <a:xfrm>
+          <a:off x="0" y="0"/>
+          <a:ext cx="0" cy="0"/>
+          <a:chOff x="0" y="0"/>
+          <a:chExt cx="0" cy="0"/>
+        </a:xfrm>
+      </p:grpSpPr>
+      <p:sp>
+        <p:nvSpPr>
+          <p:cNvPr id="2" name="Title 1">
+            <a:extLst>
+              <a:ext uri="{FF2B5EF4-FFF2-40B4-BE49-F238E27FC236}">
+                <a16:creationId xmlns:a16="http://schemas.microsoft.com/office/drawing/2014/main" id="{6568CFE4-357D-49AE-3D8B-CD9A8A769F14}"/>
+              </a:ext>
+            </a:extLst>
+          </p:cNvPr>
+          <p:cNvSpPr>
+            <a:spLocks noGrp="1"/>
+          </p:cNvSpPr>
+          <p:nvPr>
+            <p:ph type="title"/>
+          </p:nvPr>
+        </p:nvSpPr>
+        <p:spPr/>
+        <p:txBody>
+          <a:bodyPr/>
+          <a:lstStyle/>
+          <a:p>
+            <a:r>
+              <a:rPr lang="fr-FR" dirty="0"/>
+              <a:t>Ex 9: Use </a:t>
+            </a:r>
+            <a:r>
+              <a:rPr lang="fr-FR" dirty="0" err="1"/>
+              <a:t>jdk</a:t>
+            </a:r>
+            <a:r>
+              <a:rPr lang="fr-FR" dirty="0"/>
+              <a:t>/bin/</a:t>
+            </a:r>
+            <a:r>
+              <a:rPr lang="fr-FR" dirty="0" err="1"/>
+              <a:t>keytool</a:t>
+            </a:r>
+            <a:r>
+              <a:rPr lang="fr-FR" dirty="0"/>
+              <a:t>  </a:t>
+            </a:r>
+            <a:br>
+              <a:rPr lang="fr-FR" dirty="0"/>
+            </a:br>
+            <a:r>
+              <a:rPr lang="fr-FR" dirty="0"/>
+              <a:t>to </a:t>
+            </a:r>
+            <a:r>
+              <a:rPr lang="fr-FR" dirty="0" err="1"/>
+              <a:t>generate</a:t>
+            </a:r>
+            <a:r>
+              <a:rPr lang="fr-FR" dirty="0"/>
+              <a:t> a </a:t>
+            </a:r>
+            <a:r>
+              <a:rPr lang="fr-FR" dirty="0" err="1"/>
+              <a:t>PrivateKey</a:t>
+            </a:r>
+            <a:endParaRPr lang="fr-FR" dirty="0"/>
+          </a:p>
+        </p:txBody>
+      </p:sp>
+    </p:spTree>
+    <p:extLst>
+      <p:ext uri="{BB962C8B-B14F-4D97-AF65-F5344CB8AC3E}">
+        <p14:creationId xmlns:p14="http://schemas.microsoft.com/office/powerpoint/2010/main" val="3625451449"/>
+      </p:ext>
+    </p:extLst>
+  </p:cSld>
+  <p:clrMapOvr>
+    <a:masterClrMapping/>
+  </p:clrMapOvr>
+</p:sld>
+</file>
+
+<file path=ppt/slides/slide21.xml><?xml version="1.0" encoding="utf-8"?>
+<p:sld xmlns:a="http://schemas.openxmlformats.org/drawingml/2006/main" xmlns:r="http://schemas.openxmlformats.org/officeDocument/2006/relationships" xmlns:p="http://schemas.openxmlformats.org/presentationml/2006/main">
+  <p:cSld>
+    <p:spTree>
+      <p:nvGrpSpPr>
+        <p:cNvPr id="1" name=""/>
+        <p:cNvGrpSpPr/>
+        <p:nvPr/>
+      </p:nvGrpSpPr>
+      <p:grpSpPr>
+        <a:xfrm>
+          <a:off x="0" y="0"/>
+          <a:ext cx="0" cy="0"/>
+          <a:chOff x="0" y="0"/>
+          <a:chExt cx="0" cy="0"/>
+        </a:xfrm>
+      </p:grpSpPr>
+      <p:sp>
+        <p:nvSpPr>
+          <p:cNvPr id="2" name="Title 1">
+            <a:extLst>
+              <a:ext uri="{FF2B5EF4-FFF2-40B4-BE49-F238E27FC236}">
+                <a16:creationId xmlns:a16="http://schemas.microsoft.com/office/drawing/2014/main" id="{C67192DD-924F-409C-4F88-1CB701067E69}"/>
+              </a:ext>
+            </a:extLst>
+          </p:cNvPr>
+          <p:cNvSpPr>
+            <a:spLocks noGrp="1"/>
+          </p:cNvSpPr>
+          <p:nvPr>
+            <p:ph type="title"/>
+          </p:nvPr>
+        </p:nvSpPr>
+        <p:spPr/>
+        <p:txBody>
+          <a:bodyPr/>
+          <a:lstStyle/>
+          <a:p>
+            <a:r>
+              <a:rPr lang="fr-FR" dirty="0"/>
+              <a:t>Ex 10: Install java </a:t>
+            </a:r>
+            <a:r>
+              <a:rPr lang="fr-FR" dirty="0" err="1"/>
+              <a:t>KeyStore</a:t>
+            </a:r>
+            <a:r>
+              <a:rPr lang="fr-FR" dirty="0"/>
+              <a:t> Explorer (UI)</a:t>
+            </a:r>
+            <a:br>
+              <a:rPr lang="fr-FR" dirty="0"/>
+            </a:br>
+            <a:r>
+              <a:rPr lang="fr-FR" dirty="0"/>
+              <a:t>https://keystore-explorer.org/</a:t>
+            </a:r>
+          </a:p>
+        </p:txBody>
+      </p:sp>
+      <p:pic>
+        <p:nvPicPr>
+          <p:cNvPr id="5" name="Picture 4">
+            <a:extLst>
+              <a:ext uri="{FF2B5EF4-FFF2-40B4-BE49-F238E27FC236}">
+                <a16:creationId xmlns:a16="http://schemas.microsoft.com/office/drawing/2014/main" id="{C310BBC4-A49C-109F-7D02-A36072049C61}"/>
+              </a:ext>
+            </a:extLst>
+          </p:cNvPr>
+          <p:cNvPicPr>
+            <a:picLocks noChangeAspect="1"/>
+          </p:cNvPicPr>
+          <p:nvPr/>
+        </p:nvPicPr>
+        <p:blipFill>
+          <a:blip r:embed="rId2"/>
+          <a:stretch>
+            <a:fillRect/>
+          </a:stretch>
+        </p:blipFill>
+        <p:spPr>
+          <a:xfrm>
+            <a:off x="1957953" y="1607048"/>
+            <a:ext cx="9097095" cy="5121800"/>
+          </a:xfrm>
+          <a:prstGeom prst="rect">
+            <a:avLst/>
+          </a:prstGeom>
+        </p:spPr>
+      </p:pic>
+    </p:spTree>
+    <p:extLst>
+      <p:ext uri="{BB962C8B-B14F-4D97-AF65-F5344CB8AC3E}">
+        <p14:creationId xmlns:p14="http://schemas.microsoft.com/office/powerpoint/2010/main" val="2911254503"/>
+      </p:ext>
+    </p:extLst>
+  </p:cSld>
+  <p:clrMapOvr>
+    <a:masterClrMapping/>
+  </p:clrMapOvr>
+</p:sld>
+</file>
+
+<file path=ppt/slides/slide22.xml><?xml version="1.0" encoding="utf-8"?>
+<p:sld xmlns:a="http://schemas.openxmlformats.org/drawingml/2006/main" xmlns:r="http://schemas.openxmlformats.org/officeDocument/2006/relationships" xmlns:p="http://schemas.openxmlformats.org/presentationml/2006/main">
+  <p:cSld>
+    <p:spTree>
+      <p:nvGrpSpPr>
+        <p:cNvPr id="1" name=""/>
+        <p:cNvGrpSpPr/>
+        <p:nvPr/>
+      </p:nvGrpSpPr>
+      <p:grpSpPr>
+        <a:xfrm>
+          <a:off x="0" y="0"/>
+          <a:ext cx="0" cy="0"/>
+          <a:chOff x="0" y="0"/>
+          <a:chExt cx="0" cy="0"/>
+        </a:xfrm>
+      </p:grpSpPr>
+      <p:sp>
+        <p:nvSpPr>
+          <p:cNvPr id="2" name="Title 1">
+            <a:extLst>
+              <a:ext uri="{FF2B5EF4-FFF2-40B4-BE49-F238E27FC236}">
+                <a16:creationId xmlns:a16="http://schemas.microsoft.com/office/drawing/2014/main" id="{A82E1046-851C-02C9-B693-4E354AD880A6}"/>
+              </a:ext>
+            </a:extLst>
+          </p:cNvPr>
+          <p:cNvSpPr>
+            <a:spLocks noGrp="1"/>
+          </p:cNvSpPr>
+          <p:nvPr>
+            <p:ph type="title"/>
+          </p:nvPr>
+        </p:nvSpPr>
+        <p:spPr>
+          <a:xfrm>
+            <a:off x="838200" y="41189"/>
+            <a:ext cx="10515600" cy="1325563"/>
+          </a:xfrm>
+        </p:spPr>
+        <p:txBody>
+          <a:bodyPr/>
+          <a:lstStyle/>
+          <a:p>
+            <a:r>
+              <a:rPr lang="fr-FR" dirty="0"/>
+              <a:t>Launch "kse.exe"</a:t>
+            </a:r>
+          </a:p>
+        </p:txBody>
+      </p:sp>
+      <p:pic>
+        <p:nvPicPr>
+          <p:cNvPr id="5" name="Picture 4">
+            <a:extLst>
+              <a:ext uri="{FF2B5EF4-FFF2-40B4-BE49-F238E27FC236}">
+                <a16:creationId xmlns:a16="http://schemas.microsoft.com/office/drawing/2014/main" id="{D559A721-9E6D-7C32-418F-BFFC02F1AAD9}"/>
+              </a:ext>
+            </a:extLst>
+          </p:cNvPr>
+          <p:cNvPicPr>
+            <a:picLocks noChangeAspect="1"/>
+          </p:cNvPicPr>
+          <p:nvPr/>
+        </p:nvPicPr>
+        <p:blipFill>
+          <a:blip r:embed="rId2"/>
+          <a:stretch>
+            <a:fillRect/>
+          </a:stretch>
+        </p:blipFill>
+        <p:spPr>
+          <a:xfrm>
+            <a:off x="233845" y="1056274"/>
+            <a:ext cx="3165449" cy="2843815"/>
+          </a:xfrm>
+          <a:prstGeom prst="rect">
+            <a:avLst/>
+          </a:prstGeom>
+        </p:spPr>
+      </p:pic>
+      <p:pic>
+        <p:nvPicPr>
+          <p:cNvPr id="7" name="Picture 6">
+            <a:extLst>
+              <a:ext uri="{FF2B5EF4-FFF2-40B4-BE49-F238E27FC236}">
+                <a16:creationId xmlns:a16="http://schemas.microsoft.com/office/drawing/2014/main" id="{0E3D827F-4909-6F94-A622-D41F43510296}"/>
+              </a:ext>
+            </a:extLst>
+          </p:cNvPr>
+          <p:cNvPicPr>
+            <a:picLocks noChangeAspect="1"/>
+          </p:cNvPicPr>
+          <p:nvPr/>
+        </p:nvPicPr>
+        <p:blipFill>
+          <a:blip r:embed="rId3"/>
+          <a:stretch>
+            <a:fillRect/>
+          </a:stretch>
+        </p:blipFill>
+        <p:spPr>
+          <a:xfrm>
+            <a:off x="4042508" y="1484066"/>
+            <a:ext cx="6668078" cy="5067739"/>
+          </a:xfrm>
+          <a:prstGeom prst="rect">
+            <a:avLst/>
+          </a:prstGeom>
+        </p:spPr>
+      </p:pic>
+    </p:spTree>
+    <p:extLst>
+      <p:ext uri="{BB962C8B-B14F-4D97-AF65-F5344CB8AC3E}">
+        <p14:creationId xmlns:p14="http://schemas.microsoft.com/office/powerpoint/2010/main" val="3494605008"/>
+      </p:ext>
+    </p:extLst>
+  </p:cSld>
+  <p:clrMapOvr>
+    <a:masterClrMapping/>
+  </p:clrMapOvr>
+</p:sld>
+</file>
+
+<file path=ppt/slides/slide23.xml><?xml version="1.0" encoding="utf-8"?>
+<p:sld xmlns:a="http://schemas.openxmlformats.org/drawingml/2006/main" xmlns:r="http://schemas.openxmlformats.org/officeDocument/2006/relationships" xmlns:p="http://schemas.openxmlformats.org/presentationml/2006/main">
+  <p:cSld>
+    <p:spTree>
+      <p:nvGrpSpPr>
+        <p:cNvPr id="1" name=""/>
+        <p:cNvGrpSpPr/>
+        <p:nvPr/>
+      </p:nvGrpSpPr>
+      <p:grpSpPr>
+        <a:xfrm>
+          <a:off x="0" y="0"/>
+          <a:ext cx="0" cy="0"/>
+          <a:chOff x="0" y="0"/>
+          <a:chExt cx="0" cy="0"/>
+        </a:xfrm>
+      </p:grpSpPr>
+      <p:sp>
+        <p:nvSpPr>
+          <p:cNvPr id="2" name="Title 1">
+            <a:extLst>
+              <a:ext uri="{FF2B5EF4-FFF2-40B4-BE49-F238E27FC236}">
+                <a16:creationId xmlns:a16="http://schemas.microsoft.com/office/drawing/2014/main" id="{64E48FF7-78DB-F8F0-5D17-F20227A2044F}"/>
+              </a:ext>
+            </a:extLst>
+          </p:cNvPr>
+          <p:cNvSpPr>
+            <a:spLocks noGrp="1"/>
+          </p:cNvSpPr>
+          <p:nvPr>
+            <p:ph type="title"/>
+          </p:nvPr>
+        </p:nvSpPr>
+        <p:spPr>
+          <a:xfrm>
+            <a:off x="838200" y="181402"/>
+            <a:ext cx="10515600" cy="1325563"/>
+          </a:xfrm>
+        </p:spPr>
+        <p:txBody>
+          <a:bodyPr/>
+          <a:lstStyle/>
+          <a:p>
+            <a:r>
+              <a:rPr lang="fr-FR" dirty="0" err="1"/>
+              <a:t>Create</a:t>
+            </a:r>
+            <a:r>
+              <a:rPr lang="fr-FR" dirty="0"/>
+              <a:t> a new </a:t>
+            </a:r>
+            <a:r>
+              <a:rPr lang="fr-FR" dirty="0" err="1"/>
+              <a:t>KeyStore</a:t>
+            </a:r>
+            <a:r>
+              <a:rPr lang="fr-FR" dirty="0"/>
+              <a:t> </a:t>
+            </a:r>
+            <a:br>
+              <a:rPr lang="fr-FR" dirty="0"/>
+            </a:br>
+            <a:r>
+              <a:rPr lang="fr-FR" dirty="0"/>
+              <a:t>( or open an </a:t>
+            </a:r>
+            <a:r>
+              <a:rPr lang="fr-FR" dirty="0" err="1"/>
+              <a:t>existing</a:t>
+            </a:r>
+            <a:r>
+              <a:rPr lang="fr-FR" dirty="0"/>
+              <a:t> *.p12 / *.</a:t>
+            </a:r>
+            <a:r>
+              <a:rPr lang="fr-FR" dirty="0" err="1"/>
+              <a:t>jks</a:t>
+            </a:r>
+            <a:r>
+              <a:rPr lang="fr-FR" dirty="0"/>
+              <a:t> file)</a:t>
+            </a:r>
+          </a:p>
+        </p:txBody>
+      </p:sp>
+      <p:pic>
+        <p:nvPicPr>
+          <p:cNvPr id="5" name="Picture 4">
+            <a:extLst>
+              <a:ext uri="{FF2B5EF4-FFF2-40B4-BE49-F238E27FC236}">
+                <a16:creationId xmlns:a16="http://schemas.microsoft.com/office/drawing/2014/main" id="{27B87CE8-EA26-BA30-D9F4-6FC8B06A88F2}"/>
+              </a:ext>
+            </a:extLst>
+          </p:cNvPr>
+          <p:cNvPicPr>
+            <a:picLocks noChangeAspect="1"/>
+          </p:cNvPicPr>
+          <p:nvPr/>
+        </p:nvPicPr>
+        <p:blipFill>
+          <a:blip r:embed="rId2"/>
+          <a:stretch>
+            <a:fillRect/>
+          </a:stretch>
+        </p:blipFill>
+        <p:spPr>
+          <a:xfrm>
+            <a:off x="2910971" y="1627910"/>
+            <a:ext cx="6649026" cy="5048688"/>
+          </a:xfrm>
+          <a:prstGeom prst="rect">
+            <a:avLst/>
+          </a:prstGeom>
+        </p:spPr>
+      </p:pic>
+    </p:spTree>
+    <p:extLst>
+      <p:ext uri="{BB962C8B-B14F-4D97-AF65-F5344CB8AC3E}">
+        <p14:creationId xmlns:p14="http://schemas.microsoft.com/office/powerpoint/2010/main" val="4033569272"/>
+      </p:ext>
+    </p:extLst>
+  </p:cSld>
+  <p:clrMapOvr>
+    <a:masterClrMapping/>
+  </p:clrMapOvr>
+</p:sld>
+</file>
+
+<file path=ppt/slides/slide24.xml><?xml version="1.0" encoding="utf-8"?>
+<p:sld xmlns:a="http://schemas.openxmlformats.org/drawingml/2006/main" xmlns:r="http://schemas.openxmlformats.org/officeDocument/2006/relationships" xmlns:p="http://schemas.openxmlformats.org/presentationml/2006/main">
+  <p:cSld>
+    <p:spTree>
+      <p:nvGrpSpPr>
+        <p:cNvPr id="1" name=""/>
+        <p:cNvGrpSpPr/>
+        <p:nvPr/>
+      </p:nvGrpSpPr>
+      <p:grpSpPr>
+        <a:xfrm>
+          <a:off x="0" y="0"/>
+          <a:ext cx="0" cy="0"/>
+          <a:chOff x="0" y="0"/>
+          <a:chExt cx="0" cy="0"/>
+        </a:xfrm>
+      </p:grpSpPr>
+      <p:sp>
+        <p:nvSpPr>
+          <p:cNvPr id="2" name="Title 1">
+            <a:extLst>
+              <a:ext uri="{FF2B5EF4-FFF2-40B4-BE49-F238E27FC236}">
+                <a16:creationId xmlns:a16="http://schemas.microsoft.com/office/drawing/2014/main" id="{0F4BAB4B-C42B-A5C1-9B4C-0C5B55287540}"/>
+              </a:ext>
+            </a:extLst>
+          </p:cNvPr>
+          <p:cNvSpPr>
+            <a:spLocks noGrp="1"/>
+          </p:cNvSpPr>
+          <p:nvPr>
+            <p:ph type="title"/>
+          </p:nvPr>
+        </p:nvSpPr>
+        <p:spPr>
+          <a:xfrm>
+            <a:off x="838200" y="44828"/>
+            <a:ext cx="10515600" cy="935314"/>
+          </a:xfrm>
+        </p:spPr>
+        <p:txBody>
+          <a:bodyPr/>
+          <a:lstStyle/>
+          <a:p>
+            <a:r>
+              <a:rPr lang="fr-FR" dirty="0" err="1"/>
+              <a:t>Generate</a:t>
+            </a:r>
+            <a:r>
+              <a:rPr lang="fr-FR" dirty="0"/>
+              <a:t> a "Secret Key"</a:t>
+            </a:r>
+          </a:p>
+        </p:txBody>
+      </p:sp>
+      <p:pic>
+        <p:nvPicPr>
+          <p:cNvPr id="5" name="Picture 4">
+            <a:extLst>
+              <a:ext uri="{FF2B5EF4-FFF2-40B4-BE49-F238E27FC236}">
+                <a16:creationId xmlns:a16="http://schemas.microsoft.com/office/drawing/2014/main" id="{3B5E820D-183E-5F04-E0AB-9DF2BA8BF741}"/>
+              </a:ext>
+            </a:extLst>
+          </p:cNvPr>
+          <p:cNvPicPr>
+            <a:picLocks noChangeAspect="1"/>
+          </p:cNvPicPr>
+          <p:nvPr/>
+        </p:nvPicPr>
+        <p:blipFill>
+          <a:blip r:embed="rId2"/>
+          <a:stretch>
+            <a:fillRect/>
+          </a:stretch>
+        </p:blipFill>
+        <p:spPr>
+          <a:xfrm>
+            <a:off x="190182" y="959093"/>
+            <a:ext cx="6675698" cy="5067739"/>
+          </a:xfrm>
+          <a:prstGeom prst="rect">
+            <a:avLst/>
+          </a:prstGeom>
+        </p:spPr>
+      </p:pic>
+      <p:pic>
+        <p:nvPicPr>
+          <p:cNvPr id="7" name="Picture 6">
+            <a:extLst>
+              <a:ext uri="{FF2B5EF4-FFF2-40B4-BE49-F238E27FC236}">
+                <a16:creationId xmlns:a16="http://schemas.microsoft.com/office/drawing/2014/main" id="{484AF6D5-F651-3C4F-B98D-491B1149FA07}"/>
+              </a:ext>
+            </a:extLst>
+          </p:cNvPr>
+          <p:cNvPicPr>
+            <a:picLocks noChangeAspect="1"/>
+          </p:cNvPicPr>
+          <p:nvPr/>
+        </p:nvPicPr>
+        <p:blipFill>
+          <a:blip r:embed="rId3"/>
+          <a:stretch>
+            <a:fillRect/>
+          </a:stretch>
+        </p:blipFill>
+        <p:spPr>
+          <a:xfrm>
+            <a:off x="4586775" y="2710753"/>
+            <a:ext cx="2141406" cy="1436494"/>
+          </a:xfrm>
+          <a:prstGeom prst="rect">
+            <a:avLst/>
+          </a:prstGeom>
+        </p:spPr>
+      </p:pic>
+      <p:sp>
+        <p:nvSpPr>
+          <p:cNvPr id="8" name="Rectangle 7">
+            <a:extLst>
+              <a:ext uri="{FF2B5EF4-FFF2-40B4-BE49-F238E27FC236}">
+                <a16:creationId xmlns:a16="http://schemas.microsoft.com/office/drawing/2014/main" id="{163793D7-68FE-8D96-91D2-4CC9CD6D8502}"/>
+              </a:ext>
+            </a:extLst>
+          </p:cNvPr>
+          <p:cNvSpPr/>
+          <p:nvPr/>
+        </p:nvSpPr>
+        <p:spPr>
+          <a:xfrm>
+            <a:off x="1487422" y="1427835"/>
+            <a:ext cx="2360908" cy="325465"/>
+          </a:xfrm>
+          <a:prstGeom prst="rect">
+            <a:avLst/>
+          </a:prstGeom>
+          <a:noFill/>
+          <a:ln w="31750">
+            <a:solidFill>
+              <a:srgbClr val="FF0000"/>
+            </a:solidFill>
+          </a:ln>
+        </p:spPr>
+        <p:style>
+          <a:lnRef idx="2">
+            <a:schemeClr val="accent1">
+              <a:shade val="15000"/>
+            </a:schemeClr>
+          </a:lnRef>
+          <a:fillRef idx="1">
+            <a:schemeClr val="accent1"/>
+          </a:fillRef>
+          <a:effectRef idx="0">
+            <a:schemeClr val="accent1"/>
+          </a:effectRef>
+          <a:fontRef idx="minor">
+            <a:schemeClr val="lt1"/>
+          </a:fontRef>
+        </p:style>
+        <p:txBody>
+          <a:bodyPr rtlCol="0" anchor="ctr"/>
+          <a:lstStyle/>
+          <a:p>
+            <a:pPr algn="ctr"/>
+            <a:endParaRPr lang="fr-FR"/>
+          </a:p>
+        </p:txBody>
+      </p:sp>
+      <p:sp>
+        <p:nvSpPr>
+          <p:cNvPr id="11" name="Rectangle 10">
+            <a:extLst>
+              <a:ext uri="{FF2B5EF4-FFF2-40B4-BE49-F238E27FC236}">
+                <a16:creationId xmlns:a16="http://schemas.microsoft.com/office/drawing/2014/main" id="{3AAE4DD5-CC35-DBB0-C840-93F3C2C3E88A}"/>
+              </a:ext>
+            </a:extLst>
+          </p:cNvPr>
+          <p:cNvSpPr/>
+          <p:nvPr/>
+        </p:nvSpPr>
+        <p:spPr>
+          <a:xfrm>
+            <a:off x="5303398" y="3429000"/>
+            <a:ext cx="317816" cy="245213"/>
+          </a:xfrm>
+          <a:prstGeom prst="rect">
+            <a:avLst/>
+          </a:prstGeom>
+          <a:noFill/>
+          <a:ln w="31750">
+            <a:solidFill>
+              <a:srgbClr val="FF0000"/>
+            </a:solidFill>
+          </a:ln>
+        </p:spPr>
+        <p:style>
+          <a:lnRef idx="2">
+            <a:schemeClr val="accent1">
+              <a:shade val="15000"/>
+            </a:schemeClr>
+          </a:lnRef>
+          <a:fillRef idx="1">
+            <a:schemeClr val="accent1"/>
+          </a:fillRef>
+          <a:effectRef idx="0">
+            <a:schemeClr val="accent1"/>
+          </a:effectRef>
+          <a:fontRef idx="minor">
+            <a:schemeClr val="lt1"/>
+          </a:fontRef>
+        </p:style>
+        <p:txBody>
+          <a:bodyPr rtlCol="0" anchor="ctr"/>
+          <a:lstStyle/>
+          <a:p>
+            <a:pPr algn="ctr"/>
+            <a:endParaRPr lang="fr-FR"/>
+          </a:p>
+        </p:txBody>
+      </p:sp>
+      <p:cxnSp>
+        <p:nvCxnSpPr>
+          <p:cNvPr id="13" name="Straight Arrow Connector 12">
+            <a:extLst>
+              <a:ext uri="{FF2B5EF4-FFF2-40B4-BE49-F238E27FC236}">
+                <a16:creationId xmlns:a16="http://schemas.microsoft.com/office/drawing/2014/main" id="{1771B237-7325-3BDD-DEB8-B131B8C57234}"/>
+              </a:ext>
+            </a:extLst>
+          </p:cNvPr>
+          <p:cNvCxnSpPr>
+            <a:cxnSpLocks/>
+            <a:endCxn id="7" idx="1"/>
+          </p:cNvCxnSpPr>
+          <p:nvPr/>
+        </p:nvCxnSpPr>
+        <p:spPr>
+          <a:xfrm>
+            <a:off x="3929873" y="1674390"/>
+            <a:ext cx="656902" cy="1754610"/>
+          </a:xfrm>
+          <a:prstGeom prst="straightConnector1">
+            <a:avLst/>
+          </a:prstGeom>
+          <a:ln w="28575">
+            <a:solidFill>
+              <a:srgbClr val="FF0000"/>
+            </a:solidFill>
+            <a:tailEnd type="arrow" w="lg" len="lg"/>
+          </a:ln>
+        </p:spPr>
+        <p:style>
+          <a:lnRef idx="1">
+            <a:schemeClr val="accent1"/>
+          </a:lnRef>
+          <a:fillRef idx="0">
+            <a:schemeClr val="accent1"/>
+          </a:fillRef>
+          <a:effectRef idx="0">
+            <a:schemeClr val="accent1"/>
+          </a:effectRef>
+          <a:fontRef idx="minor">
+            <a:schemeClr val="tx1"/>
+          </a:fontRef>
+        </p:style>
+      </p:cxnSp>
+      <p:cxnSp>
+        <p:nvCxnSpPr>
+          <p:cNvPr id="14" name="Straight Arrow Connector 13">
+            <a:extLst>
+              <a:ext uri="{FF2B5EF4-FFF2-40B4-BE49-F238E27FC236}">
+                <a16:creationId xmlns:a16="http://schemas.microsoft.com/office/drawing/2014/main" id="{7DE0EB3F-D9E3-BACF-936E-89028F5C90B1}"/>
+              </a:ext>
+            </a:extLst>
+          </p:cNvPr>
+          <p:cNvCxnSpPr>
+            <a:cxnSpLocks/>
+          </p:cNvCxnSpPr>
+          <p:nvPr/>
+        </p:nvCxnSpPr>
+        <p:spPr>
+          <a:xfrm>
+            <a:off x="843026" y="830460"/>
+            <a:ext cx="644396" cy="246283"/>
+          </a:xfrm>
+          <a:prstGeom prst="straightConnector1">
+            <a:avLst/>
+          </a:prstGeom>
+          <a:ln w="28575">
+            <a:solidFill>
+              <a:srgbClr val="FF0000"/>
+            </a:solidFill>
+            <a:tailEnd type="arrow" w="lg" len="lg"/>
+          </a:ln>
+        </p:spPr>
+        <p:style>
+          <a:lnRef idx="1">
+            <a:schemeClr val="accent1"/>
+          </a:lnRef>
+          <a:fillRef idx="0">
+            <a:schemeClr val="accent1"/>
+          </a:fillRef>
+          <a:effectRef idx="0">
+            <a:schemeClr val="accent1"/>
+          </a:effectRef>
+          <a:fontRef idx="minor">
+            <a:schemeClr val="tx1"/>
+          </a:fontRef>
+        </p:style>
+      </p:cxnSp>
+      <p:pic>
+        <p:nvPicPr>
+          <p:cNvPr id="17" name="Picture 16">
+            <a:extLst>
+              <a:ext uri="{FF2B5EF4-FFF2-40B4-BE49-F238E27FC236}">
+                <a16:creationId xmlns:a16="http://schemas.microsoft.com/office/drawing/2014/main" id="{F8662E8C-3210-5D66-6255-E1990A21BE60}"/>
+              </a:ext>
+            </a:extLst>
+          </p:cNvPr>
+          <p:cNvPicPr>
+            <a:picLocks noChangeAspect="1"/>
+          </p:cNvPicPr>
+          <p:nvPr/>
+        </p:nvPicPr>
+        <p:blipFill>
+          <a:blip r:embed="rId4"/>
+          <a:stretch>
+            <a:fillRect/>
+          </a:stretch>
+        </p:blipFill>
+        <p:spPr>
+          <a:xfrm>
+            <a:off x="7182082" y="3873315"/>
+            <a:ext cx="2552921" cy="1200254"/>
+          </a:xfrm>
+          <a:prstGeom prst="rect">
+            <a:avLst/>
+          </a:prstGeom>
+        </p:spPr>
+      </p:pic>
+      <p:cxnSp>
+        <p:nvCxnSpPr>
+          <p:cNvPr id="18" name="Straight Arrow Connector 17">
+            <a:extLst>
+              <a:ext uri="{FF2B5EF4-FFF2-40B4-BE49-F238E27FC236}">
+                <a16:creationId xmlns:a16="http://schemas.microsoft.com/office/drawing/2014/main" id="{820C34EA-8643-B9EA-E28A-3018A6C3FD68}"/>
+              </a:ext>
+            </a:extLst>
+          </p:cNvPr>
+          <p:cNvCxnSpPr>
+            <a:cxnSpLocks/>
+          </p:cNvCxnSpPr>
+          <p:nvPr/>
+        </p:nvCxnSpPr>
+        <p:spPr>
+          <a:xfrm>
+            <a:off x="5902108" y="4002919"/>
+            <a:ext cx="1150127" cy="365881"/>
+          </a:xfrm>
+          <a:prstGeom prst="straightConnector1">
+            <a:avLst/>
+          </a:prstGeom>
+          <a:ln w="28575">
+            <a:solidFill>
+              <a:srgbClr val="FF0000"/>
+            </a:solidFill>
+            <a:tailEnd type="arrow" w="lg" len="lg"/>
+          </a:ln>
+        </p:spPr>
+        <p:style>
+          <a:lnRef idx="1">
+            <a:schemeClr val="accent1"/>
+          </a:lnRef>
+          <a:fillRef idx="0">
+            <a:schemeClr val="accent1"/>
+          </a:fillRef>
+          <a:effectRef idx="0">
+            <a:schemeClr val="accent1"/>
+          </a:effectRef>
+          <a:fontRef idx="minor">
+            <a:schemeClr val="tx1"/>
+          </a:fontRef>
+        </p:style>
+      </p:cxnSp>
+      <p:cxnSp>
+        <p:nvCxnSpPr>
+          <p:cNvPr id="21" name="Straight Arrow Connector 20">
+            <a:extLst>
+              <a:ext uri="{FF2B5EF4-FFF2-40B4-BE49-F238E27FC236}">
+                <a16:creationId xmlns:a16="http://schemas.microsoft.com/office/drawing/2014/main" id="{01FD4D25-9B85-DFC2-8F50-CCA3D3B90832}"/>
+              </a:ext>
+            </a:extLst>
+          </p:cNvPr>
+          <p:cNvCxnSpPr>
+            <a:cxnSpLocks/>
+          </p:cNvCxnSpPr>
+          <p:nvPr/>
+        </p:nvCxnSpPr>
+        <p:spPr>
+          <a:xfrm>
+            <a:off x="5507661" y="3674213"/>
+            <a:ext cx="113553" cy="199102"/>
+          </a:xfrm>
+          <a:prstGeom prst="straightConnector1">
+            <a:avLst/>
+          </a:prstGeom>
+          <a:ln w="28575">
+            <a:solidFill>
+              <a:srgbClr val="FF0000"/>
+            </a:solidFill>
+            <a:tailEnd type="arrow" w="lg" len="lg"/>
+          </a:ln>
+        </p:spPr>
+        <p:style>
+          <a:lnRef idx="1">
+            <a:schemeClr val="accent1"/>
+          </a:lnRef>
+          <a:fillRef idx="0">
+            <a:schemeClr val="accent1"/>
+          </a:fillRef>
+          <a:effectRef idx="0">
+            <a:schemeClr val="accent1"/>
+          </a:effectRef>
+          <a:fontRef idx="minor">
+            <a:schemeClr val="tx1"/>
+          </a:fontRef>
+        </p:style>
+      </p:cxnSp>
+      <p:pic>
+        <p:nvPicPr>
+          <p:cNvPr id="26" name="Picture 25">
+            <a:extLst>
+              <a:ext uri="{FF2B5EF4-FFF2-40B4-BE49-F238E27FC236}">
+                <a16:creationId xmlns:a16="http://schemas.microsoft.com/office/drawing/2014/main" id="{89C4FEB8-3D12-2D34-A287-E85857EC84DC}"/>
+              </a:ext>
+            </a:extLst>
+          </p:cNvPr>
+          <p:cNvPicPr>
+            <a:picLocks noChangeAspect="1"/>
+          </p:cNvPicPr>
+          <p:nvPr/>
+        </p:nvPicPr>
+        <p:blipFill>
+          <a:blip r:embed="rId5"/>
+          <a:stretch>
+            <a:fillRect/>
+          </a:stretch>
+        </p:blipFill>
+        <p:spPr>
+          <a:xfrm>
+            <a:off x="8565291" y="5283817"/>
+            <a:ext cx="3227350" cy="1486029"/>
+          </a:xfrm>
+          <a:prstGeom prst="rect">
+            <a:avLst/>
+          </a:prstGeom>
+        </p:spPr>
+      </p:pic>
+      <p:cxnSp>
+        <p:nvCxnSpPr>
+          <p:cNvPr id="29" name="Straight Arrow Connector 28">
+            <a:extLst>
+              <a:ext uri="{FF2B5EF4-FFF2-40B4-BE49-F238E27FC236}">
+                <a16:creationId xmlns:a16="http://schemas.microsoft.com/office/drawing/2014/main" id="{CB2DF5E8-60A1-64AC-E452-5E10003B0728}"/>
+              </a:ext>
+            </a:extLst>
+          </p:cNvPr>
+          <p:cNvCxnSpPr>
+            <a:cxnSpLocks/>
+          </p:cNvCxnSpPr>
+          <p:nvPr/>
+        </p:nvCxnSpPr>
+        <p:spPr>
+          <a:xfrm>
+            <a:off x="8522447" y="4972424"/>
+            <a:ext cx="1464235" cy="836705"/>
+          </a:xfrm>
+          <a:prstGeom prst="straightConnector1">
+            <a:avLst/>
+          </a:prstGeom>
+          <a:ln w="28575">
+            <a:solidFill>
+              <a:srgbClr val="FF0000"/>
+            </a:solidFill>
+            <a:tailEnd type="arrow" w="lg" len="lg"/>
+          </a:ln>
+        </p:spPr>
+        <p:style>
+          <a:lnRef idx="1">
+            <a:schemeClr val="accent1"/>
+          </a:lnRef>
+          <a:fillRef idx="0">
+            <a:schemeClr val="accent1"/>
+          </a:fillRef>
+          <a:effectRef idx="0">
+            <a:schemeClr val="accent1"/>
+          </a:effectRef>
+          <a:fontRef idx="minor">
+            <a:schemeClr val="tx1"/>
+          </a:fontRef>
+        </p:style>
+      </p:cxnSp>
+      <p:cxnSp>
+        <p:nvCxnSpPr>
+          <p:cNvPr id="33" name="Straight Arrow Connector 32">
+            <a:extLst>
+              <a:ext uri="{FF2B5EF4-FFF2-40B4-BE49-F238E27FC236}">
+                <a16:creationId xmlns:a16="http://schemas.microsoft.com/office/drawing/2014/main" id="{BA48AE95-5602-E2A8-58CB-3D67621EBEE7}"/>
+              </a:ext>
+            </a:extLst>
+          </p:cNvPr>
+          <p:cNvCxnSpPr>
+            <a:cxnSpLocks/>
+          </p:cNvCxnSpPr>
+          <p:nvPr/>
+        </p:nvCxnSpPr>
+        <p:spPr>
+          <a:xfrm>
+            <a:off x="10273553" y="6172678"/>
+            <a:ext cx="101600" cy="449251"/>
+          </a:xfrm>
+          <a:prstGeom prst="straightConnector1">
+            <a:avLst/>
+          </a:prstGeom>
+          <a:ln w="28575">
+            <a:solidFill>
+              <a:srgbClr val="FF0000"/>
+            </a:solidFill>
+            <a:tailEnd type="arrow" w="lg" len="lg"/>
+          </a:ln>
+        </p:spPr>
+        <p:style>
+          <a:lnRef idx="1">
+            <a:schemeClr val="accent1"/>
+          </a:lnRef>
+          <a:fillRef idx="0">
+            <a:schemeClr val="accent1"/>
+          </a:fillRef>
+          <a:effectRef idx="0">
+            <a:schemeClr val="accent1"/>
+          </a:effectRef>
+          <a:fontRef idx="minor">
+            <a:schemeClr val="tx1"/>
+          </a:fontRef>
+        </p:style>
+      </p:cxnSp>
+    </p:spTree>
+    <p:extLst>
+      <p:ext uri="{BB962C8B-B14F-4D97-AF65-F5344CB8AC3E}">
+        <p14:creationId xmlns:p14="http://schemas.microsoft.com/office/powerpoint/2010/main" val="308291690"/>
+      </p:ext>
+    </p:extLst>
+  </p:cSld>
+  <p:clrMapOvr>
+    <a:masterClrMapping/>
+  </p:clrMapOvr>
+</p:sld>
+</file>
+
+<file path=ppt/slides/slide25.xml><?xml version="1.0" encoding="utf-8"?>
+<p:sld xmlns:a="http://schemas.openxmlformats.org/drawingml/2006/main" xmlns:r="http://schemas.openxmlformats.org/officeDocument/2006/relationships" xmlns:p="http://schemas.openxmlformats.org/presentationml/2006/main">
+  <p:cSld>
+    <p:spTree>
+      <p:nvGrpSpPr>
+        <p:cNvPr id="1" name=""/>
+        <p:cNvGrpSpPr/>
+        <p:nvPr/>
+      </p:nvGrpSpPr>
+      <p:grpSpPr>
+        <a:xfrm>
+          <a:off x="0" y="0"/>
+          <a:ext cx="0" cy="0"/>
+          <a:chOff x="0" y="0"/>
+          <a:chExt cx="0" cy="0"/>
+        </a:xfrm>
+      </p:grpSpPr>
+      <p:sp>
+        <p:nvSpPr>
+          <p:cNvPr id="2" name="Title 1">
+            <a:extLst>
+              <a:ext uri="{FF2B5EF4-FFF2-40B4-BE49-F238E27FC236}">
+                <a16:creationId xmlns:a16="http://schemas.microsoft.com/office/drawing/2014/main" id="{A83015AA-7132-9281-82E5-D0DDCA37D102}"/>
+              </a:ext>
+            </a:extLst>
+          </p:cNvPr>
+          <p:cNvSpPr>
+            <a:spLocks noGrp="1"/>
+          </p:cNvSpPr>
+          <p:nvPr>
+            <p:ph type="title"/>
+          </p:nvPr>
+        </p:nvSpPr>
+        <p:spPr>
+          <a:xfrm>
+            <a:off x="838200" y="1"/>
+            <a:ext cx="10515600" cy="836706"/>
+          </a:xfrm>
+        </p:spPr>
+        <p:txBody>
+          <a:bodyPr/>
+          <a:lstStyle/>
+          <a:p>
+            <a:r>
+              <a:rPr lang="fr-FR" dirty="0" err="1"/>
+              <a:t>Created</a:t>
+            </a:r>
+            <a:r>
+              <a:rPr lang="fr-FR" dirty="0"/>
+              <a:t> AES Key</a:t>
+            </a:r>
+          </a:p>
+        </p:txBody>
+      </p:sp>
+      <p:pic>
+        <p:nvPicPr>
+          <p:cNvPr id="5" name="Picture 4">
+            <a:extLst>
+              <a:ext uri="{FF2B5EF4-FFF2-40B4-BE49-F238E27FC236}">
+                <a16:creationId xmlns:a16="http://schemas.microsoft.com/office/drawing/2014/main" id="{EC4E1F84-6DE4-EA80-C31B-AC61A562F3DD}"/>
+              </a:ext>
+            </a:extLst>
+          </p:cNvPr>
+          <p:cNvPicPr>
+            <a:picLocks noChangeAspect="1"/>
+          </p:cNvPicPr>
+          <p:nvPr/>
+        </p:nvPicPr>
+        <p:blipFill>
+          <a:blip r:embed="rId2"/>
+          <a:stretch>
+            <a:fillRect/>
+          </a:stretch>
+        </p:blipFill>
+        <p:spPr>
+          <a:xfrm>
+            <a:off x="826673" y="1389608"/>
+            <a:ext cx="5888419" cy="4477898"/>
+          </a:xfrm>
+          <a:prstGeom prst="rect">
+            <a:avLst/>
+          </a:prstGeom>
+        </p:spPr>
+      </p:pic>
+      <p:pic>
+        <p:nvPicPr>
+          <p:cNvPr id="7" name="Picture 6">
+            <a:extLst>
+              <a:ext uri="{FF2B5EF4-FFF2-40B4-BE49-F238E27FC236}">
+                <a16:creationId xmlns:a16="http://schemas.microsoft.com/office/drawing/2014/main" id="{4E995740-4F04-BA6D-3F64-25C8379F09BA}"/>
+              </a:ext>
+            </a:extLst>
+          </p:cNvPr>
+          <p:cNvPicPr>
+            <a:picLocks noChangeAspect="1"/>
+          </p:cNvPicPr>
+          <p:nvPr/>
+        </p:nvPicPr>
+        <p:blipFill>
+          <a:blip r:embed="rId3"/>
+          <a:stretch>
+            <a:fillRect/>
+          </a:stretch>
+        </p:blipFill>
+        <p:spPr>
+          <a:xfrm>
+            <a:off x="7993089" y="1713753"/>
+            <a:ext cx="3360711" cy="2350974"/>
+          </a:xfrm>
+          <a:prstGeom prst="rect">
+            <a:avLst/>
+          </a:prstGeom>
+        </p:spPr>
+      </p:pic>
+      <p:cxnSp>
+        <p:nvCxnSpPr>
+          <p:cNvPr id="8" name="Straight Arrow Connector 7">
+            <a:extLst>
+              <a:ext uri="{FF2B5EF4-FFF2-40B4-BE49-F238E27FC236}">
+                <a16:creationId xmlns:a16="http://schemas.microsoft.com/office/drawing/2014/main" id="{9BE614BB-626E-79DC-3ED8-22C111CD920C}"/>
+              </a:ext>
+            </a:extLst>
+          </p:cNvPr>
+          <p:cNvCxnSpPr>
+            <a:cxnSpLocks/>
+          </p:cNvCxnSpPr>
+          <p:nvPr/>
+        </p:nvCxnSpPr>
+        <p:spPr>
+          <a:xfrm>
+            <a:off x="6485341" y="2502824"/>
+            <a:ext cx="1460904" cy="204516"/>
+          </a:xfrm>
+          <a:prstGeom prst="straightConnector1">
+            <a:avLst/>
+          </a:prstGeom>
+          <a:ln w="28575">
+            <a:solidFill>
+              <a:srgbClr val="FF0000"/>
+            </a:solidFill>
+            <a:tailEnd type="arrow" w="lg" len="lg"/>
+          </a:ln>
+        </p:spPr>
+        <p:style>
+          <a:lnRef idx="1">
+            <a:schemeClr val="accent1"/>
+          </a:lnRef>
+          <a:fillRef idx="0">
+            <a:schemeClr val="accent1"/>
+          </a:fillRef>
+          <a:effectRef idx="0">
+            <a:schemeClr val="accent1"/>
+          </a:effectRef>
+          <a:fontRef idx="minor">
+            <a:schemeClr val="tx1"/>
+          </a:fontRef>
+        </p:style>
+      </p:cxnSp>
+    </p:spTree>
+    <p:extLst>
+      <p:ext uri="{BB962C8B-B14F-4D97-AF65-F5344CB8AC3E}">
+        <p14:creationId xmlns:p14="http://schemas.microsoft.com/office/powerpoint/2010/main" val="2094466543"/>
+      </p:ext>
+    </p:extLst>
+  </p:cSld>
+  <p:clrMapOvr>
+    <a:masterClrMapping/>
+  </p:clrMapOvr>
+</p:sld>
+</file>
+
+<file path=ppt/slides/slide26.xml><?xml version="1.0" encoding="utf-8"?>
+<p:sld xmlns:a="http://schemas.openxmlformats.org/drawingml/2006/main" xmlns:r="http://schemas.openxmlformats.org/officeDocument/2006/relationships" xmlns:p="http://schemas.openxmlformats.org/presentationml/2006/main">
+  <p:cSld>
+    <p:spTree>
+      <p:nvGrpSpPr>
+        <p:cNvPr id="1" name=""/>
+        <p:cNvGrpSpPr/>
+        <p:nvPr/>
+      </p:nvGrpSpPr>
+      <p:grpSpPr>
+        <a:xfrm>
+          <a:off x="0" y="0"/>
+          <a:ext cx="0" cy="0"/>
+          <a:chOff x="0" y="0"/>
+          <a:chExt cx="0" cy="0"/>
+        </a:xfrm>
+      </p:grpSpPr>
+      <p:sp>
+        <p:nvSpPr>
+          <p:cNvPr id="2" name="Title 1">
+            <a:extLst>
+              <a:ext uri="{FF2B5EF4-FFF2-40B4-BE49-F238E27FC236}">
+                <a16:creationId xmlns:a16="http://schemas.microsoft.com/office/drawing/2014/main" id="{D4AFF68D-5749-1490-ECF6-553804C7B510}"/>
+              </a:ext>
+            </a:extLst>
+          </p:cNvPr>
+          <p:cNvSpPr>
+            <a:spLocks noGrp="1"/>
+          </p:cNvSpPr>
+          <p:nvPr>
+            <p:ph type="title"/>
+          </p:nvPr>
+        </p:nvSpPr>
+        <p:spPr>
+          <a:xfrm>
+            <a:off x="838200" y="-156652"/>
+            <a:ext cx="10515600" cy="1325563"/>
+          </a:xfrm>
+        </p:spPr>
+        <p:txBody>
+          <a:bodyPr/>
+          <a:lstStyle/>
+          <a:p>
+            <a:r>
+              <a:rPr lang="fr-FR" dirty="0"/>
+              <a:t>Ex 11: compare </a:t>
+            </a:r>
+            <a:r>
+              <a:rPr lang="fr-FR" dirty="0" err="1"/>
+              <a:t>with</a:t>
+            </a:r>
+            <a:r>
+              <a:rPr lang="fr-FR" dirty="0"/>
+              <a:t> </a:t>
+            </a:r>
+            <a:r>
+              <a:rPr lang="fr-FR" dirty="0" err="1"/>
+              <a:t>gpg</a:t>
+            </a:r>
+            <a:endParaRPr lang="fr-FR" dirty="0"/>
+          </a:p>
+        </p:txBody>
+      </p:sp>
+      <p:pic>
+        <p:nvPicPr>
+          <p:cNvPr id="5" name="Picture 4">
+            <a:extLst>
+              <a:ext uri="{FF2B5EF4-FFF2-40B4-BE49-F238E27FC236}">
+                <a16:creationId xmlns:a16="http://schemas.microsoft.com/office/drawing/2014/main" id="{557DEF2A-2B59-0C77-D069-08349594C268}"/>
+              </a:ext>
+            </a:extLst>
+          </p:cNvPr>
+          <p:cNvPicPr>
+            <a:picLocks noChangeAspect="1"/>
+          </p:cNvPicPr>
+          <p:nvPr/>
+        </p:nvPicPr>
+        <p:blipFill>
+          <a:blip r:embed="rId2"/>
+          <a:stretch>
+            <a:fillRect/>
+          </a:stretch>
+        </p:blipFill>
+        <p:spPr>
+          <a:xfrm>
+            <a:off x="2642529" y="1168911"/>
+            <a:ext cx="7361558" cy="5334462"/>
+          </a:xfrm>
+          <a:prstGeom prst="rect">
+            <a:avLst/>
+          </a:prstGeom>
+        </p:spPr>
+      </p:pic>
+    </p:spTree>
+    <p:extLst>
+      <p:ext uri="{BB962C8B-B14F-4D97-AF65-F5344CB8AC3E}">
+        <p14:creationId xmlns:p14="http://schemas.microsoft.com/office/powerpoint/2010/main" val="2069021062"/>
+      </p:ext>
+    </p:extLst>
+  </p:cSld>
+  <p:clrMapOvr>
+    <a:masterClrMapping/>
+  </p:clrMapOvr>
+</p:sld>
+</file>
+
+<file path=ppt/slides/slide27.xml><?xml version="1.0" encoding="utf-8"?>
+<p:sld xmlns:a="http://schemas.openxmlformats.org/drawingml/2006/main" xmlns:r="http://schemas.openxmlformats.org/officeDocument/2006/relationships" xmlns:p="http://schemas.openxmlformats.org/presentationml/2006/main">
+  <p:cSld>
+    <p:spTree>
+      <p:nvGrpSpPr>
+        <p:cNvPr id="1" name=""/>
+        <p:cNvGrpSpPr/>
+        <p:nvPr/>
+      </p:nvGrpSpPr>
+      <p:grpSpPr>
+        <a:xfrm>
+          <a:off x="0" y="0"/>
+          <a:ext cx="0" cy="0"/>
+          <a:chOff x="0" y="0"/>
+          <a:chExt cx="0" cy="0"/>
+        </a:xfrm>
+      </p:grpSpPr>
+      <p:sp>
+        <p:nvSpPr>
+          <p:cNvPr id="2" name="Title 1">
+            <a:extLst>
+              <a:ext uri="{FF2B5EF4-FFF2-40B4-BE49-F238E27FC236}">
+                <a16:creationId xmlns:a16="http://schemas.microsoft.com/office/drawing/2014/main" id="{20F05303-E801-D6FD-3924-9D011357FD66}"/>
+              </a:ext>
+            </a:extLst>
+          </p:cNvPr>
+          <p:cNvSpPr>
+            <a:spLocks noGrp="1"/>
+          </p:cNvSpPr>
+          <p:nvPr>
+            <p:ph type="title"/>
+          </p:nvPr>
+        </p:nvSpPr>
+        <p:spPr>
+          <a:xfrm>
+            <a:off x="134319" y="55159"/>
+            <a:ext cx="11219481" cy="1804638"/>
+          </a:xfrm>
+        </p:spPr>
+        <p:txBody>
+          <a:bodyPr/>
+          <a:lstStyle/>
+          <a:p>
+            <a:pPr algn="ctr"/>
+            <a:r>
+              <a:rPr lang="fr-FR" dirty="0"/>
+              <a:t>Ex 12: Use </a:t>
+            </a:r>
+            <a:r>
+              <a:rPr lang="fr-FR" dirty="0" err="1"/>
+              <a:t>java.security.Cipher</a:t>
+            </a:r>
+            <a:r>
+              <a:rPr lang="fr-FR" dirty="0"/>
+              <a:t> and </a:t>
+            </a:r>
+            <a:r>
+              <a:rPr lang="fr-FR" dirty="0" err="1"/>
+              <a:t>KeyGenerator</a:t>
+            </a:r>
+            <a:br>
+              <a:rPr lang="fr-FR" dirty="0"/>
+            </a:br>
+            <a:r>
+              <a:rPr lang="fr-FR" dirty="0"/>
+              <a:t>to </a:t>
+            </a:r>
+            <a:r>
+              <a:rPr lang="fr-FR" dirty="0" err="1"/>
+              <a:t>encrypt</a:t>
+            </a:r>
+            <a:r>
+              <a:rPr lang="fr-FR" dirty="0"/>
+              <a:t> a </a:t>
+            </a:r>
+            <a:r>
+              <a:rPr lang="fr-FR" dirty="0" err="1"/>
+              <a:t>text</a:t>
+            </a:r>
+            <a:r>
+              <a:rPr lang="fr-FR" dirty="0"/>
+              <a:t> </a:t>
+            </a:r>
+            <a:r>
+              <a:rPr lang="fr-FR" dirty="0" err="1"/>
+              <a:t>then</a:t>
+            </a:r>
+            <a:r>
+              <a:rPr lang="fr-FR" dirty="0"/>
+              <a:t> </a:t>
+            </a:r>
+            <a:r>
+              <a:rPr lang="fr-FR" dirty="0" err="1"/>
+              <a:t>decrypt</a:t>
+            </a:r>
+            <a:r>
+              <a:rPr lang="fr-FR" dirty="0"/>
+              <a:t>, </a:t>
+            </a:r>
+            <a:r>
+              <a:rPr lang="fr-FR" dirty="0" err="1"/>
+              <a:t>with</a:t>
+            </a:r>
+            <a:r>
+              <a:rPr lang="fr-FR" dirty="0"/>
+              <a:t> a </a:t>
+            </a:r>
+            <a:r>
+              <a:rPr lang="fr-FR" dirty="0" err="1"/>
+              <a:t>Symmetric</a:t>
+            </a:r>
+            <a:r>
+              <a:rPr lang="fr-FR" dirty="0"/>
+              <a:t> key </a:t>
+            </a:r>
+            <a:r>
+              <a:rPr lang="fr-FR" dirty="0" err="1"/>
+              <a:t>algorithm</a:t>
+            </a:r>
+            <a:endParaRPr lang="fr-FR" dirty="0"/>
+          </a:p>
+        </p:txBody>
+      </p:sp>
+      <p:sp>
+        <p:nvSpPr>
+          <p:cNvPr id="5" name="TextBox 4">
+            <a:extLst>
+              <a:ext uri="{FF2B5EF4-FFF2-40B4-BE49-F238E27FC236}">
+                <a16:creationId xmlns:a16="http://schemas.microsoft.com/office/drawing/2014/main" id="{DF1354DC-7F71-CF6D-6771-129C7D7E908A}"/>
+              </a:ext>
+            </a:extLst>
+          </p:cNvPr>
+          <p:cNvSpPr txBox="1"/>
+          <p:nvPr/>
+        </p:nvSpPr>
+        <p:spPr>
+          <a:xfrm>
+            <a:off x="3213314" y="1746141"/>
+            <a:ext cx="6462793" cy="4893647"/>
+          </a:xfrm>
+          <a:prstGeom prst="rect">
+            <a:avLst/>
+          </a:prstGeom>
+          <a:noFill/>
+        </p:spPr>
+        <p:txBody>
+          <a:bodyPr wrap="square">
+            <a:spAutoFit/>
+          </a:bodyPr>
+          <a:lstStyle/>
+          <a:p>
+            <a:r>
+              <a:rPr lang="fr-FR" sz="1200" dirty="0"/>
+              <a:t>    // </a:t>
+            </a:r>
+            <a:r>
+              <a:rPr lang="fr-FR" sz="1200" dirty="0" err="1"/>
+              <a:t>encrypt</a:t>
+            </a:r>
+            <a:r>
+              <a:rPr lang="fr-FR" sz="1200" dirty="0"/>
+              <a:t> </a:t>
+            </a:r>
+            <a:r>
+              <a:rPr lang="fr-FR" sz="1200" dirty="0" err="1"/>
+              <a:t>then</a:t>
+            </a:r>
+            <a:r>
+              <a:rPr lang="fr-FR" sz="1200" dirty="0"/>
+              <a:t> </a:t>
+            </a:r>
+            <a:r>
+              <a:rPr lang="fr-FR" sz="1200" dirty="0" err="1"/>
+              <a:t>decrypt</a:t>
+            </a:r>
+            <a:r>
+              <a:rPr lang="fr-FR" sz="1200" dirty="0"/>
+              <a:t> </a:t>
+            </a:r>
+            <a:r>
+              <a:rPr lang="fr-FR" sz="1200" dirty="0" err="1"/>
+              <a:t>using</a:t>
+            </a:r>
+            <a:r>
+              <a:rPr lang="fr-FR" sz="1200" dirty="0"/>
+              <a:t> </a:t>
+            </a:r>
+            <a:r>
+              <a:rPr lang="fr-FR" sz="1200" dirty="0" err="1"/>
+              <a:t>symmetric</a:t>
+            </a:r>
+            <a:r>
+              <a:rPr lang="fr-FR" sz="1200" dirty="0"/>
+              <a:t> key </a:t>
+            </a:r>
+            <a:r>
+              <a:rPr lang="fr-FR" sz="1200" dirty="0" err="1"/>
+              <a:t>algorithm</a:t>
+            </a:r>
+            <a:r>
+              <a:rPr lang="fr-FR" sz="1200" dirty="0"/>
+              <a:t> AES-256</a:t>
+            </a:r>
+          </a:p>
+          <a:p>
+            <a:r>
+              <a:rPr lang="fr-FR" sz="1200" dirty="0"/>
+              <a:t>    @Test</a:t>
+            </a:r>
+          </a:p>
+          <a:p>
+            <a:r>
+              <a:rPr lang="fr-FR" sz="1200" dirty="0"/>
+              <a:t>    public </a:t>
+            </a:r>
+            <a:r>
+              <a:rPr lang="fr-FR" sz="1200" dirty="0" err="1"/>
+              <a:t>void</a:t>
+            </a:r>
+            <a:r>
+              <a:rPr lang="fr-FR" sz="1200" dirty="0"/>
+              <a:t> </a:t>
+            </a:r>
+            <a:r>
+              <a:rPr lang="fr-FR" sz="1200" dirty="0" err="1"/>
+              <a:t>testEncryptDecrypt</a:t>
+            </a:r>
+            <a:r>
+              <a:rPr lang="fr-FR" sz="1200" dirty="0"/>
+              <a:t>() {</a:t>
+            </a:r>
+          </a:p>
+          <a:p>
+            <a:r>
+              <a:rPr lang="fr-FR" sz="1200" dirty="0"/>
+              <a:t>        String data = "Hello World".</a:t>
+            </a:r>
+            <a:r>
+              <a:rPr lang="fr-FR" sz="1200" dirty="0" err="1"/>
+              <a:t>getBytes</a:t>
+            </a:r>
+            <a:r>
+              <a:rPr lang="fr-FR" sz="1200" dirty="0"/>
+              <a:t>();</a:t>
+            </a:r>
+          </a:p>
+          <a:p>
+            <a:r>
+              <a:rPr lang="fr-FR" sz="1200" dirty="0"/>
+              <a:t>        String key = "1234567890123456";</a:t>
+            </a:r>
+          </a:p>
+          <a:p>
+            <a:r>
+              <a:rPr lang="fr-FR" sz="1200" dirty="0"/>
+              <a:t>        String iv = "1234567890123456";</a:t>
+            </a:r>
+          </a:p>
+          <a:p>
+            <a:r>
+              <a:rPr lang="fr-FR" sz="1200" dirty="0"/>
+              <a:t>        </a:t>
+            </a:r>
+            <a:r>
+              <a:rPr lang="fr-FR" sz="1200" dirty="0" err="1"/>
+              <a:t>System.out.println</a:t>
+            </a:r>
+            <a:r>
+              <a:rPr lang="fr-FR" sz="1200" dirty="0"/>
+              <a:t>("</a:t>
+            </a:r>
+            <a:r>
+              <a:rPr lang="fr-FR" sz="1200" dirty="0" err="1"/>
+              <a:t>plainText</a:t>
+            </a:r>
+            <a:r>
+              <a:rPr lang="fr-FR" sz="1200" dirty="0"/>
+              <a:t>: " + </a:t>
+            </a:r>
+            <a:r>
+              <a:rPr lang="fr-FR" sz="1200" dirty="0" err="1"/>
+              <a:t>plainText</a:t>
+            </a:r>
+            <a:r>
+              <a:rPr lang="fr-FR" sz="1200" dirty="0"/>
+              <a:t> + ", key: " + key + ", iv:" + iv);</a:t>
+            </a:r>
+          </a:p>
+          <a:p>
+            <a:endParaRPr lang="fr-FR" sz="1200" dirty="0"/>
+          </a:p>
+          <a:p>
+            <a:r>
+              <a:rPr lang="fr-FR" sz="1200" dirty="0"/>
+              <a:t>        // </a:t>
+            </a:r>
+            <a:r>
+              <a:rPr lang="fr-FR" sz="1200" dirty="0" err="1"/>
+              <a:t>encrypt</a:t>
+            </a:r>
+            <a:endParaRPr lang="fr-FR" sz="1200" dirty="0"/>
+          </a:p>
+          <a:p>
+            <a:r>
+              <a:rPr lang="fr-FR" sz="1200" dirty="0"/>
+              <a:t>        byte[] </a:t>
+            </a:r>
+            <a:r>
+              <a:rPr lang="fr-FR" sz="1200" dirty="0" err="1"/>
+              <a:t>encrypted</a:t>
+            </a:r>
+            <a:r>
+              <a:rPr lang="fr-FR" sz="1200" dirty="0"/>
+              <a:t> = </a:t>
+            </a:r>
+            <a:r>
+              <a:rPr lang="fr-FR" sz="1200" dirty="0" err="1"/>
+              <a:t>encryptAES</a:t>
+            </a:r>
+            <a:r>
+              <a:rPr lang="fr-FR" sz="1200" dirty="0"/>
+              <a:t>(data, key, iv);</a:t>
+            </a:r>
+          </a:p>
+          <a:p>
+            <a:r>
+              <a:rPr lang="fr-FR" sz="1200" dirty="0"/>
+              <a:t>        </a:t>
+            </a:r>
+            <a:r>
+              <a:rPr lang="fr-FR" sz="1200" dirty="0" err="1"/>
+              <a:t>System.out.println</a:t>
+            </a:r>
+            <a:r>
+              <a:rPr lang="fr-FR" sz="1200" dirty="0"/>
+              <a:t>("</a:t>
+            </a:r>
+            <a:r>
+              <a:rPr lang="fr-FR" sz="1200" dirty="0" err="1"/>
+              <a:t>encrypted</a:t>
+            </a:r>
+            <a:r>
+              <a:rPr lang="fr-FR" sz="1200" dirty="0"/>
+              <a:t>: " + </a:t>
+            </a:r>
+            <a:r>
+              <a:rPr lang="fr-FR" sz="1200" dirty="0" err="1"/>
+              <a:t>encrypted</a:t>
+            </a:r>
+            <a:r>
+              <a:rPr lang="fr-FR" sz="1200" dirty="0"/>
+              <a:t>);</a:t>
+            </a:r>
+          </a:p>
+          <a:p>
+            <a:endParaRPr lang="fr-FR" sz="1200" dirty="0"/>
+          </a:p>
+          <a:p>
+            <a:r>
+              <a:rPr lang="fr-FR" sz="1200" dirty="0"/>
+              <a:t>        // </a:t>
+            </a:r>
+            <a:r>
+              <a:rPr lang="fr-FR" sz="1200" dirty="0" err="1"/>
+              <a:t>decrypt</a:t>
+            </a:r>
+            <a:endParaRPr lang="fr-FR" sz="1200" dirty="0"/>
+          </a:p>
+          <a:p>
+            <a:r>
+              <a:rPr lang="fr-FR" sz="1200" dirty="0"/>
+              <a:t>        String </a:t>
+            </a:r>
+            <a:r>
+              <a:rPr lang="fr-FR" sz="1200" dirty="0" err="1"/>
+              <a:t>decrypted</a:t>
+            </a:r>
+            <a:r>
+              <a:rPr lang="fr-FR" sz="1200" dirty="0"/>
+              <a:t> = </a:t>
+            </a:r>
+            <a:r>
+              <a:rPr lang="fr-FR" sz="1200" dirty="0" err="1"/>
+              <a:t>decryptAES</a:t>
+            </a:r>
+            <a:r>
+              <a:rPr lang="fr-FR" sz="1200" dirty="0"/>
+              <a:t>(</a:t>
+            </a:r>
+            <a:r>
+              <a:rPr lang="fr-FR" sz="1200" dirty="0" err="1"/>
+              <a:t>encrypted</a:t>
+            </a:r>
+            <a:r>
+              <a:rPr lang="fr-FR" sz="1200" dirty="0"/>
+              <a:t>, key, iv);</a:t>
+            </a:r>
+          </a:p>
+          <a:p>
+            <a:r>
+              <a:rPr lang="fr-FR" sz="1200" dirty="0"/>
+              <a:t>        </a:t>
+            </a:r>
+            <a:r>
+              <a:rPr lang="fr-FR" sz="1200" dirty="0" err="1"/>
+              <a:t>System.out.println</a:t>
+            </a:r>
+            <a:r>
+              <a:rPr lang="fr-FR" sz="1200" dirty="0"/>
+              <a:t>("</a:t>
+            </a:r>
+            <a:r>
+              <a:rPr lang="fr-FR" sz="1200" dirty="0" err="1"/>
+              <a:t>decrypted</a:t>
+            </a:r>
+            <a:r>
+              <a:rPr lang="fr-FR" sz="1200" dirty="0"/>
+              <a:t>: " + </a:t>
+            </a:r>
+            <a:r>
+              <a:rPr lang="fr-FR" sz="1200" dirty="0" err="1"/>
+              <a:t>decrypted</a:t>
+            </a:r>
+            <a:r>
+              <a:rPr lang="fr-FR" sz="1200" dirty="0"/>
+              <a:t>);</a:t>
+            </a:r>
+          </a:p>
+          <a:p>
+            <a:r>
+              <a:rPr lang="fr-FR" sz="1200" dirty="0"/>
+              <a:t>    }</a:t>
+            </a:r>
+          </a:p>
+          <a:p>
+            <a:endParaRPr lang="fr-FR" sz="1200" dirty="0"/>
+          </a:p>
+          <a:p>
+            <a:r>
+              <a:rPr lang="fr-FR" sz="1200" dirty="0"/>
+              <a:t>    </a:t>
+            </a:r>
+            <a:r>
+              <a:rPr lang="fr-FR" sz="1200" dirty="0" err="1"/>
+              <a:t>private</a:t>
+            </a:r>
+            <a:r>
+              <a:rPr lang="fr-FR" sz="1200" dirty="0"/>
+              <a:t> byte[] </a:t>
+            </a:r>
+            <a:r>
+              <a:rPr lang="fr-FR" sz="1200" dirty="0" err="1"/>
+              <a:t>encryptAES</a:t>
+            </a:r>
+            <a:r>
+              <a:rPr lang="fr-FR" sz="1200" dirty="0"/>
+              <a:t>(byte[] data, String key, String iv) {</a:t>
+            </a:r>
+          </a:p>
+          <a:p>
+            <a:r>
+              <a:rPr lang="fr-FR" sz="1200" dirty="0"/>
+              <a:t>        // ***** </a:t>
+            </a:r>
+            <a:r>
+              <a:rPr lang="fr-FR" sz="1200" dirty="0" err="1"/>
+              <a:t>complete</a:t>
+            </a:r>
+            <a:r>
+              <a:rPr lang="fr-FR" sz="1200" dirty="0"/>
+              <a:t> code </a:t>
+            </a:r>
+            <a:r>
+              <a:rPr lang="fr-FR" sz="1200" dirty="0" err="1"/>
+              <a:t>yourself</a:t>
+            </a:r>
+            <a:r>
+              <a:rPr lang="fr-FR" sz="1200" dirty="0"/>
+              <a:t> ******</a:t>
+            </a:r>
+          </a:p>
+          <a:p>
+            <a:r>
+              <a:rPr lang="fr-FR" sz="1200" dirty="0"/>
+              <a:t>        return </a:t>
+            </a:r>
+            <a:r>
+              <a:rPr lang="fr-FR" sz="1200" dirty="0" err="1"/>
+              <a:t>null</a:t>
+            </a:r>
+            <a:r>
+              <a:rPr lang="fr-FR" sz="1200" dirty="0"/>
+              <a:t>;</a:t>
+            </a:r>
+          </a:p>
+          <a:p>
+            <a:r>
+              <a:rPr lang="fr-FR" sz="1200" dirty="0"/>
+              <a:t>    }</a:t>
+            </a:r>
+          </a:p>
+          <a:p>
+            <a:r>
+              <a:rPr lang="fr-FR" sz="1200" dirty="0"/>
+              <a:t>    </a:t>
+            </a:r>
+            <a:r>
+              <a:rPr lang="fr-FR" sz="1200" dirty="0" err="1"/>
+              <a:t>private</a:t>
+            </a:r>
+            <a:r>
+              <a:rPr lang="fr-FR" sz="1200" dirty="0"/>
+              <a:t> String </a:t>
+            </a:r>
+            <a:r>
+              <a:rPr lang="fr-FR" sz="1200" dirty="0" err="1"/>
+              <a:t>decryptAES</a:t>
+            </a:r>
+            <a:r>
+              <a:rPr lang="fr-FR" sz="1200" dirty="0"/>
+              <a:t>(byte[] </a:t>
+            </a:r>
+            <a:r>
+              <a:rPr lang="fr-FR" sz="1200" dirty="0" err="1"/>
+              <a:t>encrypted</a:t>
+            </a:r>
+            <a:r>
+              <a:rPr lang="fr-FR" sz="1200" dirty="0"/>
+              <a:t>, String key, String iv) {</a:t>
+            </a:r>
+          </a:p>
+          <a:p>
+            <a:r>
+              <a:rPr lang="fr-FR" sz="1200" dirty="0"/>
+              <a:t>        // ***** </a:t>
+            </a:r>
+            <a:r>
+              <a:rPr lang="fr-FR" sz="1200" dirty="0" err="1"/>
+              <a:t>complete</a:t>
+            </a:r>
+            <a:r>
+              <a:rPr lang="fr-FR" sz="1200" dirty="0"/>
+              <a:t> code </a:t>
+            </a:r>
+            <a:r>
+              <a:rPr lang="fr-FR" sz="1200" dirty="0" err="1"/>
+              <a:t>yourself</a:t>
+            </a:r>
+            <a:r>
+              <a:rPr lang="fr-FR" sz="1200" dirty="0"/>
+              <a:t> *****</a:t>
+            </a:r>
+          </a:p>
+          <a:p>
+            <a:r>
+              <a:rPr lang="fr-FR" sz="1200" dirty="0"/>
+              <a:t>        return </a:t>
+            </a:r>
+            <a:r>
+              <a:rPr lang="fr-FR" sz="1200" dirty="0" err="1"/>
+              <a:t>null</a:t>
+            </a:r>
+            <a:r>
+              <a:rPr lang="fr-FR" sz="1200" dirty="0"/>
+              <a:t>;</a:t>
+            </a:r>
+          </a:p>
+          <a:p>
+            <a:r>
+              <a:rPr lang="fr-FR" sz="1200" dirty="0"/>
+              <a:t>    }</a:t>
+            </a:r>
+          </a:p>
+          <a:p>
+            <a:endParaRPr lang="fr-FR" sz="1200" dirty="0"/>
+          </a:p>
+        </p:txBody>
+      </p:sp>
+    </p:spTree>
+    <p:extLst>
+      <p:ext uri="{BB962C8B-B14F-4D97-AF65-F5344CB8AC3E}">
+        <p14:creationId xmlns:p14="http://schemas.microsoft.com/office/powerpoint/2010/main" val="699622020"/>
+      </p:ext>
+    </p:extLst>
+  </p:cSld>
+  <p:clrMapOvr>
+    <a:masterClrMapping/>
+  </p:clrMapOvr>
+</p:sld>
+</file>
+
+<file path=ppt/slides/slide28.xml><?xml version="1.0" encoding="utf-8"?>
+<p:sld xmlns:a="http://schemas.openxmlformats.org/drawingml/2006/main" xmlns:r="http://schemas.openxmlformats.org/officeDocument/2006/relationships" xmlns:p="http://schemas.openxmlformats.org/presentationml/2006/main">
+  <p:cSld>
+    <p:spTree>
+      <p:nvGrpSpPr>
+        <p:cNvPr id="1" name=""/>
+        <p:cNvGrpSpPr/>
+        <p:nvPr/>
+      </p:nvGrpSpPr>
+      <p:grpSpPr>
+        <a:xfrm>
+          <a:off x="0" y="0"/>
+          <a:ext cx="0" cy="0"/>
+          <a:chOff x="0" y="0"/>
+          <a:chExt cx="0" cy="0"/>
+        </a:xfrm>
+      </p:grpSpPr>
+      <p:sp>
+        <p:nvSpPr>
+          <p:cNvPr id="2" name="Title 1">
+            <a:extLst>
+              <a:ext uri="{FF2B5EF4-FFF2-40B4-BE49-F238E27FC236}">
+                <a16:creationId xmlns:a16="http://schemas.microsoft.com/office/drawing/2014/main" id="{D03D3D18-2398-087B-F369-5F9E83264E46}"/>
+              </a:ext>
+            </a:extLst>
+          </p:cNvPr>
+          <p:cNvSpPr>
+            <a:spLocks noGrp="1"/>
+          </p:cNvSpPr>
+          <p:nvPr>
+            <p:ph type="title"/>
+          </p:nvPr>
+        </p:nvSpPr>
+        <p:spPr/>
+        <p:txBody>
+          <a:bodyPr/>
+          <a:lstStyle/>
+          <a:p>
+            <a:r>
+              <a:rPr lang="fr-FR" dirty="0"/>
+              <a:t>Ex 13: </a:t>
+            </a:r>
+            <a:r>
+              <a:rPr lang="fr-FR" dirty="0" err="1"/>
+              <a:t>repeat</a:t>
+            </a:r>
+            <a:r>
+              <a:rPr lang="fr-FR" dirty="0"/>
+              <a:t> ex12, but use java class </a:t>
+            </a:r>
+            <a:r>
+              <a:rPr lang="fr-FR" dirty="0" err="1"/>
+              <a:t>KeyStore</a:t>
+            </a:r>
+            <a:r>
+              <a:rPr lang="fr-FR" dirty="0"/>
+              <a:t> to </a:t>
+            </a:r>
+            <a:r>
+              <a:rPr lang="fr-FR" dirty="0" err="1"/>
+              <a:t>load</a:t>
+            </a:r>
+            <a:r>
+              <a:rPr lang="fr-FR" dirty="0"/>
+              <a:t> the key </a:t>
+            </a:r>
+            <a:r>
+              <a:rPr lang="fr-FR" dirty="0" err="1"/>
+              <a:t>from</a:t>
+            </a:r>
+            <a:r>
+              <a:rPr lang="fr-FR" dirty="0"/>
+              <a:t> </a:t>
+            </a:r>
+            <a:r>
+              <a:rPr lang="fr-FR" dirty="0" err="1"/>
+              <a:t>your</a:t>
+            </a:r>
+            <a:r>
+              <a:rPr lang="fr-FR" dirty="0"/>
+              <a:t> </a:t>
+            </a:r>
+            <a:r>
+              <a:rPr lang="fr-FR" dirty="0" err="1"/>
+              <a:t>keystore</a:t>
+            </a:r>
+            <a:r>
+              <a:rPr lang="fr-FR" dirty="0"/>
+              <a:t> file</a:t>
+            </a:r>
+          </a:p>
+        </p:txBody>
+      </p:sp>
+    </p:spTree>
+    <p:extLst>
+      <p:ext uri="{BB962C8B-B14F-4D97-AF65-F5344CB8AC3E}">
+        <p14:creationId xmlns:p14="http://schemas.microsoft.com/office/powerpoint/2010/main" val="2658126239"/>
+      </p:ext>
+    </p:extLst>
+  </p:cSld>
+  <p:clrMapOvr>
+    <a:masterClrMapping/>
+  </p:clrMapOvr>
+</p:sld>
+</file>
+
+<file path=ppt/slides/slide29.xml><?xml version="1.0" encoding="utf-8"?>
+<p:sld xmlns:a="http://schemas.openxmlformats.org/drawingml/2006/main" xmlns:r="http://schemas.openxmlformats.org/officeDocument/2006/relationships" xmlns:p="http://schemas.openxmlformats.org/presentationml/2006/main">
+  <p:cSld>
+    <p:spTree>
+      <p:nvGrpSpPr>
+        <p:cNvPr id="1" name=""/>
+        <p:cNvGrpSpPr/>
+        <p:nvPr/>
+      </p:nvGrpSpPr>
+      <p:grpSpPr>
+        <a:xfrm>
+          <a:off x="0" y="0"/>
+          <a:ext cx="0" cy="0"/>
+          <a:chOff x="0" y="0"/>
+          <a:chExt cx="0" cy="0"/>
+        </a:xfrm>
+      </p:grpSpPr>
+      <p:sp>
+        <p:nvSpPr>
+          <p:cNvPr id="2" name="Title 1">
+            <a:extLst>
+              <a:ext uri="{FF2B5EF4-FFF2-40B4-BE49-F238E27FC236}">
+                <a16:creationId xmlns:a16="http://schemas.microsoft.com/office/drawing/2014/main" id="{134DC5FA-3D9F-4301-7504-60803885A57A}"/>
+              </a:ext>
+            </a:extLst>
+          </p:cNvPr>
+          <p:cNvSpPr>
+            <a:spLocks noGrp="1"/>
+          </p:cNvSpPr>
+          <p:nvPr>
+            <p:ph type="title"/>
+          </p:nvPr>
+        </p:nvSpPr>
+        <p:spPr>
+          <a:xfrm>
+            <a:off x="838200" y="2369573"/>
+            <a:ext cx="10515600" cy="1325563"/>
+          </a:xfrm>
+        </p:spPr>
+        <p:txBody>
+          <a:bodyPr/>
+          <a:lstStyle/>
+          <a:p>
+            <a:pPr algn="ctr"/>
+            <a:r>
+              <a:rPr lang="fr-FR" dirty="0"/>
+              <a:t>Question ?</a:t>
+            </a:r>
+          </a:p>
+        </p:txBody>
+      </p:sp>
+    </p:spTree>
+    <p:extLst>
+      <p:ext uri="{BB962C8B-B14F-4D97-AF65-F5344CB8AC3E}">
+        <p14:creationId xmlns:p14="http://schemas.microsoft.com/office/powerpoint/2010/main" val="2199169169"/>
+      </p:ext>
+    </p:extLst>
+  </p:cSld>
+  <p:clrMapOvr>
+    <a:masterClrMapping/>
+  </p:clrMapOvr>
+</p:sld>
+</file>
+
 <file path=ppt/slides/slide3.xml><?xml version="1.0" encoding="utf-8"?>
 <p:sld xmlns:a="http://schemas.openxmlformats.org/drawingml/2006/main" xmlns:r="http://schemas.openxmlformats.org/officeDocument/2006/relationships" xmlns:p="http://schemas.openxmlformats.org/presentationml/2006/main">
   <p:cSld>
@@ -3652,7 +7839,7 @@
           <p:cNvPr id="2" name="Title 1">
             <a:extLst>
               <a:ext uri="{FF2B5EF4-FFF2-40B4-BE49-F238E27FC236}">
-                <a16:creationId xmlns:a16="http://schemas.microsoft.com/office/drawing/2014/main" id="{45ED38F6-2DF7-E87D-2D09-7B6B3883AB7F}"/>
+                <a16:creationId xmlns:a16="http://schemas.microsoft.com/office/drawing/2014/main" id="{287C20C0-D2E5-2A10-47CB-F542D09173FC}"/>
               </a:ext>
             </a:extLst>
           </p:cNvPr>
@@ -3668,89 +7855,325 @@
           <a:bodyPr/>
           <a:lstStyle/>
           <a:p>
-            <a:r>
-              <a:rPr lang="fr-FR" dirty="0" err="1"/>
-              <a:t>Print</a:t>
-            </a:r>
-            <a:r>
-              <a:rPr lang="fr-FR" dirty="0"/>
-              <a:t> </a:t>
-            </a:r>
-            <a:r>
-              <a:rPr lang="fr-FR" dirty="0" err="1"/>
-              <a:t>consecutive</a:t>
-            </a:r>
-            <a:r>
-              <a:rPr lang="fr-FR" dirty="0"/>
-              <a:t> </a:t>
-            </a:r>
-            <a:r>
-              <a:rPr lang="fr-FR" dirty="0" err="1"/>
-              <a:t>powers</a:t>
-            </a:r>
-            <a:r>
-              <a:rPr lang="fr-FR" dirty="0"/>
-              <a:t> of a </a:t>
-            </a:r>
-            <a:r>
-              <a:rPr lang="fr-FR" dirty="0" err="1"/>
-              <a:t>number</a:t>
-            </a:r>
-            <a:r>
-              <a:rPr lang="fr-FR" dirty="0"/>
-              <a:t>,</a:t>
-            </a:r>
-            <a:br>
-              <a:rPr lang="fr-FR" dirty="0"/>
-            </a:br>
-            <a:r>
-              <a:rPr lang="fr-FR" dirty="0"/>
-              <a:t>modulo a prime </a:t>
-            </a:r>
-            <a:r>
-              <a:rPr lang="fr-FR" dirty="0" err="1"/>
-              <a:t>number</a:t>
-            </a:r>
-            <a:r>
-              <a:rPr lang="fr-FR" dirty="0"/>
-              <a:t> (ex: 101)</a:t>
-            </a:r>
-          </a:p>
-        </p:txBody>
-      </p:sp>
-      <p:sp>
-        <p:nvSpPr>
-          <p:cNvPr id="3" name="Content Placeholder 2">
-            <a:extLst>
-              <a:ext uri="{FF2B5EF4-FFF2-40B4-BE49-F238E27FC236}">
-                <a16:creationId xmlns:a16="http://schemas.microsoft.com/office/drawing/2014/main" id="{4CD07C5A-BBDA-890B-AFF9-33D3CADC53BE}"/>
-              </a:ext>
-            </a:extLst>
-          </p:cNvPr>
-          <p:cNvSpPr>
-            <a:spLocks noGrp="1"/>
-          </p:cNvSpPr>
-          <p:nvPr>
-            <p:ph idx="1"/>
-          </p:nvPr>
+            <a:pPr algn="ctr"/>
+            <a:r>
+              <a:rPr lang="fr-FR" dirty="0" err="1"/>
+              <a:t>Step</a:t>
+            </a:r>
+            <a:r>
+              <a:rPr lang="fr-FR" dirty="0"/>
+              <a:t> 1: </a:t>
+            </a:r>
+            <a:r>
+              <a:rPr lang="fr-FR" dirty="0" err="1"/>
+              <a:t>Create</a:t>
+            </a:r>
+            <a:r>
+              <a:rPr lang="fr-FR" dirty="0"/>
+              <a:t> a new Java (Maven) Project</a:t>
+            </a:r>
+          </a:p>
+        </p:txBody>
+      </p:sp>
+      <p:sp>
+        <p:nvSpPr>
+          <p:cNvPr id="4" name="TextBox 3">
+            <a:extLst>
+              <a:ext uri="{FF2B5EF4-FFF2-40B4-BE49-F238E27FC236}">
+                <a16:creationId xmlns:a16="http://schemas.microsoft.com/office/drawing/2014/main" id="{9099D3F7-9533-20E7-8C96-17E734268231}"/>
+              </a:ext>
+            </a:extLst>
+          </p:cNvPr>
+          <p:cNvSpPr txBox="1"/>
+          <p:nvPr/>
         </p:nvSpPr>
         <p:spPr>
           <a:xfrm>
-            <a:off x="838200" y="2564189"/>
-            <a:ext cx="10515600" cy="3612773"/>
+            <a:off x="4602996" y="2107769"/>
+            <a:ext cx="4565032" cy="4247317"/>
           </a:xfrm>
+          <a:prstGeom prst="rect">
+            <a:avLst/>
+          </a:prstGeom>
+          <a:noFill/>
         </p:spPr>
         <p:txBody>
-          <a:bodyPr/>
-          <a:lstStyle/>
-          <a:p>
-            <a:r>
-              <a:rPr lang="fr-FR" dirty="0"/>
-              <a:t>display the 101 first power values, for </a:t>
-            </a:r>
-            <a:r>
-              <a:rPr lang="fr-FR" dirty="0" err="1"/>
-              <a:t>each</a:t>
+          <a:bodyPr wrap="none" rtlCol="0">
+            <a:spAutoFit/>
+          </a:bodyPr>
+          <a:lstStyle/>
+          <a:p>
+            <a:r>
+              <a:rPr lang="fr-FR" dirty="0"/>
+              <a:t> &lt;</a:t>
+            </a:r>
+            <a:r>
+              <a:rPr lang="fr-FR" dirty="0" err="1"/>
+              <a:t>dependencies</a:t>
+            </a:r>
+            <a:r>
+              <a:rPr lang="fr-FR" dirty="0"/>
+              <a:t>&gt;</a:t>
+            </a:r>
+          </a:p>
+          <a:p>
+            <a:r>
+              <a:rPr lang="fr-FR" dirty="0"/>
+              <a:t>        &lt;</a:t>
+            </a:r>
+            <a:r>
+              <a:rPr lang="fr-FR" dirty="0" err="1"/>
+              <a:t>dependency</a:t>
+            </a:r>
+            <a:r>
+              <a:rPr lang="fr-FR" dirty="0"/>
+              <a:t>&gt;</a:t>
+            </a:r>
+          </a:p>
+          <a:p>
+            <a:r>
+              <a:rPr lang="fr-FR" dirty="0"/>
+              <a:t>            &lt;</a:t>
+            </a:r>
+            <a:r>
+              <a:rPr lang="fr-FR" dirty="0" err="1"/>
+              <a:t>groupId</a:t>
+            </a:r>
+            <a:r>
+              <a:rPr lang="fr-FR" dirty="0"/>
+              <a:t>&gt;</a:t>
+            </a:r>
+            <a:r>
+              <a:rPr lang="fr-FR" dirty="0" err="1"/>
+              <a:t>org.projectlombok</a:t>
+            </a:r>
+            <a:r>
+              <a:rPr lang="fr-FR" dirty="0"/>
+              <a:t>&lt;/</a:t>
+            </a:r>
+            <a:r>
+              <a:rPr lang="fr-FR" dirty="0" err="1"/>
+              <a:t>groupId</a:t>
+            </a:r>
+            <a:r>
+              <a:rPr lang="fr-FR" dirty="0"/>
+              <a:t>&gt;</a:t>
+            </a:r>
+          </a:p>
+          <a:p>
+            <a:r>
+              <a:rPr lang="fr-FR" dirty="0"/>
+              <a:t>            &lt;</a:t>
+            </a:r>
+            <a:r>
+              <a:rPr lang="fr-FR" dirty="0" err="1"/>
+              <a:t>artifactId</a:t>
+            </a:r>
+            <a:r>
+              <a:rPr lang="fr-FR" dirty="0"/>
+              <a:t>&gt;</a:t>
+            </a:r>
+            <a:r>
+              <a:rPr lang="fr-FR" dirty="0" err="1"/>
+              <a:t>lombok</a:t>
+            </a:r>
+            <a:r>
+              <a:rPr lang="fr-FR" dirty="0"/>
+              <a:t>&lt;/</a:t>
+            </a:r>
+            <a:r>
+              <a:rPr lang="fr-FR" dirty="0" err="1"/>
+              <a:t>artifactId</a:t>
+            </a:r>
+            <a:r>
+              <a:rPr lang="fr-FR" dirty="0"/>
+              <a:t>&gt;</a:t>
+            </a:r>
+          </a:p>
+          <a:p>
+            <a:r>
+              <a:rPr lang="fr-FR" dirty="0"/>
+              <a:t>            &lt;version&gt;1.18.36&lt;/version&gt;</a:t>
+            </a:r>
+          </a:p>
+          <a:p>
+            <a:r>
+              <a:rPr lang="fr-FR" dirty="0"/>
+              <a:t>            &lt;scope&gt;</a:t>
+            </a:r>
+            <a:r>
+              <a:rPr lang="fr-FR" dirty="0" err="1"/>
+              <a:t>provided</a:t>
+            </a:r>
+            <a:r>
+              <a:rPr lang="fr-FR" dirty="0"/>
+              <a:t>&lt;/scope&gt;</a:t>
+            </a:r>
+          </a:p>
+          <a:p>
+            <a:r>
+              <a:rPr lang="fr-FR" dirty="0"/>
+              <a:t>        &lt;/</a:t>
+            </a:r>
+            <a:r>
+              <a:rPr lang="fr-FR" dirty="0" err="1"/>
+              <a:t>dependency</a:t>
+            </a:r>
+            <a:r>
+              <a:rPr lang="fr-FR" dirty="0"/>
+              <a:t>&gt;</a:t>
+            </a:r>
+          </a:p>
+          <a:p>
+            <a:endParaRPr lang="fr-FR" dirty="0"/>
+          </a:p>
+          <a:p>
+            <a:r>
+              <a:rPr lang="fr-FR" dirty="0"/>
+              <a:t>        &lt;</a:t>
+            </a:r>
+            <a:r>
+              <a:rPr lang="fr-FR" dirty="0" err="1"/>
+              <a:t>dependency</a:t>
+            </a:r>
+            <a:r>
+              <a:rPr lang="fr-FR" dirty="0"/>
+              <a:t>&gt;</a:t>
+            </a:r>
+          </a:p>
+          <a:p>
+            <a:r>
+              <a:rPr lang="fr-FR" dirty="0"/>
+              <a:t>            &lt;</a:t>
+            </a:r>
+            <a:r>
+              <a:rPr lang="fr-FR" dirty="0" err="1"/>
+              <a:t>artifactId</a:t>
+            </a:r>
+            <a:r>
+              <a:rPr lang="fr-FR" dirty="0"/>
+              <a:t>&gt;</a:t>
+            </a:r>
+            <a:r>
+              <a:rPr lang="fr-FR" dirty="0" err="1"/>
+              <a:t>junit</a:t>
+            </a:r>
+            <a:r>
+              <a:rPr lang="fr-FR" dirty="0"/>
+              <a:t>&lt;/</a:t>
+            </a:r>
+            <a:r>
+              <a:rPr lang="fr-FR" dirty="0" err="1"/>
+              <a:t>artifactId</a:t>
+            </a:r>
+            <a:r>
+              <a:rPr lang="fr-FR" dirty="0"/>
+              <a:t>&gt;</a:t>
+            </a:r>
+          </a:p>
+          <a:p>
+            <a:r>
+              <a:rPr lang="fr-FR" dirty="0"/>
+              <a:t>            &lt;</a:t>
+            </a:r>
+            <a:r>
+              <a:rPr lang="fr-FR" dirty="0" err="1"/>
+              <a:t>groupId</a:t>
+            </a:r>
+            <a:r>
+              <a:rPr lang="fr-FR" dirty="0"/>
+              <a:t>&gt;</a:t>
+            </a:r>
+            <a:r>
+              <a:rPr lang="fr-FR" dirty="0" err="1"/>
+              <a:t>junit</a:t>
+            </a:r>
+            <a:r>
+              <a:rPr lang="fr-FR" dirty="0"/>
+              <a:t>&lt;/</a:t>
+            </a:r>
+            <a:r>
+              <a:rPr lang="fr-FR" dirty="0" err="1"/>
+              <a:t>groupId</a:t>
+            </a:r>
+            <a:r>
+              <a:rPr lang="fr-FR" dirty="0"/>
+              <a:t>&gt;</a:t>
+            </a:r>
+          </a:p>
+          <a:p>
+            <a:r>
+              <a:rPr lang="fr-FR" dirty="0"/>
+              <a:t>            &lt;version&gt;4.13.2&lt;/version&gt;</a:t>
+            </a:r>
+          </a:p>
+          <a:p>
+            <a:r>
+              <a:rPr lang="fr-FR" dirty="0"/>
+              <a:t>            &lt;scope&gt;test&lt;/scope&gt;</a:t>
+            </a:r>
+          </a:p>
+          <a:p>
+            <a:r>
+              <a:rPr lang="fr-FR" dirty="0"/>
+              <a:t>        &lt;/</a:t>
+            </a:r>
+            <a:r>
+              <a:rPr lang="fr-FR" dirty="0" err="1"/>
+              <a:t>dependency</a:t>
+            </a:r>
+            <a:r>
+              <a:rPr lang="fr-FR" dirty="0"/>
+              <a:t>&gt;</a:t>
+            </a:r>
+          </a:p>
+          <a:p>
+            <a:r>
+              <a:rPr lang="fr-FR" dirty="0"/>
+              <a:t>    &lt;/</a:t>
+            </a:r>
+            <a:r>
+              <a:rPr lang="fr-FR" dirty="0" err="1"/>
+              <a:t>dependencies</a:t>
+            </a:r>
+            <a:r>
+              <a:rPr lang="fr-FR" dirty="0"/>
+              <a:t>&gt;</a:t>
+            </a:r>
+          </a:p>
+        </p:txBody>
+      </p:sp>
+      <p:sp>
+        <p:nvSpPr>
+          <p:cNvPr id="5" name="TextBox 4">
+            <a:extLst>
+              <a:ext uri="{FF2B5EF4-FFF2-40B4-BE49-F238E27FC236}">
+                <a16:creationId xmlns:a16="http://schemas.microsoft.com/office/drawing/2014/main" id="{CF18E0EE-3F6F-339E-663A-67225E23109F}"/>
+              </a:ext>
+            </a:extLst>
+          </p:cNvPr>
+          <p:cNvSpPr txBox="1"/>
+          <p:nvPr/>
+        </p:nvSpPr>
+        <p:spPr>
+          <a:xfrm>
+            <a:off x="1312190" y="3714427"/>
+            <a:ext cx="3068664" cy="646331"/>
+          </a:xfrm>
+          <a:prstGeom prst="rect">
+            <a:avLst/>
+          </a:prstGeom>
+          <a:noFill/>
+        </p:spPr>
+        <p:txBody>
+          <a:bodyPr wrap="square" rtlCol="0">
+            <a:spAutoFit/>
+          </a:bodyPr>
+          <a:lstStyle/>
+          <a:p>
+            <a:r>
+              <a:rPr lang="fr-FR" dirty="0" err="1"/>
+              <a:t>typical</a:t>
             </a:r>
             <a:r>
               <a:rPr lang="fr-FR" dirty="0"/>
@@ -3758,32 +8181,25 @@
             </a:r>
             <a:r>
               <a:rPr lang="fr-FR" dirty="0" err="1"/>
-              <a:t>element</a:t>
-            </a:r>
-            <a:endParaRPr lang="fr-FR" dirty="0"/>
-          </a:p>
-          <a:p>
-            <a:r>
-              <a:rPr lang="fr-FR" dirty="0"/>
-              <a:t>2, 2^2, 2^3, 2^4  ...  2^101</a:t>
-            </a:r>
-          </a:p>
-          <a:p>
-            <a:r>
-              <a:rPr lang="fr-FR" dirty="0"/>
-              <a:t>3, 3^2, 3^3, 3^4  ...  3^101</a:t>
-            </a:r>
-          </a:p>
-          <a:p>
-            <a:r>
-              <a:rPr lang="fr-FR" dirty="0"/>
-              <a:t>...</a:t>
-            </a:r>
-          </a:p>
-          <a:p>
-            <a:r>
-              <a:rPr lang="fr-FR" dirty="0"/>
-              <a:t>100, 100^2, ...</a:t>
+              <a:t>dependencies</a:t>
+            </a:r>
+            <a:r>
+              <a:rPr lang="fr-FR" dirty="0"/>
+              <a:t> to use</a:t>
+            </a:r>
+          </a:p>
+          <a:p>
+            <a:r>
+              <a:rPr lang="fr-FR" dirty="0"/>
+              <a:t>in pom.xml &lt;</a:t>
+            </a:r>
+            <a:r>
+              <a:rPr lang="fr-FR" dirty="0" err="1"/>
+              <a:t>dependencies</a:t>
+            </a:r>
+            <a:r>
+              <a:rPr lang="fr-FR" dirty="0"/>
+              <a:t>&gt;:</a:t>
             </a:r>
           </a:p>
         </p:txBody>
@@ -3791,7 +8207,7 @@
     </p:spTree>
     <p:extLst>
       <p:ext uri="{BB962C8B-B14F-4D97-AF65-F5344CB8AC3E}">
-        <p14:creationId xmlns:p14="http://schemas.microsoft.com/office/powerpoint/2010/main" val="178790091"/>
+        <p14:creationId xmlns:p14="http://schemas.microsoft.com/office/powerpoint/2010/main" val="147097997"/>
       </p:ext>
     </p:extLst>
   </p:cSld>
@@ -3823,7 +8239,7 @@
           <p:cNvPr id="2" name="Title 1">
             <a:extLst>
               <a:ext uri="{FF2B5EF4-FFF2-40B4-BE49-F238E27FC236}">
-                <a16:creationId xmlns:a16="http://schemas.microsoft.com/office/drawing/2014/main" id="{3D7230A3-6C31-0F8D-A979-9F7C05971910}"/>
+                <a16:creationId xmlns:a16="http://schemas.microsoft.com/office/drawing/2014/main" id="{45ED38F6-2DF7-E87D-2D09-7B6B3883AB7F}"/>
               </a:ext>
             </a:extLst>
           </p:cNvPr>
@@ -3842,11 +8258,11 @@
             <a:pPr algn="ctr"/>
             <a:r>
               <a:rPr lang="fr-FR" dirty="0"/>
-              <a:t>Write simple code to </a:t>
-            </a:r>
-            <a:r>
-              <a:rPr lang="fr-FR" dirty="0" err="1"/>
-              <a:t>efficiently</a:t>
+              <a:t>Ex1: </a:t>
+            </a:r>
+            <a:r>
+              <a:rPr lang="fr-FR" dirty="0" err="1"/>
+              <a:t>Print</a:t>
             </a:r>
             <a:r>
               <a:rPr lang="fr-FR" dirty="0"/>
@@ -3854,11 +8270,19 @@
             </a:r>
             <a:r>
               <a:rPr lang="fr-FR" dirty="0" err="1"/>
-              <a:t>raise</a:t>
-            </a:r>
-            <a:r>
-              <a:rPr lang="fr-FR" dirty="0"/>
-              <a:t> a </a:t>
+              <a:t>consecutive</a:t>
+            </a:r>
+            <a:r>
+              <a:rPr lang="fr-FR" dirty="0"/>
+              <a:t> </a:t>
+            </a:r>
+            <a:r>
+              <a:rPr lang="fr-FR" dirty="0" err="1"/>
+              <a:t>powers</a:t>
+            </a:r>
+            <a:r>
+              <a:rPr lang="fr-FR" dirty="0"/>
+              <a:t> of a </a:t>
             </a:r>
             <a:r>
               <a:rPr lang="fr-FR" dirty="0" err="1"/>
@@ -3866,54 +8290,62 @@
             </a:r>
             <a:r>
               <a:rPr lang="fr-FR" dirty="0"/>
-              <a:t> to power N="1000 000 000 000", </a:t>
-            </a:r>
-            <a:r>
-              <a:rPr lang="fr-FR" dirty="0" err="1"/>
-              <a:t>with</a:t>
-            </a:r>
-            <a:r>
-              <a:rPr lang="fr-FR" dirty="0"/>
-              <a:t> modulo "P"</a:t>
-            </a:r>
-          </a:p>
-        </p:txBody>
-      </p:sp>
-      <p:sp>
-        <p:nvSpPr>
-          <p:cNvPr id="4" name="TextBox 3">
-            <a:extLst>
-              <a:ext uri="{FF2B5EF4-FFF2-40B4-BE49-F238E27FC236}">
-                <a16:creationId xmlns:a16="http://schemas.microsoft.com/office/drawing/2014/main" id="{920E723A-9B85-9FD1-7F99-26D1C9F623CA}"/>
-              </a:ext>
-            </a:extLst>
-          </p:cNvPr>
-          <p:cNvSpPr txBox="1"/>
-          <p:nvPr/>
+              <a:t>,</a:t>
+            </a:r>
+            <a:br>
+              <a:rPr lang="fr-FR" dirty="0"/>
+            </a:br>
+            <a:r>
+              <a:rPr lang="fr-FR" dirty="0"/>
+              <a:t>modulo a prime </a:t>
+            </a:r>
+            <a:r>
+              <a:rPr lang="fr-FR" dirty="0" err="1"/>
+              <a:t>number</a:t>
+            </a:r>
+            <a:r>
+              <a:rPr lang="fr-FR" dirty="0"/>
+              <a:t> (ex: 101)</a:t>
+            </a:r>
+          </a:p>
+        </p:txBody>
+      </p:sp>
+      <p:sp>
+        <p:nvSpPr>
+          <p:cNvPr id="3" name="Content Placeholder 2">
+            <a:extLst>
+              <a:ext uri="{FF2B5EF4-FFF2-40B4-BE49-F238E27FC236}">
+                <a16:creationId xmlns:a16="http://schemas.microsoft.com/office/drawing/2014/main" id="{4CD07C5A-BBDA-890B-AFF9-33D3CADC53BE}"/>
+              </a:ext>
+            </a:extLst>
+          </p:cNvPr>
+          <p:cNvSpPr>
+            <a:spLocks noGrp="1"/>
+          </p:cNvSpPr>
+          <p:nvPr>
+            <p:ph idx="1"/>
+          </p:nvPr>
         </p:nvSpPr>
         <p:spPr>
           <a:xfrm>
-            <a:off x="3188305" y="3323771"/>
-            <a:ext cx="7087809" cy="923330"/>
+            <a:off x="838200" y="2564189"/>
+            <a:ext cx="10515600" cy="3612773"/>
           </a:xfrm>
-          <a:prstGeom prst="rect">
-            <a:avLst/>
-          </a:prstGeom>
-          <a:noFill/>
         </p:spPr>
         <p:txBody>
-          <a:bodyPr wrap="square" rtlCol="0">
-            <a:spAutoFit/>
-          </a:bodyPr>
-          <a:lstStyle/>
-          <a:p>
-            <a:r>
-              <a:rPr lang="fr-FR" dirty="0"/>
-              <a:t>do </a:t>
-            </a:r>
-            <a:r>
-              <a:rPr lang="fr-FR" dirty="0" err="1"/>
-              <a:t>you</a:t>
+          <a:bodyPr/>
+          <a:lstStyle/>
+          <a:p>
+            <a:pPr marL="0" indent="0">
+              <a:buNone/>
+            </a:pPr>
+            <a:r>
+              <a:rPr lang="fr-FR" dirty="0"/>
+              <a:t>display the p first power values modulo P, for </a:t>
+            </a:r>
+            <a:r>
+              <a:rPr lang="fr-FR" dirty="0" err="1"/>
+              <a:t>each</a:t>
             </a:r>
             <a:r>
               <a:rPr lang="fr-FR" dirty="0"/>
@@ -3921,32 +8353,86 @@
             </a:r>
             <a:r>
               <a:rPr lang="fr-FR" dirty="0" err="1"/>
-              <a:t>need</a:t>
-            </a:r>
-            <a:r>
-              <a:rPr lang="fr-FR" dirty="0"/>
-              <a:t>  1 trillions multiplications ?</a:t>
-            </a:r>
-          </a:p>
-          <a:p>
+              <a:t>element</a:t>
+            </a:r>
+            <a:r>
+              <a:rPr lang="fr-FR" dirty="0"/>
+              <a:t> "i"</a:t>
+            </a:r>
+            <a:br>
+              <a:rPr lang="fr-FR" dirty="0"/>
+            </a:br>
+            <a:r>
+              <a:rPr lang="fr-FR" dirty="0"/>
+              <a:t>( </a:t>
+            </a:r>
+            <a:r>
+              <a:rPr lang="fr-FR" dirty="0" err="1"/>
+              <a:t>warn</a:t>
+            </a:r>
+            <a:r>
+              <a:rPr lang="fr-FR" dirty="0"/>
+              <a:t> to </a:t>
+            </a:r>
+            <a:r>
+              <a:rPr lang="fr-FR" dirty="0" err="1"/>
+              <a:t>overflow</a:t>
+            </a:r>
+            <a:r>
+              <a:rPr lang="fr-FR" dirty="0"/>
+              <a:t>, use modulo </a:t>
+            </a:r>
+            <a:r>
+              <a:rPr lang="fr-FR" dirty="0" err="1"/>
+              <a:t>after</a:t>
+            </a:r>
+            <a:r>
+              <a:rPr lang="fr-FR" dirty="0"/>
+              <a:t> </a:t>
+            </a:r>
+            <a:r>
+              <a:rPr lang="fr-FR" dirty="0" err="1"/>
+              <a:t>each</a:t>
+            </a:r>
+            <a:r>
+              <a:rPr lang="fr-FR" dirty="0"/>
+              <a:t> </a:t>
+            </a:r>
+            <a:r>
+              <a:rPr lang="fr-FR" dirty="0" err="1"/>
+              <a:t>multiply</a:t>
+            </a:r>
+            <a:r>
+              <a:rPr lang="fr-FR" dirty="0"/>
+              <a:t> )</a:t>
+            </a:r>
+            <a:br>
+              <a:rPr lang="fr-FR" dirty="0"/>
+            </a:br>
             <a:endParaRPr lang="fr-FR" dirty="0"/>
           </a:p>
           <a:p>
             <a:r>
-              <a:rPr lang="fr-FR" dirty="0" err="1"/>
-              <a:t>so</a:t>
-            </a:r>
-            <a:r>
-              <a:rPr lang="fr-FR" dirty="0"/>
-              <a:t> how </a:t>
-            </a:r>
-            <a:r>
-              <a:rPr lang="fr-FR" dirty="0" err="1"/>
-              <a:t>many</a:t>
-            </a:r>
-            <a:r>
-              <a:rPr lang="fr-FR" dirty="0"/>
-              <a:t> multiplications?</a:t>
+              <a:rPr lang="fr-FR" dirty="0"/>
+              <a:t>2, 2^2%p, 2^3%p, 2^4%p ...  2^p%p</a:t>
+            </a:r>
+          </a:p>
+          <a:p>
+            <a:r>
+              <a:rPr lang="fr-FR" dirty="0"/>
+              <a:t>3, 3^2%p, 3^3%p, 3^4%p  ...  3^p%p</a:t>
+            </a:r>
+          </a:p>
+          <a:p>
+            <a:r>
+              <a:rPr lang="fr-FR" dirty="0"/>
+              <a:t>...</a:t>
+            </a:r>
+          </a:p>
+          <a:p>
+            <a:r>
+              <a:rPr lang="fr-FR" dirty="0"/>
+              <a:t>p-1,  (p-1)^2, (p-1)^3, ...(p-1)^p%p</a:t>
             </a:r>
           </a:p>
         </p:txBody>
@@ -3954,7 +8440,7 @@
     </p:spTree>
     <p:extLst>
       <p:ext uri="{BB962C8B-B14F-4D97-AF65-F5344CB8AC3E}">
-        <p14:creationId xmlns:p14="http://schemas.microsoft.com/office/powerpoint/2010/main" val="2599333629"/>
+        <p14:creationId xmlns:p14="http://schemas.microsoft.com/office/powerpoint/2010/main" val="178790091"/>
       </p:ext>
     </p:extLst>
   </p:cSld>
@@ -3986,7 +8472,7 @@
           <p:cNvPr id="2" name="Title 1">
             <a:extLst>
               <a:ext uri="{FF2B5EF4-FFF2-40B4-BE49-F238E27FC236}">
-                <a16:creationId xmlns:a16="http://schemas.microsoft.com/office/drawing/2014/main" id="{675FD79B-7655-FCAE-A1BE-468F8830661B}"/>
+                <a16:creationId xmlns:a16="http://schemas.microsoft.com/office/drawing/2014/main" id="{82C29DF9-7852-B62B-DA6B-164DEC6F858E}"/>
               </a:ext>
             </a:extLst>
           </p:cNvPr>
@@ -3997,7 +8483,12 @@
             <p:ph type="title"/>
           </p:nvPr>
         </p:nvSpPr>
-        <p:spPr/>
+        <p:spPr>
+          <a:xfrm>
+            <a:off x="838200" y="101653"/>
+            <a:ext cx="10515600" cy="2238591"/>
+          </a:xfrm>
+        </p:spPr>
         <p:txBody>
           <a:bodyPr/>
           <a:lstStyle/>
@@ -4005,50 +8496,253 @@
             <a:pPr algn="ctr"/>
             <a:r>
               <a:rPr lang="fr-FR" dirty="0"/>
-              <a:t>Write the Fermat </a:t>
-            </a:r>
-            <a:r>
-              <a:rPr lang="fr-FR" dirty="0" err="1"/>
-              <a:t>Primality</a:t>
-            </a:r>
-            <a:r>
-              <a:rPr lang="fr-FR" dirty="0"/>
-              <a:t> test,</a:t>
+              <a:t>Run </a:t>
+            </a:r>
+            <a:r>
+              <a:rPr lang="fr-FR" dirty="0" err="1"/>
+              <a:t>several</a:t>
+            </a:r>
+            <a:r>
+              <a:rPr lang="fr-FR" dirty="0"/>
+              <a:t> </a:t>
+            </a:r>
+            <a:r>
+              <a:rPr lang="fr-FR" dirty="0" err="1"/>
+              <a:t>samples</a:t>
             </a:r>
             <a:br>
               <a:rPr lang="fr-FR" dirty="0"/>
             </a:br>
             <a:r>
-              <a:rPr lang="fr-FR" dirty="0" err="1"/>
-              <a:t>with</a:t>
-            </a:r>
-            <a:r>
-              <a:rPr lang="fr-FR" dirty="0"/>
-              <a:t> 5 </a:t>
-            </a:r>
-            <a:r>
-              <a:rPr lang="fr-FR" dirty="0" err="1"/>
-              <a:t>internal</a:t>
-            </a:r>
-            <a:r>
-              <a:rPr lang="fr-FR" dirty="0"/>
-              <a:t> </a:t>
-            </a:r>
-            <a:r>
-              <a:rPr lang="fr-FR" dirty="0" err="1"/>
-              <a:t>number</a:t>
-            </a:r>
-            <a:r>
-              <a:rPr lang="fr-FR" dirty="0"/>
-              <a:t> tries</a:t>
-            </a:r>
-          </a:p>
-        </p:txBody>
-      </p:sp>
+              <a:rPr lang="fr-FR" dirty="0"/>
+              <a:t> as JUnit "@Test" </a:t>
+            </a:r>
+            <a:r>
+              <a:rPr lang="fr-FR" dirty="0" err="1"/>
+              <a:t>methods</a:t>
+            </a:r>
+            <a:br>
+              <a:rPr lang="fr-FR" dirty="0"/>
+            </a:br>
+            <a:r>
+              <a:rPr lang="fr-FR" dirty="0"/>
+              <a:t>for p=7, 11, 13, 17, 101, ..</a:t>
+            </a:r>
+            <a:br>
+              <a:rPr lang="fr-FR" dirty="0"/>
+            </a:br>
+            <a:r>
+              <a:rPr lang="fr-FR" dirty="0" err="1"/>
+              <a:t>also</a:t>
+            </a:r>
+            <a:r>
+              <a:rPr lang="fr-FR" dirty="0"/>
+              <a:t> run for p not prime, ex: 6</a:t>
+            </a:r>
+          </a:p>
+        </p:txBody>
+      </p:sp>
+      <p:sp>
+        <p:nvSpPr>
+          <p:cNvPr id="5" name="TextBox 4">
+            <a:extLst>
+              <a:ext uri="{FF2B5EF4-FFF2-40B4-BE49-F238E27FC236}">
+                <a16:creationId xmlns:a16="http://schemas.microsoft.com/office/drawing/2014/main" id="{EAA546C2-B51C-4EE9-5748-D1E76C2D3451}"/>
+              </a:ext>
+            </a:extLst>
+          </p:cNvPr>
+          <p:cNvSpPr txBox="1"/>
+          <p:nvPr/>
+        </p:nvSpPr>
+        <p:spPr>
+          <a:xfrm>
+            <a:off x="9180164" y="2930841"/>
+            <a:ext cx="2805192" cy="3635273"/>
+          </a:xfrm>
+          <a:prstGeom prst="rect">
+            <a:avLst/>
+          </a:prstGeom>
+          <a:noFill/>
+        </p:spPr>
+        <p:txBody>
+          <a:bodyPr wrap="square">
+            <a:spAutoFit/>
+          </a:bodyPr>
+          <a:lstStyle/>
+          <a:p>
+            <a:r>
+              <a:rPr lang="fr-FR" sz="1400" dirty="0"/>
+              <a:t>package fr.esilv.security.td4;</a:t>
+            </a:r>
+          </a:p>
+          <a:p>
+            <a:endParaRPr lang="fr-FR" sz="1400" dirty="0"/>
+          </a:p>
+          <a:p>
+            <a:r>
+              <a:rPr lang="fr-FR" sz="1400" dirty="0"/>
+              <a:t>import </a:t>
+            </a:r>
+            <a:r>
+              <a:rPr lang="fr-FR" sz="1400" dirty="0" err="1"/>
+              <a:t>org.junit.Test</a:t>
+            </a:r>
+            <a:r>
+              <a:rPr lang="fr-FR" sz="1400" dirty="0"/>
+              <a:t>;</a:t>
+            </a:r>
+          </a:p>
+          <a:p>
+            <a:endParaRPr lang="fr-FR" sz="1400" dirty="0"/>
+          </a:p>
+          <a:p>
+            <a:r>
+              <a:rPr lang="fr-FR" sz="1400" dirty="0"/>
+              <a:t>public class Ex1Test {</a:t>
+            </a:r>
+          </a:p>
+          <a:p>
+            <a:endParaRPr lang="fr-FR" sz="1400" dirty="0"/>
+          </a:p>
+          <a:p>
+            <a:r>
+              <a:rPr lang="fr-FR" sz="1400" dirty="0"/>
+              <a:t>    @Test</a:t>
+            </a:r>
+          </a:p>
+          <a:p>
+            <a:r>
+              <a:rPr lang="fr-FR" sz="1400" dirty="0"/>
+              <a:t>    public </a:t>
+            </a:r>
+            <a:r>
+              <a:rPr lang="fr-FR" sz="1400" dirty="0" err="1"/>
+              <a:t>void</a:t>
+            </a:r>
+            <a:r>
+              <a:rPr lang="fr-FR" sz="1400" dirty="0"/>
+              <a:t> test6_notPrime() {</a:t>
+            </a:r>
+          </a:p>
+          <a:p>
+            <a:r>
+              <a:rPr lang="fr-FR" sz="1400" dirty="0"/>
+              <a:t>        </a:t>
+            </a:r>
+            <a:r>
+              <a:rPr lang="fr-FR" sz="1400" dirty="0" err="1"/>
+              <a:t>doTestPowerModulo</a:t>
+            </a:r>
+            <a:r>
+              <a:rPr lang="fr-FR" sz="1400" dirty="0"/>
+              <a:t>(6);</a:t>
+            </a:r>
+          </a:p>
+          <a:p>
+            <a:r>
+              <a:rPr lang="fr-FR" sz="1400" dirty="0"/>
+              <a:t>    }</a:t>
+            </a:r>
+          </a:p>
+          <a:p>
+            <a:endParaRPr lang="fr-FR" sz="1400" dirty="0"/>
+          </a:p>
+          <a:p>
+            <a:r>
+              <a:rPr lang="fr-FR" sz="1400" dirty="0"/>
+              <a:t>    @Test</a:t>
+            </a:r>
+          </a:p>
+          <a:p>
+            <a:r>
+              <a:rPr lang="fr-FR" sz="1400" dirty="0"/>
+              <a:t>    public </a:t>
+            </a:r>
+            <a:r>
+              <a:rPr lang="fr-FR" sz="1400" dirty="0" err="1"/>
+              <a:t>void</a:t>
+            </a:r>
+            <a:r>
+              <a:rPr lang="fr-FR" sz="1400" dirty="0"/>
+              <a:t> test7() {</a:t>
+            </a:r>
+          </a:p>
+          <a:p>
+            <a:r>
+              <a:rPr lang="fr-FR" sz="1400" dirty="0"/>
+              <a:t>        </a:t>
+            </a:r>
+            <a:r>
+              <a:rPr lang="fr-FR" sz="1400" dirty="0" err="1"/>
+              <a:t>doTestPowerModulo</a:t>
+            </a:r>
+            <a:r>
+              <a:rPr lang="fr-FR" sz="1400" dirty="0"/>
+              <a:t>(7);</a:t>
+            </a:r>
+          </a:p>
+          <a:p>
+            <a:r>
+              <a:rPr lang="fr-FR" sz="1400" dirty="0"/>
+              <a:t>    }</a:t>
+            </a:r>
+            <a:br>
+              <a:rPr lang="fr-FR" sz="1400" dirty="0"/>
+            </a:br>
+            <a:r>
+              <a:rPr lang="fr-FR" sz="1400" dirty="0"/>
+              <a:t>    // ... </a:t>
+            </a:r>
+            <a:r>
+              <a:rPr lang="fr-FR" sz="1400" dirty="0" err="1"/>
+              <a:t>complete</a:t>
+            </a:r>
+            <a:r>
+              <a:rPr lang="fr-FR" sz="1400" dirty="0"/>
+              <a:t> code </a:t>
+            </a:r>
+            <a:r>
+              <a:rPr lang="fr-FR" sz="1400" dirty="0" err="1"/>
+              <a:t>yourself</a:t>
+            </a:r>
+            <a:endParaRPr lang="fr-FR" sz="1400" dirty="0"/>
+          </a:p>
+        </p:txBody>
+      </p:sp>
+      <p:pic>
+        <p:nvPicPr>
+          <p:cNvPr id="7" name="Picture 6">
+            <a:extLst>
+              <a:ext uri="{FF2B5EF4-FFF2-40B4-BE49-F238E27FC236}">
+                <a16:creationId xmlns:a16="http://schemas.microsoft.com/office/drawing/2014/main" id="{B612491E-013F-57B2-0EB0-8E857D568CAC}"/>
+              </a:ext>
+            </a:extLst>
+          </p:cNvPr>
+          <p:cNvPicPr>
+            <a:picLocks noChangeAspect="1"/>
+          </p:cNvPicPr>
+          <p:nvPr/>
+        </p:nvPicPr>
+        <p:blipFill>
+          <a:blip r:embed="rId2"/>
+          <a:stretch>
+            <a:fillRect/>
+          </a:stretch>
+        </p:blipFill>
+        <p:spPr>
+          <a:xfrm>
+            <a:off x="261971" y="2516245"/>
+            <a:ext cx="8554191" cy="4172312"/>
+          </a:xfrm>
+          <a:prstGeom prst="rect">
+            <a:avLst/>
+          </a:prstGeom>
+        </p:spPr>
+      </p:pic>
     </p:spTree>
     <p:extLst>
       <p:ext uri="{BB962C8B-B14F-4D97-AF65-F5344CB8AC3E}">
-        <p14:creationId xmlns:p14="http://schemas.microsoft.com/office/powerpoint/2010/main" val="2331998342"/>
+        <p14:creationId xmlns:p14="http://schemas.microsoft.com/office/powerpoint/2010/main" val="2573295109"/>
       </p:ext>
     </p:extLst>
   </p:cSld>
@@ -4080,7 +8774,7 @@
           <p:cNvPr id="2" name="Title 1">
             <a:extLst>
               <a:ext uri="{FF2B5EF4-FFF2-40B4-BE49-F238E27FC236}">
-                <a16:creationId xmlns:a16="http://schemas.microsoft.com/office/drawing/2014/main" id="{A7B4B6BF-4AF4-F859-EA1F-C6AF343625B8}"/>
+                <a16:creationId xmlns:a16="http://schemas.microsoft.com/office/drawing/2014/main" id="{A0F460E0-7FC2-7F2C-E7DC-8A370C085A65}"/>
               </a:ext>
             </a:extLst>
           </p:cNvPr>
@@ -4091,59 +8785,315 @@
             <p:ph type="title"/>
           </p:nvPr>
         </p:nvSpPr>
-        <p:spPr/>
+        <p:spPr>
+          <a:xfrm>
+            <a:off x="838200" y="36163"/>
+            <a:ext cx="10515600" cy="1064217"/>
+          </a:xfrm>
+        </p:spPr>
         <p:txBody>
           <a:bodyPr/>
           <a:lstStyle/>
           <a:p>
             <a:pPr algn="ctr"/>
             <a:r>
-              <a:rPr lang="fr-FR" dirty="0" err="1"/>
-              <a:t>Reapeat</a:t>
-            </a:r>
-            <a:r>
-              <a:rPr lang="fr-FR" dirty="0"/>
-              <a:t> exercices </a:t>
-            </a:r>
-            <a:r>
-              <a:rPr lang="fr-FR" dirty="0" err="1"/>
-              <a:t>with</a:t>
-            </a:r>
-            <a:r>
-              <a:rPr lang="fr-FR" dirty="0"/>
-              <a:t> java </a:t>
-            </a:r>
-            <a:r>
-              <a:rPr lang="fr-FR" dirty="0" err="1"/>
-              <a:t>BigInteger</a:t>
-            </a:r>
-            <a:r>
-              <a:rPr lang="fr-FR" dirty="0"/>
-              <a:t>, </a:t>
-            </a:r>
-            <a:r>
-              <a:rPr lang="fr-FR" dirty="0" err="1"/>
-              <a:t>instead</a:t>
-            </a:r>
-            <a:r>
-              <a:rPr lang="fr-FR" dirty="0"/>
-              <a:t> of </a:t>
-            </a:r>
-            <a:r>
-              <a:rPr lang="fr-FR" dirty="0" err="1"/>
-              <a:t>int</a:t>
-            </a:r>
-            <a:r>
-              <a:rPr lang="fr-FR" dirty="0"/>
-              <a:t>/long</a:t>
-            </a:r>
-          </a:p>
-        </p:txBody>
-      </p:sp>
+              <a:rPr lang="fr-FR" dirty="0"/>
+              <a:t>Run/</a:t>
+            </a:r>
+            <a:r>
+              <a:rPr lang="fr-FR" dirty="0" err="1"/>
+              <a:t>Debug</a:t>
+            </a:r>
+            <a:r>
+              <a:rPr lang="fr-FR" dirty="0"/>
+              <a:t> </a:t>
+            </a:r>
+            <a:r>
+              <a:rPr lang="fr-FR" dirty="0" err="1"/>
+              <a:t>your</a:t>
+            </a:r>
+            <a:r>
+              <a:rPr lang="fr-FR" dirty="0"/>
+              <a:t> Test(s)</a:t>
+            </a:r>
+          </a:p>
+        </p:txBody>
+      </p:sp>
+      <p:pic>
+        <p:nvPicPr>
+          <p:cNvPr id="5" name="Picture 4">
+            <a:extLst>
+              <a:ext uri="{FF2B5EF4-FFF2-40B4-BE49-F238E27FC236}">
+                <a16:creationId xmlns:a16="http://schemas.microsoft.com/office/drawing/2014/main" id="{B818C38B-441D-8310-8864-D6D8296A45C6}"/>
+              </a:ext>
+            </a:extLst>
+          </p:cNvPr>
+          <p:cNvPicPr>
+            <a:picLocks noChangeAspect="1"/>
+          </p:cNvPicPr>
+          <p:nvPr/>
+        </p:nvPicPr>
+        <p:blipFill>
+          <a:blip r:embed="rId2"/>
+          <a:stretch>
+            <a:fillRect/>
+          </a:stretch>
+        </p:blipFill>
+        <p:spPr>
+          <a:xfrm>
+            <a:off x="1436569" y="1773640"/>
+            <a:ext cx="3646486" cy="1798476"/>
+          </a:xfrm>
+          <a:prstGeom prst="rect">
+            <a:avLst/>
+          </a:prstGeom>
+        </p:spPr>
+      </p:pic>
+      <p:pic>
+        <p:nvPicPr>
+          <p:cNvPr id="7" name="Picture 6">
+            <a:extLst>
+              <a:ext uri="{FF2B5EF4-FFF2-40B4-BE49-F238E27FC236}">
+                <a16:creationId xmlns:a16="http://schemas.microsoft.com/office/drawing/2014/main" id="{B74DB012-6DD7-89A6-2521-C50A5AB6283F}"/>
+              </a:ext>
+            </a:extLst>
+          </p:cNvPr>
+          <p:cNvPicPr>
+            <a:picLocks noChangeAspect="1"/>
+          </p:cNvPicPr>
+          <p:nvPr/>
+        </p:nvPicPr>
+        <p:blipFill>
+          <a:blip r:embed="rId3"/>
+          <a:stretch>
+            <a:fillRect/>
+          </a:stretch>
+        </p:blipFill>
+        <p:spPr>
+          <a:xfrm>
+            <a:off x="1338884" y="1296232"/>
+            <a:ext cx="2838696" cy="590601"/>
+          </a:xfrm>
+          <a:prstGeom prst="rect">
+            <a:avLst/>
+          </a:prstGeom>
+        </p:spPr>
+      </p:pic>
+      <p:sp>
+        <p:nvSpPr>
+          <p:cNvPr id="8" name="TextBox 7">
+            <a:extLst>
+              <a:ext uri="{FF2B5EF4-FFF2-40B4-BE49-F238E27FC236}">
+                <a16:creationId xmlns:a16="http://schemas.microsoft.com/office/drawing/2014/main" id="{E1C4DBD8-99AE-8F43-995C-8DE6DD469983}"/>
+              </a:ext>
+            </a:extLst>
+          </p:cNvPr>
+          <p:cNvSpPr txBox="1"/>
+          <p:nvPr/>
+        </p:nvSpPr>
+        <p:spPr>
+          <a:xfrm>
+            <a:off x="2107770" y="1000076"/>
+            <a:ext cx="2502352" cy="369332"/>
+          </a:xfrm>
+          <a:prstGeom prst="rect">
+            <a:avLst/>
+          </a:prstGeom>
+          <a:noFill/>
+        </p:spPr>
+        <p:txBody>
+          <a:bodyPr wrap="none" rtlCol="0">
+            <a:spAutoFit/>
+          </a:bodyPr>
+          <a:lstStyle/>
+          <a:p>
+            <a:r>
+              <a:rPr lang="fr-FR" dirty="0"/>
+              <a:t>run all tests </a:t>
+            </a:r>
+            <a:r>
+              <a:rPr lang="fr-FR" dirty="0" err="1"/>
+              <a:t>within</a:t>
+            </a:r>
+            <a:r>
+              <a:rPr lang="fr-FR" dirty="0"/>
+              <a:t> class</a:t>
+            </a:r>
+          </a:p>
+        </p:txBody>
+      </p:sp>
+      <p:sp>
+        <p:nvSpPr>
+          <p:cNvPr id="9" name="TextBox 8">
+            <a:extLst>
+              <a:ext uri="{FF2B5EF4-FFF2-40B4-BE49-F238E27FC236}">
+                <a16:creationId xmlns:a16="http://schemas.microsoft.com/office/drawing/2014/main" id="{EDF85D68-1F9B-A108-5B12-FB67B8038BB8}"/>
+              </a:ext>
+            </a:extLst>
+          </p:cNvPr>
+          <p:cNvSpPr txBox="1"/>
+          <p:nvPr/>
+        </p:nvSpPr>
+        <p:spPr>
+          <a:xfrm>
+            <a:off x="6341390" y="974215"/>
+            <a:ext cx="2848600" cy="369332"/>
+          </a:xfrm>
+          <a:prstGeom prst="rect">
+            <a:avLst/>
+          </a:prstGeom>
+          <a:noFill/>
+        </p:spPr>
+        <p:txBody>
+          <a:bodyPr wrap="none" rtlCol="0">
+            <a:spAutoFit/>
+          </a:bodyPr>
+          <a:lstStyle/>
+          <a:p>
+            <a:r>
+              <a:rPr lang="fr-FR" dirty="0"/>
+              <a:t>run a </a:t>
+            </a:r>
+            <a:r>
+              <a:rPr lang="fr-FR" dirty="0" err="1"/>
+              <a:t>specific</a:t>
+            </a:r>
+            <a:r>
+              <a:rPr lang="fr-FR" dirty="0"/>
+              <a:t> @Test </a:t>
+            </a:r>
+            <a:r>
+              <a:rPr lang="fr-FR" dirty="0" err="1"/>
+              <a:t>method</a:t>
+            </a:r>
+            <a:endParaRPr lang="fr-FR" dirty="0"/>
+          </a:p>
+        </p:txBody>
+      </p:sp>
+      <p:pic>
+        <p:nvPicPr>
+          <p:cNvPr id="11" name="Picture 10">
+            <a:extLst>
+              <a:ext uri="{FF2B5EF4-FFF2-40B4-BE49-F238E27FC236}">
+                <a16:creationId xmlns:a16="http://schemas.microsoft.com/office/drawing/2014/main" id="{678B64C9-C821-EE5E-EEAD-B2E9F72E24D5}"/>
+              </a:ext>
+            </a:extLst>
+          </p:cNvPr>
+          <p:cNvPicPr>
+            <a:picLocks noChangeAspect="1"/>
+          </p:cNvPicPr>
+          <p:nvPr/>
+        </p:nvPicPr>
+        <p:blipFill>
+          <a:blip r:embed="rId4"/>
+          <a:stretch>
+            <a:fillRect/>
+          </a:stretch>
+        </p:blipFill>
+        <p:spPr>
+          <a:xfrm>
+            <a:off x="6313191" y="1296232"/>
+            <a:ext cx="2876799" cy="522015"/>
+          </a:xfrm>
+          <a:prstGeom prst="rect">
+            <a:avLst/>
+          </a:prstGeom>
+        </p:spPr>
+      </p:pic>
+      <p:pic>
+        <p:nvPicPr>
+          <p:cNvPr id="13" name="Picture 12">
+            <a:extLst>
+              <a:ext uri="{FF2B5EF4-FFF2-40B4-BE49-F238E27FC236}">
+                <a16:creationId xmlns:a16="http://schemas.microsoft.com/office/drawing/2014/main" id="{1D3915A4-458F-15B6-17D1-95893FACC78A}"/>
+              </a:ext>
+            </a:extLst>
+          </p:cNvPr>
+          <p:cNvPicPr>
+            <a:picLocks noChangeAspect="1"/>
+          </p:cNvPicPr>
+          <p:nvPr/>
+        </p:nvPicPr>
+        <p:blipFill>
+          <a:blip r:embed="rId5"/>
+          <a:stretch>
+            <a:fillRect/>
+          </a:stretch>
+        </p:blipFill>
+        <p:spPr>
+          <a:xfrm>
+            <a:off x="6431118" y="1956046"/>
+            <a:ext cx="3532176" cy="1733700"/>
+          </a:xfrm>
+          <a:prstGeom prst="rect">
+            <a:avLst/>
+          </a:prstGeom>
+        </p:spPr>
+      </p:pic>
+      <p:pic>
+        <p:nvPicPr>
+          <p:cNvPr id="15" name="Picture 14">
+            <a:extLst>
+              <a:ext uri="{FF2B5EF4-FFF2-40B4-BE49-F238E27FC236}">
+                <a16:creationId xmlns:a16="http://schemas.microsoft.com/office/drawing/2014/main" id="{0C5C31C3-B1D1-2A92-7563-DD07A6385115}"/>
+              </a:ext>
+            </a:extLst>
+          </p:cNvPr>
+          <p:cNvPicPr>
+            <a:picLocks noChangeAspect="1"/>
+          </p:cNvPicPr>
+          <p:nvPr/>
+        </p:nvPicPr>
+        <p:blipFill>
+          <a:blip r:embed="rId6"/>
+          <a:stretch>
+            <a:fillRect/>
+          </a:stretch>
+        </p:blipFill>
+        <p:spPr>
+          <a:xfrm>
+            <a:off x="1613192" y="3936331"/>
+            <a:ext cx="3105419" cy="2800593"/>
+          </a:xfrm>
+          <a:prstGeom prst="rect">
+            <a:avLst/>
+          </a:prstGeom>
+        </p:spPr>
+      </p:pic>
+      <p:pic>
+        <p:nvPicPr>
+          <p:cNvPr id="17" name="Picture 16">
+            <a:extLst>
+              <a:ext uri="{FF2B5EF4-FFF2-40B4-BE49-F238E27FC236}">
+                <a16:creationId xmlns:a16="http://schemas.microsoft.com/office/drawing/2014/main" id="{CA26ABE6-B185-2554-E4A3-D49118C26111}"/>
+              </a:ext>
+            </a:extLst>
+          </p:cNvPr>
+          <p:cNvPicPr>
+            <a:picLocks noChangeAspect="1"/>
+          </p:cNvPicPr>
+          <p:nvPr/>
+        </p:nvPicPr>
+        <p:blipFill>
+          <a:blip r:embed="rId7"/>
+          <a:stretch>
+            <a:fillRect/>
+          </a:stretch>
+        </p:blipFill>
+        <p:spPr>
+          <a:xfrm>
+            <a:off x="5621004" y="3689746"/>
+            <a:ext cx="6085097" cy="3132091"/>
+          </a:xfrm>
+          <a:prstGeom prst="rect">
+            <a:avLst/>
+          </a:prstGeom>
+        </p:spPr>
+      </p:pic>
     </p:spTree>
     <p:extLst>
       <p:ext uri="{BB962C8B-B14F-4D97-AF65-F5344CB8AC3E}">
-        <p14:creationId xmlns:p14="http://schemas.microsoft.com/office/powerpoint/2010/main" val="710264245"/>
+        <p14:creationId xmlns:p14="http://schemas.microsoft.com/office/powerpoint/2010/main" val="2991352421"/>
       </p:ext>
     </p:extLst>
   </p:cSld>
@@ -4175,7 +9125,7 @@
           <p:cNvPr id="2" name="Title 1">
             <a:extLst>
               <a:ext uri="{FF2B5EF4-FFF2-40B4-BE49-F238E27FC236}">
-                <a16:creationId xmlns:a16="http://schemas.microsoft.com/office/drawing/2014/main" id="{992F7A9B-943A-8AAF-9530-1E64E60E08E9}"/>
+                <a16:creationId xmlns:a16="http://schemas.microsoft.com/office/drawing/2014/main" id="{D7F3E679-996D-304E-4C92-B9669BBC0ED1}"/>
               </a:ext>
             </a:extLst>
           </p:cNvPr>
@@ -4194,34 +9144,85 @@
             <a:pPr algn="ctr"/>
             <a:r>
               <a:rPr lang="fr-FR" dirty="0"/>
-              <a:t>Use Java API to </a:t>
-            </a:r>
-            <a:r>
-              <a:rPr lang="fr-FR" dirty="0" err="1"/>
-              <a:t>compute</a:t>
-            </a:r>
-            <a:r>
-              <a:rPr lang="fr-FR" dirty="0"/>
-              <a:t> "SHA-256" hash</a:t>
+              <a:t>Ex 2 : How to </a:t>
+            </a:r>
+            <a:r>
+              <a:rPr lang="fr-FR" dirty="0" err="1"/>
+              <a:t>efficiently</a:t>
+            </a:r>
+            <a:r>
+              <a:rPr lang="fr-FR" dirty="0"/>
+              <a:t> </a:t>
+            </a:r>
+            <a:r>
+              <a:rPr lang="fr-FR" dirty="0" err="1"/>
+              <a:t>raise</a:t>
+            </a:r>
+            <a:r>
+              <a:rPr lang="fr-FR" dirty="0"/>
+              <a:t> </a:t>
+            </a:r>
+            <a:r>
+              <a:rPr lang="fr-FR" dirty="0" err="1"/>
+              <a:t>number</a:t>
+            </a:r>
+            <a:r>
+              <a:rPr lang="fr-FR" dirty="0"/>
+              <a:t> </a:t>
             </a:r>
             <a:br>
               <a:rPr lang="fr-FR" dirty="0"/>
             </a:br>
             <a:r>
               <a:rPr lang="fr-FR" dirty="0"/>
-              <a:t>for a </a:t>
-            </a:r>
-            <a:r>
-              <a:rPr lang="fr-FR" dirty="0" err="1"/>
-              <a:t>given</a:t>
-            </a:r>
-            <a:r>
-              <a:rPr lang="fr-FR" dirty="0"/>
-              <a:t> String,  compare </a:t>
-            </a:r>
-            <a:r>
-              <a:rPr lang="fr-FR" dirty="0" err="1"/>
-              <a:t>with</a:t>
+              <a:t>to </a:t>
+            </a:r>
+            <a:r>
+              <a:rPr lang="fr-FR" dirty="0" err="1"/>
+              <a:t>powers</a:t>
+            </a:r>
+            <a:r>
+              <a:rPr lang="fr-FR" dirty="0"/>
+              <a:t> 2, 4, 8, 16 ... ?</a:t>
+            </a:r>
+          </a:p>
+        </p:txBody>
+      </p:sp>
+      <p:sp>
+        <p:nvSpPr>
+          <p:cNvPr id="4" name="TextBox 3">
+            <a:extLst>
+              <a:ext uri="{FF2B5EF4-FFF2-40B4-BE49-F238E27FC236}">
+                <a16:creationId xmlns:a16="http://schemas.microsoft.com/office/drawing/2014/main" id="{ED8DF783-2BE9-8F44-00C2-9B22892B23C8}"/>
+              </a:ext>
+            </a:extLst>
+          </p:cNvPr>
+          <p:cNvSpPr txBox="1"/>
+          <p:nvPr/>
+        </p:nvSpPr>
+        <p:spPr>
+          <a:xfrm>
+            <a:off x="2970508" y="3135824"/>
+            <a:ext cx="4917244" cy="1754326"/>
+          </a:xfrm>
+          <a:prstGeom prst="rect">
+            <a:avLst/>
+          </a:prstGeom>
+          <a:noFill/>
+        </p:spPr>
+        <p:txBody>
+          <a:bodyPr wrap="none" rtlCol="0">
+            <a:spAutoFit/>
+          </a:bodyPr>
+          <a:lstStyle/>
+          <a:p>
+            <a:r>
+              <a:rPr lang="fr-FR" dirty="0"/>
+              <a:t>Write a Test </a:t>
+            </a:r>
+            <a:r>
+              <a:rPr lang="fr-FR" dirty="0" err="1"/>
+              <a:t>that</a:t>
             </a:r>
             <a:r>
               <a:rPr lang="fr-FR" dirty="0"/>
@@ -4229,19 +9230,64 @@
             </a:r>
             <a:r>
               <a:rPr lang="fr-FR" dirty="0" err="1"/>
-              <a:t>bash</a:t>
-            </a:r>
-            <a:r>
-              <a:rPr lang="fr-FR" dirty="0"/>
-              <a:t> command</a:t>
-            </a:r>
+              <a:t>raise</a:t>
+            </a:r>
+            <a:r>
+              <a:rPr lang="fr-FR" dirty="0"/>
+              <a:t>  n ^ 1048576   modulo P</a:t>
+            </a:r>
+          </a:p>
+          <a:p>
+            <a:endParaRPr lang="fr-FR" dirty="0"/>
+          </a:p>
+          <a:p>
+            <a:r>
+              <a:rPr lang="fr-FR" dirty="0"/>
+              <a:t>1 048 576 = 1 </a:t>
+            </a:r>
+            <a:r>
+              <a:rPr lang="fr-FR" dirty="0" err="1"/>
+              <a:t>mega</a:t>
+            </a:r>
+            <a:r>
+              <a:rPr lang="fr-FR" dirty="0"/>
+              <a:t> (~1e6) =  1024*1024  = 2^20 </a:t>
+            </a:r>
+          </a:p>
+          <a:p>
+            <a:endParaRPr lang="fr-FR" dirty="0"/>
+          </a:p>
+          <a:p>
+            <a:r>
+              <a:rPr lang="fr-FR" dirty="0"/>
+              <a:t>How </a:t>
+            </a:r>
+            <a:r>
+              <a:rPr lang="fr-FR" dirty="0" err="1"/>
+              <a:t>many</a:t>
+            </a:r>
+            <a:r>
+              <a:rPr lang="fr-FR" dirty="0"/>
+              <a:t> multiplications and modulos </a:t>
+            </a:r>
+            <a:r>
+              <a:rPr lang="fr-FR" dirty="0" err="1"/>
+              <a:t>used</a:t>
+            </a:r>
+            <a:r>
+              <a:rPr lang="fr-FR" dirty="0"/>
+              <a:t> ?</a:t>
+            </a:r>
+          </a:p>
+          <a:p>
+            <a:endParaRPr lang="fr-FR" dirty="0"/>
           </a:p>
         </p:txBody>
       </p:sp>
     </p:spTree>
     <p:extLst>
       <p:ext uri="{BB962C8B-B14F-4D97-AF65-F5344CB8AC3E}">
-        <p14:creationId xmlns:p14="http://schemas.microsoft.com/office/powerpoint/2010/main" val="2872483861"/>
+        <p14:creationId xmlns:p14="http://schemas.microsoft.com/office/powerpoint/2010/main" val="3728583857"/>
       </p:ext>
     </p:extLst>
   </p:cSld>
@@ -4273,7 +9319,7 @@
           <p:cNvPr id="2" name="Title 1">
             <a:extLst>
               <a:ext uri="{FF2B5EF4-FFF2-40B4-BE49-F238E27FC236}">
-                <a16:creationId xmlns:a16="http://schemas.microsoft.com/office/drawing/2014/main" id="{20F05303-E801-D6FD-3924-9D011357FD66}"/>
+                <a16:creationId xmlns:a16="http://schemas.microsoft.com/office/drawing/2014/main" id="{3D7230A3-6C31-0F8D-A979-9F7C05971910}"/>
               </a:ext>
             </a:extLst>
           </p:cNvPr>
@@ -4284,7 +9330,12 @@
             <p:ph type="title"/>
           </p:nvPr>
         </p:nvSpPr>
-        <p:spPr/>
+        <p:spPr>
+          <a:xfrm>
+            <a:off x="838200" y="365125"/>
+            <a:ext cx="10515600" cy="1747811"/>
+          </a:xfrm>
+        </p:spPr>
         <p:txBody>
           <a:bodyPr/>
           <a:lstStyle/>
@@ -4292,11 +9343,27 @@
             <a:pPr algn="ctr"/>
             <a:r>
               <a:rPr lang="fr-FR" dirty="0"/>
-              <a:t>Use Java API to </a:t>
-            </a:r>
-            <a:r>
-              <a:rPr lang="fr-FR" dirty="0" err="1"/>
-              <a:t>encrypt</a:t>
+              <a:t>(</a:t>
+            </a:r>
+            <a:r>
+              <a:rPr lang="fr-FR" dirty="0" err="1"/>
+              <a:t>Optional</a:t>
+            </a:r>
+            <a:r>
+              <a:rPr lang="fr-FR" dirty="0"/>
+              <a:t>) Ex 3: Write code to </a:t>
+            </a:r>
+            <a:r>
+              <a:rPr lang="fr-FR" dirty="0" err="1"/>
+              <a:t>efficiently</a:t>
+            </a:r>
+            <a:r>
+              <a:rPr lang="fr-FR" dirty="0"/>
+              <a:t> </a:t>
+            </a:r>
+            <a:r>
+              <a:rPr lang="fr-FR" dirty="0" err="1"/>
+              <a:t>raise</a:t>
             </a:r>
             <a:r>
               <a:rPr lang="fr-FR" dirty="0"/>
@@ -4304,7 +9371,58 @@
             </a:r>
             <a:r>
               <a:rPr lang="fr-FR" dirty="0" err="1"/>
-              <a:t>text</a:t>
+              <a:t>number</a:t>
+            </a:r>
+            <a:r>
+              <a:rPr lang="fr-FR" dirty="0"/>
+              <a:t> to power N="1000 000 000 000", </a:t>
+            </a:r>
+            <a:r>
+              <a:rPr lang="fr-FR" dirty="0" err="1"/>
+              <a:t>with</a:t>
+            </a:r>
+            <a:r>
+              <a:rPr lang="fr-FR" dirty="0"/>
+              <a:t> modulo "P"</a:t>
+            </a:r>
+          </a:p>
+        </p:txBody>
+      </p:sp>
+      <p:sp>
+        <p:nvSpPr>
+          <p:cNvPr id="4" name="TextBox 3">
+            <a:extLst>
+              <a:ext uri="{FF2B5EF4-FFF2-40B4-BE49-F238E27FC236}">
+                <a16:creationId xmlns:a16="http://schemas.microsoft.com/office/drawing/2014/main" id="{920E723A-9B85-9FD1-7F99-26D1C9F623CA}"/>
+              </a:ext>
+            </a:extLst>
+          </p:cNvPr>
+          <p:cNvSpPr txBox="1"/>
+          <p:nvPr/>
+        </p:nvSpPr>
+        <p:spPr>
+          <a:xfrm>
+            <a:off x="3188305" y="3323771"/>
+            <a:ext cx="7087809" cy="1477328"/>
+          </a:xfrm>
+          <a:prstGeom prst="rect">
+            <a:avLst/>
+          </a:prstGeom>
+          <a:noFill/>
+        </p:spPr>
+        <p:txBody>
+          <a:bodyPr wrap="square" rtlCol="0">
+            <a:spAutoFit/>
+          </a:bodyPr>
+          <a:lstStyle/>
+          <a:p>
+            <a:r>
+              <a:rPr lang="fr-FR" dirty="0"/>
+              <a:t>do </a:t>
+            </a:r>
+            <a:r>
+              <a:rPr lang="fr-FR" dirty="0" err="1"/>
+              <a:t>you</a:t>
             </a:r>
             <a:r>
               <a:rPr lang="fr-FR" dirty="0"/>
@@ -4312,48 +9430,61 @@
             </a:r>
             <a:r>
               <a:rPr lang="fr-FR" dirty="0" err="1"/>
-              <a:t>then</a:t>
-            </a:r>
-            <a:r>
-              <a:rPr lang="fr-FR" dirty="0"/>
-              <a:t> </a:t>
-            </a:r>
-            <a:r>
-              <a:rPr lang="fr-FR" dirty="0" err="1"/>
-              <a:t>decrypt</a:t>
-            </a:r>
-            <a:r>
-              <a:rPr lang="fr-FR" dirty="0"/>
-              <a:t>, </a:t>
-            </a:r>
-            <a:r>
-              <a:rPr lang="fr-FR" dirty="0" err="1"/>
-              <a:t>with</a:t>
-            </a:r>
-            <a:r>
-              <a:rPr lang="fr-FR" dirty="0"/>
-              <a:t> a </a:t>
-            </a:r>
-            <a:r>
-              <a:rPr lang="fr-FR" dirty="0" err="1"/>
-              <a:t>Symmetric</a:t>
-            </a:r>
-            <a:r>
-              <a:rPr lang="fr-FR" dirty="0"/>
-              <a:t> key </a:t>
-            </a:r>
-            <a:r>
-              <a:rPr lang="fr-FR" dirty="0" err="1"/>
-              <a:t>algorithm</a:t>
-            </a:r>
+              <a:t>need</a:t>
+            </a:r>
+            <a:r>
+              <a:rPr lang="fr-FR" dirty="0"/>
+              <a:t>  1 trillions multiplications ?</a:t>
+            </a:r>
+          </a:p>
+          <a:p>
             <a:endParaRPr lang="fr-FR" dirty="0"/>
+          </a:p>
+          <a:p>
+            <a:r>
+              <a:rPr lang="fr-FR" dirty="0" err="1"/>
+              <a:t>so</a:t>
+            </a:r>
+            <a:r>
+              <a:rPr lang="fr-FR" dirty="0"/>
+              <a:t> how </a:t>
+            </a:r>
+            <a:r>
+              <a:rPr lang="fr-FR" dirty="0" err="1"/>
+              <a:t>many</a:t>
+            </a:r>
+            <a:r>
+              <a:rPr lang="fr-FR" dirty="0"/>
+              <a:t> multiplications?</a:t>
+            </a:r>
+          </a:p>
+          <a:p>
+            <a:endParaRPr lang="fr-FR" dirty="0"/>
+          </a:p>
+          <a:p>
+            <a:r>
+              <a:rPr lang="fr-FR" dirty="0" err="1"/>
+              <a:t>decompose</a:t>
+            </a:r>
+            <a:r>
+              <a:rPr lang="fr-FR" dirty="0"/>
+              <a:t> N in base 2  ( N = a0 + a1 . 2 + a2 2^2 + a3 2^3 + ..  </a:t>
+            </a:r>
+            <a:r>
+              <a:rPr lang="fr-FR" dirty="0" err="1"/>
+              <a:t>ak</a:t>
+            </a:r>
+            <a:r>
+              <a:rPr lang="fr-FR" dirty="0"/>
+              <a:t> 2^k )</a:t>
+            </a:r>
           </a:p>
         </p:txBody>
       </p:sp>
     </p:spTree>
     <p:extLst>
       <p:ext uri="{BB962C8B-B14F-4D97-AF65-F5344CB8AC3E}">
-        <p14:creationId xmlns:p14="http://schemas.microsoft.com/office/powerpoint/2010/main" val="699622020"/>
+        <p14:creationId xmlns:p14="http://schemas.microsoft.com/office/powerpoint/2010/main" val="2599333629"/>
       </p:ext>
     </p:extLst>
   </p:cSld>
@@ -4368,13 +9499,7 @@
   <p:cSld>
     <p:spTree>
       <p:nvGrpSpPr>
-        <p:cNvPr id="1" name="">
-          <a:extLst>
-            <a:ext uri="{FF2B5EF4-FFF2-40B4-BE49-F238E27FC236}">
-              <a16:creationId xmlns:a16="http://schemas.microsoft.com/office/drawing/2014/main" id="{55E8C4D1-2243-AF58-1C7F-E9537F751E69}"/>
-            </a:ext>
-          </a:extLst>
-        </p:cNvPr>
+        <p:cNvPr id="1" name=""/>
         <p:cNvGrpSpPr/>
         <p:nvPr/>
       </p:nvGrpSpPr>
@@ -4391,7 +9516,7 @@
           <p:cNvPr id="2" name="Title 1">
             <a:extLst>
               <a:ext uri="{FF2B5EF4-FFF2-40B4-BE49-F238E27FC236}">
-                <a16:creationId xmlns:a16="http://schemas.microsoft.com/office/drawing/2014/main" id="{F51E8B4C-8161-151E-AE97-07A1F55EECE2}"/>
+                <a16:creationId xmlns:a16="http://schemas.microsoft.com/office/drawing/2014/main" id="{EE1634C2-4C49-F1C3-B2FF-7D3995E88F49}"/>
               </a:ext>
             </a:extLst>
           </p:cNvPr>
@@ -4410,27 +9535,69 @@
             <a:pPr algn="ctr"/>
             <a:r>
               <a:rPr lang="fr-FR" dirty="0"/>
-              <a:t>Use Java API to </a:t>
-            </a:r>
-            <a:r>
-              <a:rPr lang="fr-FR" dirty="0" err="1"/>
-              <a:t>encrypt</a:t>
-            </a:r>
-            <a:r>
-              <a:rPr lang="fr-FR" dirty="0"/>
-              <a:t> a </a:t>
-            </a:r>
-            <a:r>
-              <a:rPr lang="fr-FR" dirty="0" err="1"/>
-              <a:t>text</a:t>
+              <a:t>Ex 4 : code to use java </a:t>
+            </a:r>
+            <a:r>
+              <a:rPr lang="fr-FR" dirty="0" err="1"/>
+              <a:t>BigInteger</a:t>
             </a:r>
             <a:r>
               <a:rPr lang="fr-FR" dirty="0"/>
               <a:t> </a:t>
             </a:r>
-            <a:r>
-              <a:rPr lang="fr-FR" dirty="0" err="1"/>
-              <a:t>then</a:t>
+            <a:br>
+              <a:rPr lang="fr-FR" dirty="0"/>
+            </a:br>
+            <a:r>
+              <a:rPr lang="fr-FR" dirty="0" err="1"/>
+              <a:t>instead</a:t>
+            </a:r>
+            <a:r>
+              <a:rPr lang="fr-FR" dirty="0"/>
+              <a:t> of </a:t>
+            </a:r>
+            <a:r>
+              <a:rPr lang="fr-FR" dirty="0" err="1"/>
+              <a:t>int</a:t>
+            </a:r>
+            <a:r>
+              <a:rPr lang="fr-FR" dirty="0"/>
+              <a:t>/long</a:t>
+            </a:r>
+          </a:p>
+        </p:txBody>
+      </p:sp>
+      <p:sp>
+        <p:nvSpPr>
+          <p:cNvPr id="4" name="TextBox 3">
+            <a:extLst>
+              <a:ext uri="{FF2B5EF4-FFF2-40B4-BE49-F238E27FC236}">
+                <a16:creationId xmlns:a16="http://schemas.microsoft.com/office/drawing/2014/main" id="{8E4EFDB4-A003-E1D2-F35D-64F2362A8583}"/>
+              </a:ext>
+            </a:extLst>
+          </p:cNvPr>
+          <p:cNvSpPr txBox="1"/>
+          <p:nvPr/>
+        </p:nvSpPr>
+        <p:spPr>
+          <a:xfrm>
+            <a:off x="2448733" y="2645044"/>
+            <a:ext cx="5600123" cy="369332"/>
+          </a:xfrm>
+          <a:prstGeom prst="rect">
+            <a:avLst/>
+          </a:prstGeom>
+          <a:noFill/>
+        </p:spPr>
+        <p:txBody>
+          <a:bodyPr wrap="none" rtlCol="0">
+            <a:spAutoFit/>
+          </a:bodyPr>
+          <a:lstStyle/>
+          <a:p>
+            <a:r>
+              <a:rPr lang="fr-FR" dirty="0" err="1"/>
+              <a:t>cf</a:t>
             </a:r>
             <a:r>
               <a:rPr lang="fr-FR" dirty="0"/>
@@ -4438,40 +9605,65 @@
             </a:r>
             <a:r>
               <a:rPr lang="fr-FR" dirty="0" err="1"/>
-              <a:t>decrypt</a:t>
-            </a:r>
-            <a:r>
-              <a:rPr lang="fr-FR" dirty="0"/>
-              <a:t>, </a:t>
-            </a:r>
-            <a:r>
-              <a:rPr lang="fr-FR" dirty="0" err="1"/>
-              <a:t>with</a:t>
-            </a:r>
-            <a:r>
-              <a:rPr lang="fr-FR" dirty="0"/>
-              <a:t> RSA </a:t>
-            </a:r>
-            <a:r>
-              <a:rPr lang="fr-FR" dirty="0" err="1"/>
-              <a:t>Assymetric</a:t>
-            </a:r>
-            <a:r>
-              <a:rPr lang="fr-FR" dirty="0"/>
-              <a:t> </a:t>
-            </a:r>
-            <a:r>
-              <a:rPr lang="fr-FR" dirty="0" err="1"/>
-              <a:t>algorithm</a:t>
-            </a:r>
-            <a:endParaRPr lang="fr-FR" dirty="0"/>
-          </a:p>
-        </p:txBody>
-      </p:sp>
+              <a:t>built-in</a:t>
+            </a:r>
+            <a:r>
+              <a:rPr lang="fr-FR" dirty="0"/>
+              <a:t> code "</a:t>
+            </a:r>
+            <a:r>
+              <a:rPr lang="fr-FR" dirty="0" err="1"/>
+              <a:t>BigInteger.modPow</a:t>
+            </a:r>
+            <a:r>
+              <a:rPr lang="fr-FR" dirty="0"/>
+              <a:t>(</a:t>
+            </a:r>
+            <a:r>
+              <a:rPr lang="fr-FR" dirty="0" err="1"/>
+              <a:t>exponent</a:t>
+            </a:r>
+            <a:r>
+              <a:rPr lang="fr-FR" dirty="0"/>
+              <a:t>, modulo)"</a:t>
+            </a:r>
+          </a:p>
+        </p:txBody>
+      </p:sp>
+      <p:pic>
+        <p:nvPicPr>
+          <p:cNvPr id="6" name="Picture 5">
+            <a:extLst>
+              <a:ext uri="{FF2B5EF4-FFF2-40B4-BE49-F238E27FC236}">
+                <a16:creationId xmlns:a16="http://schemas.microsoft.com/office/drawing/2014/main" id="{C5E70F83-6DC4-B2C7-9955-291F08D155FE}"/>
+              </a:ext>
+            </a:extLst>
+          </p:cNvPr>
+          <p:cNvPicPr>
+            <a:picLocks noChangeAspect="1"/>
+          </p:cNvPicPr>
+          <p:nvPr/>
+        </p:nvPicPr>
+        <p:blipFill>
+          <a:blip r:embed="rId2"/>
+          <a:stretch>
+            <a:fillRect/>
+          </a:stretch>
+        </p:blipFill>
+        <p:spPr>
+          <a:xfrm>
+            <a:off x="2496746" y="3429000"/>
+            <a:ext cx="7456816" cy="2667231"/>
+          </a:xfrm>
+          <a:prstGeom prst="rect">
+            <a:avLst/>
+          </a:prstGeom>
+        </p:spPr>
+      </p:pic>
     </p:spTree>
     <p:extLst>
       <p:ext uri="{BB962C8B-B14F-4D97-AF65-F5344CB8AC3E}">
-        <p14:creationId xmlns:p14="http://schemas.microsoft.com/office/powerpoint/2010/main" val="4223161111"/>
+        <p14:creationId xmlns:p14="http://schemas.microsoft.com/office/powerpoint/2010/main" val="196549076"/>
       </p:ext>
     </p:extLst>
   </p:cSld>

--- a/security/hands-on/Security-TD4-cryptography-prime-numbers.pptx
+++ b/security/hands-on/Security-TD4-cryptography-prime-numbers.pptx
@@ -289,7 +289,7 @@
           <a:p>
             <a:fld id="{DDBEF2CB-837B-4387-A0FB-31C1D04DA30F}" type="datetimeFigureOut">
               <a:rPr lang="fr-FR" smtClean="0"/>
-              <a:t>12/03/2025</a:t>
+              <a:t>24/02/2026</a:t>
             </a:fld>
             <a:endParaRPr lang="fr-FR"/>
           </a:p>
@@ -343,7 +343,7 @@
           <a:p>
             <a:fld id="{7633C90B-B0C1-49A8-AAAF-A461FF516BB0}" type="slidenum">
               <a:rPr lang="fr-FR" smtClean="0"/>
-              <a:t>‹#›</a:t>
+              <a:t>‹N°›</a:t>
             </a:fld>
             <a:endParaRPr lang="fr-FR"/>
           </a:p>
@@ -489,7 +489,7 @@
           <a:p>
             <a:fld id="{DDBEF2CB-837B-4387-A0FB-31C1D04DA30F}" type="datetimeFigureOut">
               <a:rPr lang="fr-FR" smtClean="0"/>
-              <a:t>12/03/2025</a:t>
+              <a:t>24/02/2026</a:t>
             </a:fld>
             <a:endParaRPr lang="fr-FR"/>
           </a:p>
@@ -543,7 +543,7 @@
           <a:p>
             <a:fld id="{7633C90B-B0C1-49A8-AAAF-A461FF516BB0}" type="slidenum">
               <a:rPr lang="fr-FR" smtClean="0"/>
-              <a:t>‹#›</a:t>
+              <a:t>‹N°›</a:t>
             </a:fld>
             <a:endParaRPr lang="fr-FR"/>
           </a:p>
@@ -699,7 +699,7 @@
           <a:p>
             <a:fld id="{DDBEF2CB-837B-4387-A0FB-31C1D04DA30F}" type="datetimeFigureOut">
               <a:rPr lang="fr-FR" smtClean="0"/>
-              <a:t>12/03/2025</a:t>
+              <a:t>24/02/2026</a:t>
             </a:fld>
             <a:endParaRPr lang="fr-FR"/>
           </a:p>
@@ -753,7 +753,7 @@
           <a:p>
             <a:fld id="{7633C90B-B0C1-49A8-AAAF-A461FF516BB0}" type="slidenum">
               <a:rPr lang="fr-FR" smtClean="0"/>
-              <a:t>‹#›</a:t>
+              <a:t>‹N°›</a:t>
             </a:fld>
             <a:endParaRPr lang="fr-FR"/>
           </a:p>
@@ -899,7 +899,7 @@
           <a:p>
             <a:fld id="{DDBEF2CB-837B-4387-A0FB-31C1D04DA30F}" type="datetimeFigureOut">
               <a:rPr lang="fr-FR" smtClean="0"/>
-              <a:t>12/03/2025</a:t>
+              <a:t>24/02/2026</a:t>
             </a:fld>
             <a:endParaRPr lang="fr-FR"/>
           </a:p>
@@ -953,7 +953,7 @@
           <a:p>
             <a:fld id="{7633C90B-B0C1-49A8-AAAF-A461FF516BB0}" type="slidenum">
               <a:rPr lang="fr-FR" smtClean="0"/>
-              <a:t>‹#›</a:t>
+              <a:t>‹N°›</a:t>
             </a:fld>
             <a:endParaRPr lang="fr-FR"/>
           </a:p>
@@ -1175,7 +1175,7 @@
           <a:p>
             <a:fld id="{DDBEF2CB-837B-4387-A0FB-31C1D04DA30F}" type="datetimeFigureOut">
               <a:rPr lang="fr-FR" smtClean="0"/>
-              <a:t>12/03/2025</a:t>
+              <a:t>24/02/2026</a:t>
             </a:fld>
             <a:endParaRPr lang="fr-FR"/>
           </a:p>
@@ -1229,7 +1229,7 @@
           <a:p>
             <a:fld id="{7633C90B-B0C1-49A8-AAAF-A461FF516BB0}" type="slidenum">
               <a:rPr lang="fr-FR" smtClean="0"/>
-              <a:t>‹#›</a:t>
+              <a:t>‹N°›</a:t>
             </a:fld>
             <a:endParaRPr lang="fr-FR"/>
           </a:p>
@@ -1443,7 +1443,7 @@
           <a:p>
             <a:fld id="{DDBEF2CB-837B-4387-A0FB-31C1D04DA30F}" type="datetimeFigureOut">
               <a:rPr lang="fr-FR" smtClean="0"/>
-              <a:t>12/03/2025</a:t>
+              <a:t>24/02/2026</a:t>
             </a:fld>
             <a:endParaRPr lang="fr-FR"/>
           </a:p>
@@ -1497,7 +1497,7 @@
           <a:p>
             <a:fld id="{7633C90B-B0C1-49A8-AAAF-A461FF516BB0}" type="slidenum">
               <a:rPr lang="fr-FR" smtClean="0"/>
-              <a:t>‹#›</a:t>
+              <a:t>‹N°›</a:t>
             </a:fld>
             <a:endParaRPr lang="fr-FR"/>
           </a:p>
@@ -1858,7 +1858,7 @@
           <a:p>
             <a:fld id="{DDBEF2CB-837B-4387-A0FB-31C1D04DA30F}" type="datetimeFigureOut">
               <a:rPr lang="fr-FR" smtClean="0"/>
-              <a:t>12/03/2025</a:t>
+              <a:t>24/02/2026</a:t>
             </a:fld>
             <a:endParaRPr lang="fr-FR"/>
           </a:p>
@@ -1912,7 +1912,7 @@
           <a:p>
             <a:fld id="{7633C90B-B0C1-49A8-AAAF-A461FF516BB0}" type="slidenum">
               <a:rPr lang="fr-FR" smtClean="0"/>
-              <a:t>‹#›</a:t>
+              <a:t>‹N°›</a:t>
             </a:fld>
             <a:endParaRPr lang="fr-FR"/>
           </a:p>
@@ -2000,7 +2000,7 @@
           <a:p>
             <a:fld id="{DDBEF2CB-837B-4387-A0FB-31C1D04DA30F}" type="datetimeFigureOut">
               <a:rPr lang="fr-FR" smtClean="0"/>
-              <a:t>12/03/2025</a:t>
+              <a:t>24/02/2026</a:t>
             </a:fld>
             <a:endParaRPr lang="fr-FR"/>
           </a:p>
@@ -2054,7 +2054,7 @@
           <a:p>
             <a:fld id="{7633C90B-B0C1-49A8-AAAF-A461FF516BB0}" type="slidenum">
               <a:rPr lang="fr-FR" smtClean="0"/>
-              <a:t>‹#›</a:t>
+              <a:t>‹N°›</a:t>
             </a:fld>
             <a:endParaRPr lang="fr-FR"/>
           </a:p>
@@ -2113,7 +2113,7 @@
           <a:p>
             <a:fld id="{DDBEF2CB-837B-4387-A0FB-31C1D04DA30F}" type="datetimeFigureOut">
               <a:rPr lang="fr-FR" smtClean="0"/>
-              <a:t>12/03/2025</a:t>
+              <a:t>24/02/2026</a:t>
             </a:fld>
             <a:endParaRPr lang="fr-FR"/>
           </a:p>
@@ -2167,7 +2167,7 @@
           <a:p>
             <a:fld id="{7633C90B-B0C1-49A8-AAAF-A461FF516BB0}" type="slidenum">
               <a:rPr lang="fr-FR" smtClean="0"/>
-              <a:t>‹#›</a:t>
+              <a:t>‹N°›</a:t>
             </a:fld>
             <a:endParaRPr lang="fr-FR"/>
           </a:p>
@@ -2426,7 +2426,7 @@
           <a:p>
             <a:fld id="{DDBEF2CB-837B-4387-A0FB-31C1D04DA30F}" type="datetimeFigureOut">
               <a:rPr lang="fr-FR" smtClean="0"/>
-              <a:t>12/03/2025</a:t>
+              <a:t>24/02/2026</a:t>
             </a:fld>
             <a:endParaRPr lang="fr-FR"/>
           </a:p>
@@ -2480,7 +2480,7 @@
           <a:p>
             <a:fld id="{7633C90B-B0C1-49A8-AAAF-A461FF516BB0}" type="slidenum">
               <a:rPr lang="fr-FR" smtClean="0"/>
-              <a:t>‹#›</a:t>
+              <a:t>‹N°›</a:t>
             </a:fld>
             <a:endParaRPr lang="fr-FR"/>
           </a:p>
@@ -2715,7 +2715,7 @@
           <a:p>
             <a:fld id="{DDBEF2CB-837B-4387-A0FB-31C1D04DA30F}" type="datetimeFigureOut">
               <a:rPr lang="fr-FR" smtClean="0"/>
-              <a:t>12/03/2025</a:t>
+              <a:t>24/02/2026</a:t>
             </a:fld>
             <a:endParaRPr lang="fr-FR"/>
           </a:p>
@@ -2769,7 +2769,7 @@
           <a:p>
             <a:fld id="{7633C90B-B0C1-49A8-AAAF-A461FF516BB0}" type="slidenum">
               <a:rPr lang="fr-FR" smtClean="0"/>
-              <a:t>‹#›</a:t>
+              <a:t>‹N°›</a:t>
             </a:fld>
             <a:endParaRPr lang="fr-FR"/>
           </a:p>
@@ -2958,7 +2958,7 @@
           <a:p>
             <a:fld id="{DDBEF2CB-837B-4387-A0FB-31C1D04DA30F}" type="datetimeFigureOut">
               <a:rPr lang="fr-FR" smtClean="0"/>
-              <a:t>12/03/2025</a:t>
+              <a:t>24/02/2026</a:t>
             </a:fld>
             <a:endParaRPr lang="fr-FR"/>
           </a:p>
@@ -3048,7 +3048,7 @@
           <a:p>
             <a:fld id="{7633C90B-B0C1-49A8-AAAF-A461FF516BB0}" type="slidenum">
               <a:rPr lang="fr-FR" smtClean="0"/>
-              <a:t>‹#›</a:t>
+              <a:t>‹N°›</a:t>
             </a:fld>
             <a:endParaRPr lang="fr-FR"/>
           </a:p>
@@ -3440,7 +3440,9 @@
         </p:nvSpPr>
         <p:spPr/>
         <p:txBody>
-          <a:bodyPr/>
+          <a:bodyPr>
+            <a:normAutofit lnSpcReduction="10000"/>
+          </a:bodyPr>
           <a:lstStyle/>
           <a:p>
             <a:r>
@@ -3449,7 +3451,7 @@
             </a:r>
             <a:r>
               <a:rPr lang="fr-FR" dirty="0"/>
-              <a:t> 2025</a:t>
+              <a:t> 2026</a:t>
             </a:r>
           </a:p>
           <a:p>
@@ -8485,12 +8487,14 @@
         </p:nvSpPr>
         <p:spPr>
           <a:xfrm>
-            <a:off x="838200" y="101653"/>
+            <a:off x="838200" y="87512"/>
             <a:ext cx="10515600" cy="2238591"/>
           </a:xfrm>
         </p:spPr>
         <p:txBody>
-          <a:bodyPr/>
+          <a:bodyPr>
+            <a:normAutofit fontScale="90000"/>
+          </a:bodyPr>
           <a:lstStyle/>
           <a:p>
             <a:pPr algn="ctr"/>
